--- a/ALG Team 04 - Teilaufgabe1.pptx
+++ b/ALG Team 04 - Teilaufgabe1.pptx
@@ -132,9 +132,7 @@
 <file path=ppt/revisionInfo.xml><?xml version="1.0" encoding="utf-8"?>
 <p1510:revInfo xmlns:a="http://schemas.openxmlformats.org/drawingml/2006/main" xmlns:r="http://schemas.openxmlformats.org/officeDocument/2006/relationships" xmlns:p1510="http://schemas.microsoft.com/office/powerpoint/2015/10/main">
   <p1510:revLst>
-    <p1510:client id="{78388CEE-AEBA-409E-ABCC-D6F035F718C1}" v="2516" dt="2026-10-24T17:47:01.383"/>
-    <p1510:client id="{D4143401-CCA8-41D9-9753-69B0A451A157}" v="60" dt="2026-10-24T14:49:24.329"/>
-    <p1510:client id="{DE65B46C-EC4D-D382-664F-53F5871B3D52}" v="2" dt="2026-10-25T18:47:45.156"/>
+    <p1510:client id="{D4143401-CCA8-41D9-9753-69B0A451A157}" v="80" dt="2026-10-27T14:53:35.440"/>
   </p1510:revLst>
 </p1510:revInfo>
 </file>
@@ -194,14 +192,6 @@
             <ac:spMk id="3" creationId="{5B870C69-CDB5-F0AA-D0C2-29FDBDB56E9F}"/>
           </ac:spMkLst>
         </pc:spChg>
-        <pc:spChg chg="del">
-          <ac:chgData name="Anna Lena Marie Beckmann (abeckma5)" userId="c15a436e-ba86-444d-9c6a-37f70c23a2b7" providerId="ADAL" clId="{28355E72-3872-414F-8AC6-642277C7BE9A}" dt="2026-10-24T16:57:07.661" v="3573" actId="478"/>
-          <ac:spMkLst>
-            <pc:docMk/>
-            <pc:sldMk cId="1666448976" sldId="256"/>
-            <ac:spMk id="4" creationId="{F85F2323-5FB6-1560-2AC3-901AD4A94681}"/>
-          </ac:spMkLst>
-        </pc:spChg>
         <pc:spChg chg="add mod ord modVis">
           <ac:chgData name="Anna Lena Marie Beckmann (abeckma5)" userId="c15a436e-ba86-444d-9c6a-37f70c23a2b7" providerId="ADAL" clId="{28355E72-3872-414F-8AC6-642277C7BE9A}" dt="2026-10-24T17:44:33.842" v="4515" actId="207"/>
           <ac:spMkLst>
@@ -235,27 +225,12 @@
           </ac:picMkLst>
         </pc:picChg>
       </pc:sldChg>
-      <pc:sldChg chg="del">
-        <pc:chgData name="Anna Lena Marie Beckmann (abeckma5)" userId="c15a436e-ba86-444d-9c6a-37f70c23a2b7" providerId="ADAL" clId="{28355E72-3872-414F-8AC6-642277C7BE9A}" dt="2026-10-24T13:55:32.577" v="1704" actId="2696"/>
-        <pc:sldMkLst>
-          <pc:docMk/>
-          <pc:sldMk cId="2554908182" sldId="257"/>
-        </pc:sldMkLst>
-      </pc:sldChg>
       <pc:sldChg chg="addSp delSp modSp mod">
         <pc:chgData name="Anna Lena Marie Beckmann (abeckma5)" userId="c15a436e-ba86-444d-9c6a-37f70c23a2b7" providerId="ADAL" clId="{28355E72-3872-414F-8AC6-642277C7BE9A}" dt="2026-10-24T17:12:20.854" v="4037" actId="14100"/>
         <pc:sldMkLst>
           <pc:docMk/>
           <pc:sldMk cId="726573041" sldId="258"/>
         </pc:sldMkLst>
-        <pc:spChg chg="del mod">
-          <ac:chgData name="Anna Lena Marie Beckmann (abeckma5)" userId="c15a436e-ba86-444d-9c6a-37f70c23a2b7" providerId="ADAL" clId="{28355E72-3872-414F-8AC6-642277C7BE9A}" dt="2026-10-24T17:11:29.733" v="3963" actId="478"/>
-          <ac:spMkLst>
-            <pc:docMk/>
-            <pc:sldMk cId="726573041" sldId="258"/>
-            <ac:spMk id="2" creationId="{77676CBF-17EB-0A48-F6C0-B31BB57E9958}"/>
-          </ac:spMkLst>
-        </pc:spChg>
         <pc:spChg chg="mod">
           <ac:chgData name="Anna Lena Marie Beckmann (abeckma5)" userId="c15a436e-ba86-444d-9c6a-37f70c23a2b7" providerId="ADAL" clId="{28355E72-3872-414F-8AC6-642277C7BE9A}" dt="2026-10-24T17:10:36.603" v="3952" actId="12"/>
           <ac:spMkLst>
@@ -304,14 +279,6 @@
             <ac:graphicFrameMk id="4" creationId="{6AE4314B-C97D-0CD6-4A21-E5AF16E46D53}"/>
           </ac:graphicFrameMkLst>
         </pc:graphicFrameChg>
-        <pc:picChg chg="del mod">
-          <ac:chgData name="Anna Lena Marie Beckmann (abeckma5)" userId="c15a436e-ba86-444d-9c6a-37f70c23a2b7" providerId="ADAL" clId="{28355E72-3872-414F-8AC6-642277C7BE9A}" dt="2026-10-24T14:13:18.727" v="2037" actId="21"/>
-          <ac:picMkLst>
-            <pc:docMk/>
-            <pc:sldMk cId="726573041" sldId="258"/>
-            <ac:picMk id="6" creationId="{64A88CD7-857E-4662-C9AA-F75776C4E27B}"/>
-          </ac:picMkLst>
-        </pc:picChg>
       </pc:sldChg>
       <pc:sldChg chg="addSp delSp modSp mod chgLayout">
         <pc:chgData name="Anna Lena Marie Beckmann (abeckma5)" userId="c15a436e-ba86-444d-9c6a-37f70c23a2b7" providerId="ADAL" clId="{28355E72-3872-414F-8AC6-642277C7BE9A}" dt="2026-10-24T17:47:01.383" v="4527" actId="478"/>
@@ -325,14 +292,6 @@
             <pc:docMk/>
             <pc:sldMk cId="2453070809" sldId="259"/>
             <ac:spMk id="2" creationId="{21981A1C-8F8F-8780-D529-61163106D597}"/>
-          </ac:spMkLst>
-        </pc:spChg>
-        <pc:spChg chg="del mod">
-          <ac:chgData name="Anna Lena Marie Beckmann (abeckma5)" userId="c15a436e-ba86-444d-9c6a-37f70c23a2b7" providerId="ADAL" clId="{28355E72-3872-414F-8AC6-642277C7BE9A}" dt="2026-10-24T13:40:31.741" v="685" actId="12084"/>
-          <ac:spMkLst>
-            <pc:docMk/>
-            <pc:sldMk cId="2453070809" sldId="259"/>
-            <ac:spMk id="3" creationId="{C79A2AE1-35CF-C12A-6808-0732D378D591}"/>
           </ac:spMkLst>
         </pc:spChg>
         <pc:spChg chg="mod">
@@ -359,14 +318,6 @@
             <ac:graphicFrameMk id="4" creationId="{8AE85873-A421-B826-AE83-748749FD4147}"/>
           </ac:graphicFrameMkLst>
         </pc:graphicFrameChg>
-        <pc:picChg chg="add del mod">
-          <ac:chgData name="Anna Lena Marie Beckmann (abeckma5)" userId="c15a436e-ba86-444d-9c6a-37f70c23a2b7" providerId="ADAL" clId="{28355E72-3872-414F-8AC6-642277C7BE9A}" dt="2026-10-24T17:47:01.383" v="4527" actId="478"/>
-          <ac:picMkLst>
-            <pc:docMk/>
-            <pc:sldMk cId="2453070809" sldId="259"/>
-            <ac:picMk id="10" creationId="{EC22098F-5619-2AFD-F8C9-D210002E73BC}"/>
-          </ac:picMkLst>
-        </pc:picChg>
       </pc:sldChg>
       <pc:sldChg chg="addSp delSp modSp mod chgLayout">
         <pc:chgData name="Anna Lena Marie Beckmann (abeckma5)" userId="c15a436e-ba86-444d-9c6a-37f70c23a2b7" providerId="ADAL" clId="{28355E72-3872-414F-8AC6-642277C7BE9A}" dt="2026-10-24T17:12:07.542" v="4005" actId="14100"/>
@@ -374,22 +325,6 @@
           <pc:docMk/>
           <pc:sldMk cId="365806783" sldId="260"/>
         </pc:sldMkLst>
-        <pc:spChg chg="del mod">
-          <ac:chgData name="Anna Lena Marie Beckmann (abeckma5)" userId="c15a436e-ba86-444d-9c6a-37f70c23a2b7" providerId="ADAL" clId="{28355E72-3872-414F-8AC6-642277C7BE9A}" dt="2026-10-24T17:00:35.775" v="3601" actId="478"/>
-          <ac:spMkLst>
-            <pc:docMk/>
-            <pc:sldMk cId="365806783" sldId="260"/>
-            <ac:spMk id="2" creationId="{ADC699FB-3F51-720F-520B-E88881896C6D}"/>
-          </ac:spMkLst>
-        </pc:spChg>
-        <pc:spChg chg="del">
-          <ac:chgData name="Anna Lena Marie Beckmann (abeckma5)" userId="c15a436e-ba86-444d-9c6a-37f70c23a2b7" providerId="ADAL" clId="{28355E72-3872-414F-8AC6-642277C7BE9A}" dt="2026-10-24T13:45:22.008" v="1009" actId="1032"/>
-          <ac:spMkLst>
-            <pc:docMk/>
-            <pc:sldMk cId="365806783" sldId="260"/>
-            <ac:spMk id="3" creationId="{48324377-2E92-B4C2-F5C5-FD61D4D98B71}"/>
-          </ac:spMkLst>
-        </pc:spChg>
         <pc:spChg chg="mod">
           <ac:chgData name="Anna Lena Marie Beckmann (abeckma5)" userId="c15a436e-ba86-444d-9c6a-37f70c23a2b7" providerId="ADAL" clId="{28355E72-3872-414F-8AC6-642277C7BE9A}" dt="2026-10-24T17:00:10.842" v="3597" actId="26606"/>
           <ac:spMkLst>
@@ -404,22 +339,6 @@
             <pc:docMk/>
             <pc:sldMk cId="365806783" sldId="260"/>
             <ac:spMk id="8" creationId="{441A057B-F562-6C2D-770F-D4EC78D37634}"/>
-          </ac:spMkLst>
-        </pc:spChg>
-        <pc:spChg chg="add del mod">
-          <ac:chgData name="Anna Lena Marie Beckmann (abeckma5)" userId="c15a436e-ba86-444d-9c6a-37f70c23a2b7" providerId="ADAL" clId="{28355E72-3872-414F-8AC6-642277C7BE9A}" dt="2026-10-24T17:01:15.544" v="3608" actId="478"/>
-          <ac:spMkLst>
-            <pc:docMk/>
-            <pc:sldMk cId="365806783" sldId="260"/>
-            <ac:spMk id="9" creationId="{8E326C94-683A-7386-5B03-9E480E9EC856}"/>
-          </ac:spMkLst>
-        </pc:spChg>
-        <pc:spChg chg="add del mod">
-          <ac:chgData name="Anna Lena Marie Beckmann (abeckma5)" userId="c15a436e-ba86-444d-9c6a-37f70c23a2b7" providerId="ADAL" clId="{28355E72-3872-414F-8AC6-642277C7BE9A}" dt="2026-10-24T17:00:37.781" v="3602" actId="478"/>
-          <ac:spMkLst>
-            <pc:docMk/>
-            <pc:sldMk cId="365806783" sldId="260"/>
-            <ac:spMk id="11" creationId="{46655178-3AE4-B7FA-DF43-7F26036FA2E1}"/>
           </ac:spMkLst>
         </pc:spChg>
         <pc:spChg chg="add mod">
@@ -445,22 +364,6 @@
           <pc:docMk/>
           <pc:sldMk cId="1617207903" sldId="261"/>
         </pc:sldMkLst>
-        <pc:spChg chg="del mod">
-          <ac:chgData name="Anna Lena Marie Beckmann (abeckma5)" userId="c15a436e-ba86-444d-9c6a-37f70c23a2b7" providerId="ADAL" clId="{28355E72-3872-414F-8AC6-642277C7BE9A}" dt="2026-10-24T17:02:08.423" v="3617" actId="478"/>
-          <ac:spMkLst>
-            <pc:docMk/>
-            <pc:sldMk cId="1617207903" sldId="261"/>
-            <ac:spMk id="2" creationId="{A22D8791-7DC0-2800-3142-411CDD91B336}"/>
-          </ac:spMkLst>
-        </pc:spChg>
-        <pc:spChg chg="del">
-          <ac:chgData name="Anna Lena Marie Beckmann (abeckma5)" userId="c15a436e-ba86-444d-9c6a-37f70c23a2b7" providerId="ADAL" clId="{28355E72-3872-414F-8AC6-642277C7BE9A}" dt="2026-10-24T13:52:05.803" v="1526" actId="1032"/>
-          <ac:spMkLst>
-            <pc:docMk/>
-            <pc:sldMk cId="1617207903" sldId="261"/>
-            <ac:spMk id="3" creationId="{D667253B-5C55-9AA0-5CBE-2AE18DF36B3A}"/>
-          </ac:spMkLst>
-        </pc:spChg>
         <pc:spChg chg="mod">
           <ac:chgData name="Anna Lena Marie Beckmann (abeckma5)" userId="c15a436e-ba86-444d-9c6a-37f70c23a2b7" providerId="ADAL" clId="{28355E72-3872-414F-8AC6-642277C7BE9A}" dt="2026-10-24T16:58:17.342" v="3582"/>
           <ac:spMkLst>
@@ -475,14 +378,6 @@
             <pc:docMk/>
             <pc:sldMk cId="1617207903" sldId="261"/>
             <ac:spMk id="8" creationId="{A67C2934-20AC-A109-848E-48B9D1262360}"/>
-          </ac:spMkLst>
-        </pc:spChg>
-        <pc:spChg chg="add del mod">
-          <ac:chgData name="Anna Lena Marie Beckmann (abeckma5)" userId="c15a436e-ba86-444d-9c6a-37f70c23a2b7" providerId="ADAL" clId="{28355E72-3872-414F-8AC6-642277C7BE9A}" dt="2026-10-24T17:02:10.518" v="3619" actId="478"/>
-          <ac:spMkLst>
-            <pc:docMk/>
-            <pc:sldMk cId="1617207903" sldId="261"/>
-            <ac:spMk id="10" creationId="{4E68468C-CC79-A65E-B2D8-9A2FC9D07006}"/>
           </ac:spMkLst>
         </pc:spChg>
         <pc:spChg chg="add mod">
@@ -508,22 +403,6 @@
           <pc:docMk/>
           <pc:sldMk cId="3788557711" sldId="262"/>
         </pc:sldMkLst>
-        <pc:spChg chg="del mod">
-          <ac:chgData name="Anna Lena Marie Beckmann (abeckma5)" userId="c15a436e-ba86-444d-9c6a-37f70c23a2b7" providerId="ADAL" clId="{28355E72-3872-414F-8AC6-642277C7BE9A}" dt="2026-10-24T17:25:55.884" v="4292" actId="478"/>
-          <ac:spMkLst>
-            <pc:docMk/>
-            <pc:sldMk cId="3788557711" sldId="262"/>
-            <ac:spMk id="2" creationId="{9F0B196E-5D21-8C45-AD31-85A386FD648F}"/>
-          </ac:spMkLst>
-        </pc:spChg>
-        <pc:spChg chg="del mod">
-          <ac:chgData name="Anna Lena Marie Beckmann (abeckma5)" userId="c15a436e-ba86-444d-9c6a-37f70c23a2b7" providerId="ADAL" clId="{28355E72-3872-414F-8AC6-642277C7BE9A}" dt="2026-10-24T17:27:41.534" v="4303" actId="12084"/>
-          <ac:spMkLst>
-            <pc:docMk/>
-            <pc:sldMk cId="3788557711" sldId="262"/>
-            <ac:spMk id="3" creationId="{C3D6065D-FAC4-1D86-FC86-8162F7C8A6D1}"/>
-          </ac:spMkLst>
-        </pc:spChg>
         <pc:spChg chg="mod">
           <ac:chgData name="Anna Lena Marie Beckmann (abeckma5)" userId="c15a436e-ba86-444d-9c6a-37f70c23a2b7" providerId="ADAL" clId="{28355E72-3872-414F-8AC6-642277C7BE9A}" dt="2026-10-24T16:58:17.342" v="3582"/>
           <ac:spMkLst>
@@ -548,14 +427,6 @@
             <ac:spMk id="10" creationId="{11DDE0D1-9538-8B1C-1B65-5B1B92709374}"/>
           </ac:spMkLst>
         </pc:spChg>
-        <pc:graphicFrameChg chg="add del mod modGraphic">
-          <ac:chgData name="Anna Lena Marie Beckmann (abeckma5)" userId="c15a436e-ba86-444d-9c6a-37f70c23a2b7" providerId="ADAL" clId="{28355E72-3872-414F-8AC6-642277C7BE9A}" dt="2026-10-24T17:26:11.812" v="4296" actId="478"/>
-          <ac:graphicFrameMkLst>
-            <pc:docMk/>
-            <pc:sldMk cId="3788557711" sldId="262"/>
-            <ac:graphicFrameMk id="4" creationId="{19E0208A-FADD-9DC3-3EFE-C31F614A7268}"/>
-          </ac:graphicFrameMkLst>
-        </pc:graphicFrameChg>
         <pc:graphicFrameChg chg="add mod modGraphic">
           <ac:chgData name="Anna Lena Marie Beckmann (abeckma5)" userId="c15a436e-ba86-444d-9c6a-37f70c23a2b7" providerId="ADAL" clId="{28355E72-3872-414F-8AC6-642277C7BE9A}" dt="2026-10-24T17:28:54.614" v="4314" actId="1076"/>
           <ac:graphicFrameMkLst>
@@ -618,14 +489,6 @@
           <pc:docMk/>
           <pc:sldMk cId="3638805733" sldId="264"/>
         </pc:sldMkLst>
-        <pc:spChg chg="del mod">
-          <ac:chgData name="Anna Lena Marie Beckmann (abeckma5)" userId="c15a436e-ba86-444d-9c6a-37f70c23a2b7" providerId="ADAL" clId="{28355E72-3872-414F-8AC6-642277C7BE9A}" dt="2026-10-24T17:13:13.206" v="4063" actId="478"/>
-          <ac:spMkLst>
-            <pc:docMk/>
-            <pc:sldMk cId="3638805733" sldId="264"/>
-            <ac:spMk id="2" creationId="{77E4AD1C-9DEA-5335-D9CE-1782DB2C586F}"/>
-          </ac:spMkLst>
-        </pc:spChg>
         <pc:spChg chg="add mod">
           <ac:chgData name="Anna Lena Marie Beckmann (abeckma5)" userId="c15a436e-ba86-444d-9c6a-37f70c23a2b7" providerId="ADAL" clId="{28355E72-3872-414F-8AC6-642277C7BE9A}" dt="2026-10-24T14:16:43.597" v="2141" actId="20577"/>
           <ac:spMkLst>
@@ -648,22 +511,6 @@
             <pc:docMk/>
             <pc:sldMk cId="3638805733" sldId="264"/>
             <ac:spMk id="12" creationId="{0E327D95-CD86-0FBD-74FA-F4CBBF551AE0}"/>
-          </ac:spMkLst>
-        </pc:spChg>
-        <pc:spChg chg="add del">
-          <ac:chgData name="Anna Lena Marie Beckmann (abeckma5)" userId="c15a436e-ba86-444d-9c6a-37f70c23a2b7" providerId="ADAL" clId="{28355E72-3872-414F-8AC6-642277C7BE9A}" dt="2026-10-24T17:12:46.206" v="4039" actId="22"/>
-          <ac:spMkLst>
-            <pc:docMk/>
-            <pc:sldMk cId="3638805733" sldId="264"/>
-            <ac:spMk id="14" creationId="{DB865CD2-1C3D-53C9-87F6-FCF9A73DAAE5}"/>
-          </ac:spMkLst>
-        </pc:spChg>
-        <pc:spChg chg="add del mod">
-          <ac:chgData name="Anna Lena Marie Beckmann (abeckma5)" userId="c15a436e-ba86-444d-9c6a-37f70c23a2b7" providerId="ADAL" clId="{28355E72-3872-414F-8AC6-642277C7BE9A}" dt="2026-10-24T17:13:14.949" v="4064" actId="478"/>
-          <ac:spMkLst>
-            <pc:docMk/>
-            <pc:sldMk cId="3638805733" sldId="264"/>
-            <ac:spMk id="16" creationId="{709122E8-1EC2-B20C-5E71-67204590721E}"/>
           </ac:spMkLst>
         </pc:spChg>
         <pc:spChg chg="add mod">
@@ -705,14 +552,6 @@
           <pc:docMk/>
           <pc:sldMk cId="413556289" sldId="265"/>
         </pc:sldMkLst>
-        <pc:spChg chg="del mod">
-          <ac:chgData name="Anna Lena Marie Beckmann (abeckma5)" userId="c15a436e-ba86-444d-9c6a-37f70c23a2b7" providerId="ADAL" clId="{28355E72-3872-414F-8AC6-642277C7BE9A}" dt="2026-10-24T17:13:52.142" v="4070" actId="478"/>
-          <ac:spMkLst>
-            <pc:docMk/>
-            <pc:sldMk cId="413556289" sldId="265"/>
-            <ac:spMk id="2" creationId="{8BF6CC2A-F631-1457-0FE4-0213862C0661}"/>
-          </ac:spMkLst>
-        </pc:spChg>
         <pc:spChg chg="mod">
           <ac:chgData name="Anna Lena Marie Beckmann (abeckma5)" userId="c15a436e-ba86-444d-9c6a-37f70c23a2b7" providerId="ADAL" clId="{28355E72-3872-414F-8AC6-642277C7BE9A}" dt="2026-10-24T17:16:06.053" v="4121" actId="20577"/>
           <ac:spMkLst>
@@ -735,14 +574,6 @@
             <pc:docMk/>
             <pc:sldMk cId="413556289" sldId="265"/>
             <ac:spMk id="9" creationId="{4ABBAB92-9107-0745-9C14-EF2E1AEEF89E}"/>
-          </ac:spMkLst>
-        </pc:spChg>
-        <pc:spChg chg="add del mod">
-          <ac:chgData name="Anna Lena Marie Beckmann (abeckma5)" userId="c15a436e-ba86-444d-9c6a-37f70c23a2b7" providerId="ADAL" clId="{28355E72-3872-414F-8AC6-642277C7BE9A}" dt="2026-10-24T17:13:54.013" v="4071" actId="478"/>
-          <ac:spMkLst>
-            <pc:docMk/>
-            <pc:sldMk cId="413556289" sldId="265"/>
-            <ac:spMk id="11" creationId="{04D6C7DE-F407-161E-36E3-BEEE4D2640FD}"/>
           </ac:spMkLst>
         </pc:spChg>
         <pc:spChg chg="add mod">
@@ -776,30 +607,6 @@
           <pc:docMk/>
           <pc:sldMk cId="2784366955" sldId="266"/>
         </pc:sldMkLst>
-        <pc:spChg chg="del mod">
-          <ac:chgData name="Anna Lena Marie Beckmann (abeckma5)" userId="c15a436e-ba86-444d-9c6a-37f70c23a2b7" providerId="ADAL" clId="{28355E72-3872-414F-8AC6-642277C7BE9A}" dt="2026-10-24T17:16:39.974" v="4125" actId="478"/>
-          <ac:spMkLst>
-            <pc:docMk/>
-            <pc:sldMk cId="2784366955" sldId="266"/>
-            <ac:spMk id="2" creationId="{5807517E-19FF-8CC5-F453-693CFC71847A}"/>
-          </ac:spMkLst>
-        </pc:spChg>
-        <pc:spChg chg="mod">
-          <ac:chgData name="Anna Lena Marie Beckmann (abeckma5)" userId="c15a436e-ba86-444d-9c6a-37f70c23a2b7" providerId="ADAL" clId="{28355E72-3872-414F-8AC6-642277C7BE9A}" dt="2026-10-24T14:35:46.212" v="2308" actId="5793"/>
-          <ac:spMkLst>
-            <pc:docMk/>
-            <pc:sldMk cId="2784366955" sldId="266"/>
-            <ac:spMk id="3" creationId="{A8505FB1-6325-7447-AAAD-6385B65FBB8F}"/>
-          </ac:spMkLst>
-        </pc:spChg>
-        <pc:spChg chg="add del mod">
-          <ac:chgData name="Anna Lena Marie Beckmann (abeckma5)" userId="c15a436e-ba86-444d-9c6a-37f70c23a2b7" providerId="ADAL" clId="{28355E72-3872-414F-8AC6-642277C7BE9A}" dt="2026-10-24T17:19:48.860" v="4201" actId="12084"/>
-          <ac:spMkLst>
-            <pc:docMk/>
-            <pc:sldMk cId="2784366955" sldId="266"/>
-            <ac:spMk id="4" creationId="{FE00CF0F-34C9-DAD8-6915-4E974BAD04DB}"/>
-          </ac:spMkLst>
-        </pc:spChg>
         <pc:spChg chg="mod">
           <ac:chgData name="Anna Lena Marie Beckmann (abeckma5)" userId="c15a436e-ba86-444d-9c6a-37f70c23a2b7" providerId="ADAL" clId="{28355E72-3872-414F-8AC6-642277C7BE9A}" dt="2026-10-24T16:58:17.342" v="3582"/>
           <ac:spMkLst>
@@ -814,14 +621,6 @@
             <pc:docMk/>
             <pc:sldMk cId="2784366955" sldId="266"/>
             <ac:spMk id="10" creationId="{DD60A87F-D4EA-E516-F3CF-22567A9D7E61}"/>
-          </ac:spMkLst>
-        </pc:spChg>
-        <pc:spChg chg="add del mod">
-          <ac:chgData name="Anna Lena Marie Beckmann (abeckma5)" userId="c15a436e-ba86-444d-9c6a-37f70c23a2b7" providerId="ADAL" clId="{28355E72-3872-414F-8AC6-642277C7BE9A}" dt="2026-10-24T17:16:41.380" v="4126" actId="478"/>
-          <ac:spMkLst>
-            <pc:docMk/>
-            <pc:sldMk cId="2784366955" sldId="266"/>
-            <ac:spMk id="12" creationId="{A8252CB0-04E4-8FF6-834D-05977DE9196F}"/>
           </ac:spMkLst>
         </pc:spChg>
         <pc:spChg chg="add mod">
@@ -881,13 +680,6 @@
           </ac:picMkLst>
         </pc:picChg>
       </pc:sldChg>
-      <pc:sldChg chg="new del">
-        <pc:chgData name="Anna Lena Marie Beckmann (abeckma5)" userId="c15a436e-ba86-444d-9c6a-37f70c23a2b7" providerId="ADAL" clId="{28355E72-3872-414F-8AC6-642277C7BE9A}" dt="2026-10-24T16:56:47.763" v="3572" actId="2696"/>
-        <pc:sldMkLst>
-          <pc:docMk/>
-          <pc:sldMk cId="2605015724" sldId="267"/>
-        </pc:sldMkLst>
-      </pc:sldChg>
       <pc:sldChg chg="modSp add mod">
         <pc:chgData name="Anna Lena Marie Beckmann (abeckma5)" userId="c15a436e-ba86-444d-9c6a-37f70c23a2b7" providerId="ADAL" clId="{28355E72-3872-414F-8AC6-642277C7BE9A}" dt="2026-10-24T17:30:55.060" v="4378" actId="1076"/>
         <pc:sldMkLst>
@@ -933,14 +725,6 @@
             <ac:spMk id="2" creationId="{865CAA20-B8E5-E0D9-AD31-1B7423117E6B}"/>
           </ac:spMkLst>
         </pc:spChg>
-        <pc:spChg chg="del">
-          <ac:chgData name="Anna Lena Marie Beckmann (abeckma5)" userId="c15a436e-ba86-444d-9c6a-37f70c23a2b7" providerId="ADAL" clId="{28355E72-3872-414F-8AC6-642277C7BE9A}" dt="2026-10-24T17:31:26.779" v="4409" actId="478"/>
-          <ac:spMkLst>
-            <pc:docMk/>
-            <pc:sldMk cId="246722703" sldId="268"/>
-            <ac:spMk id="3" creationId="{F6496CF9-2AC6-BAFF-71CE-66CCC7E955F8}"/>
-          </ac:spMkLst>
-        </pc:spChg>
         <pc:picChg chg="add mod">
           <ac:chgData name="Anna Lena Marie Beckmann (abeckma5)" userId="c15a436e-ba86-444d-9c6a-37f70c23a2b7" providerId="ADAL" clId="{28355E72-3872-414F-8AC6-642277C7BE9A}" dt="2026-10-24T17:32:42.725" v="4437" actId="207"/>
           <ac:picMkLst>
@@ -950,66 +734,6 @@
           </ac:picMkLst>
         </pc:picChg>
       </pc:sldChg>
-      <pc:sldMasterChg chg="modSldLayout">
-        <pc:chgData name="Anna Lena Marie Beckmann (abeckma5)" userId="c15a436e-ba86-444d-9c6a-37f70c23a2b7" providerId="ADAL" clId="{28355E72-3872-414F-8AC6-642277C7BE9A}" dt="2026-10-24T16:58:06.607" v="3577"/>
-        <pc:sldMasterMkLst>
-          <pc:docMk/>
-          <pc:sldMasterMk cId="3222458914" sldId="2147483717"/>
-        </pc:sldMasterMkLst>
-        <pc:sldLayoutChg chg="delSp">
-          <pc:chgData name="Anna Lena Marie Beckmann (abeckma5)" userId="c15a436e-ba86-444d-9c6a-37f70c23a2b7" providerId="ADAL" clId="{28355E72-3872-414F-8AC6-642277C7BE9A}" dt="2026-10-24T16:58:06.607" v="3577"/>
-          <pc:sldLayoutMkLst>
-            <pc:docMk/>
-            <pc:sldMasterMk cId="3222458914" sldId="2147483717"/>
-            <pc:sldLayoutMk cId="1722822586" sldId="2147483745"/>
-          </pc:sldLayoutMkLst>
-          <pc:spChg chg="del">
-            <ac:chgData name="Anna Lena Marie Beckmann (abeckma5)" userId="c15a436e-ba86-444d-9c6a-37f70c23a2b7" providerId="ADAL" clId="{28355E72-3872-414F-8AC6-642277C7BE9A}" dt="2026-10-24T16:58:06.607" v="3577"/>
-            <ac:spMkLst>
-              <pc:docMk/>
-              <pc:sldMasterMk cId="3222458914" sldId="2147483717"/>
-              <pc:sldLayoutMk cId="1722822586" sldId="2147483745"/>
-              <ac:spMk id="3" creationId="{D31AE9B9-D0DC-50F5-FE7E-BCF950A9B60C}"/>
-            </ac:spMkLst>
-          </pc:spChg>
-          <pc:spChg chg="del">
-            <ac:chgData name="Anna Lena Marie Beckmann (abeckma5)" userId="c15a436e-ba86-444d-9c6a-37f70c23a2b7" providerId="ADAL" clId="{28355E72-3872-414F-8AC6-642277C7BE9A}" dt="2026-10-24T16:58:06.607" v="3577"/>
-            <ac:spMkLst>
-              <pc:docMk/>
-              <pc:sldMasterMk cId="3222458914" sldId="2147483717"/>
-              <pc:sldLayoutMk cId="1722822586" sldId="2147483745"/>
-              <ac:spMk id="4" creationId="{268344FF-8882-8B2E-4777-40771425C01A}"/>
-            </ac:spMkLst>
-          </pc:spChg>
-          <pc:spChg chg="del">
-            <ac:chgData name="Anna Lena Marie Beckmann (abeckma5)" userId="c15a436e-ba86-444d-9c6a-37f70c23a2b7" providerId="ADAL" clId="{28355E72-3872-414F-8AC6-642277C7BE9A}" dt="2026-10-24T16:58:06.607" v="3577"/>
-            <ac:spMkLst>
-              <pc:docMk/>
-              <pc:sldMasterMk cId="3222458914" sldId="2147483717"/>
-              <pc:sldLayoutMk cId="1722822586" sldId="2147483745"/>
-              <ac:spMk id="5" creationId="{32F5B7E4-5668-20C3-5FFF-AA7F08736507}"/>
-            </ac:spMkLst>
-          </pc:spChg>
-          <pc:spChg chg="del">
-            <ac:chgData name="Anna Lena Marie Beckmann (abeckma5)" userId="c15a436e-ba86-444d-9c6a-37f70c23a2b7" providerId="ADAL" clId="{28355E72-3872-414F-8AC6-642277C7BE9A}" dt="2026-10-24T16:58:06.607" v="3577"/>
-            <ac:spMkLst>
-              <pc:docMk/>
-              <pc:sldMasterMk cId="3222458914" sldId="2147483717"/>
-              <pc:sldLayoutMk cId="1722822586" sldId="2147483745"/>
-              <ac:spMk id="10" creationId="{FF8F2B01-BAAD-F03E-72D9-CC472F3A5DE5}"/>
-            </ac:spMkLst>
-          </pc:spChg>
-          <pc:cxnChg chg="del">
-            <ac:chgData name="Anna Lena Marie Beckmann (abeckma5)" userId="c15a436e-ba86-444d-9c6a-37f70c23a2b7" providerId="ADAL" clId="{28355E72-3872-414F-8AC6-642277C7BE9A}" dt="2026-10-24T16:58:06.607" v="3577"/>
-            <ac:cxnSpMkLst>
-              <pc:docMk/>
-              <pc:sldMasterMk cId="3222458914" sldId="2147483717"/>
-              <pc:sldLayoutMk cId="1722822586" sldId="2147483745"/>
-              <ac:cxnSpMk id="12" creationId="{5B086C0A-2B9C-7A1D-5F77-AF7402CC1F84}"/>
-            </ac:cxnSpMkLst>
-          </pc:cxnChg>
-        </pc:sldLayoutChg>
-      </pc:sldMasterChg>
       <pc:sldMasterChg chg="setBg modSldLayout">
         <pc:chgData name="Anna Lena Marie Beckmann (abeckma5)" userId="c15a436e-ba86-444d-9c6a-37f70c23a2b7" providerId="ADAL" clId="{28355E72-3872-414F-8AC6-642277C7BE9A}" dt="2026-10-24T17:01:58.849" v="3616"/>
         <pc:sldMasterMkLst>
@@ -1086,7 +810,7 @@
   <pc:docChgLst>
     <pc:chgData name="Anna Lena Marie Beckmann (abeckma5)" userId="c15a436e-ba86-444d-9c6a-37f70c23a2b7" providerId="ADAL" clId="{E76465DC-497B-4EEE-8536-302334EFFBCD}"/>
     <pc:docChg chg="custSel addSld modSld">
-      <pc:chgData name="Anna Lena Marie Beckmann (abeckma5)" userId="c15a436e-ba86-444d-9c6a-37f70c23a2b7" providerId="ADAL" clId="{E76465DC-497B-4EEE-8536-302334EFFBCD}" dt="2026-10-24T14:49:24.329" v="59" actId="1076"/>
+      <pc:chgData name="Anna Lena Marie Beckmann (abeckma5)" userId="c15a436e-ba86-444d-9c6a-37f70c23a2b7" providerId="ADAL" clId="{E76465DC-497B-4EEE-8536-302334EFFBCD}" dt="2026-10-27T14:54:34.580" v="211" actId="14100"/>
       <pc:docMkLst>
         <pc:docMk/>
       </pc:docMkLst>
@@ -1104,14 +828,13 @@
             <ac:spMk id="3" creationId="{88924B69-CBA3-2C4D-CBA9-4B460E24CEAC}"/>
           </ac:spMkLst>
         </pc:spChg>
-        <pc:picChg chg="add mod">
-          <ac:chgData name="Anna Lena Marie Beckmann (abeckma5)" userId="c15a436e-ba86-444d-9c6a-37f70c23a2b7" providerId="ADAL" clId="{E76465DC-497B-4EEE-8536-302334EFFBCD}" dt="2026-10-24T14:04:33.772" v="3" actId="1076"/>
-          <ac:picMkLst>
-            <pc:docMk/>
-            <pc:sldMk cId="726573041" sldId="258"/>
-            <ac:picMk id="6" creationId="{64A88CD7-857E-4662-C9AA-F75776C4E27B}"/>
-          </ac:picMkLst>
-        </pc:picChg>
+      </pc:sldChg>
+      <pc:sldChg chg="setBg">
+        <pc:chgData name="Anna Lena Marie Beckmann (abeckma5)" userId="c15a436e-ba86-444d-9c6a-37f70c23a2b7" providerId="ADAL" clId="{E76465DC-497B-4EEE-8536-302334EFFBCD}" dt="2026-10-26T09:38:59.413" v="74"/>
+        <pc:sldMkLst>
+          <pc:docMk/>
+          <pc:sldMk cId="1153621289" sldId="263"/>
+        </pc:sldMkLst>
       </pc:sldChg>
       <pc:sldChg chg="addSp delSp modSp new mod">
         <pc:chgData name="Anna Lena Marie Beckmann (abeckma5)" userId="c15a436e-ba86-444d-9c6a-37f70c23a2b7" providerId="ADAL" clId="{E76465DC-497B-4EEE-8536-302334EFFBCD}" dt="2026-10-24T14:15:59.779" v="51"/>
@@ -1119,14 +842,6 @@
           <pc:docMk/>
           <pc:sldMk cId="3638805733" sldId="264"/>
         </pc:sldMkLst>
-        <pc:spChg chg="del">
-          <ac:chgData name="Anna Lena Marie Beckmann (abeckma5)" userId="c15a436e-ba86-444d-9c6a-37f70c23a2b7" providerId="ADAL" clId="{E76465DC-497B-4EEE-8536-302334EFFBCD}" dt="2026-10-24T14:09:47.387" v="49" actId="22"/>
-          <ac:spMkLst>
-            <pc:docMk/>
-            <pc:sldMk cId="3638805733" sldId="264"/>
-            <ac:spMk id="3" creationId="{D35B5490-C82D-C2F3-B69B-E45F764440CA}"/>
-          </ac:spMkLst>
-        </pc:spChg>
         <pc:spChg chg="mod">
           <ac:chgData name="Anna Lena Marie Beckmann (abeckma5)" userId="c15a436e-ba86-444d-9c6a-37f70c23a2b7" providerId="ADAL" clId="{E76465DC-497B-4EEE-8536-302334EFFBCD}" dt="2026-10-24T14:15:59.779" v="51"/>
           <ac:spMkLst>
@@ -1181,14 +896,6 @@
           <pc:docMk/>
           <pc:sldMk cId="2784366955" sldId="266"/>
         </pc:sldMkLst>
-        <pc:spChg chg="del mod">
-          <ac:chgData name="Anna Lena Marie Beckmann (abeckma5)" userId="c15a436e-ba86-444d-9c6a-37f70c23a2b7" providerId="ADAL" clId="{E76465DC-497B-4EEE-8536-302334EFFBCD}" dt="2026-10-24T14:49:21.362" v="58" actId="22"/>
-          <ac:spMkLst>
-            <pc:docMk/>
-            <pc:sldMk cId="2784366955" sldId="266"/>
-            <ac:spMk id="3" creationId="{A8505FB1-6325-7447-AAAD-6385B65FBB8F}"/>
-          </ac:spMkLst>
-        </pc:spChg>
         <pc:picChg chg="add mod">
           <ac:chgData name="Anna Lena Marie Beckmann (abeckma5)" userId="c15a436e-ba86-444d-9c6a-37f70c23a2b7" providerId="ADAL" clId="{E76465DC-497B-4EEE-8536-302334EFFBCD}" dt="2026-10-24T14:40:16.381" v="56" actId="1076"/>
           <ac:picMkLst>
@@ -1205,6 +912,69 @@
             <ac:picMk id="7" creationId="{13F1A52D-6069-1F28-C39F-DAC11BF41499}"/>
           </ac:picMkLst>
         </pc:picChg>
+      </pc:sldChg>
+      <pc:sldChg chg="addSp modSp mod modNotesTx">
+        <pc:chgData name="Anna Lena Marie Beckmann (abeckma5)" userId="c15a436e-ba86-444d-9c6a-37f70c23a2b7" providerId="ADAL" clId="{E76465DC-497B-4EEE-8536-302334EFFBCD}" dt="2026-10-27T14:54:34.580" v="211" actId="14100"/>
+        <pc:sldMkLst>
+          <pc:docMk/>
+          <pc:sldMk cId="4212711763" sldId="267"/>
+        </pc:sldMkLst>
+        <pc:spChg chg="add mod">
+          <ac:chgData name="Anna Lena Marie Beckmann (abeckma5)" userId="c15a436e-ba86-444d-9c6a-37f70c23a2b7" providerId="ADAL" clId="{E76465DC-497B-4EEE-8536-302334EFFBCD}" dt="2026-10-27T14:54:09.778" v="204" actId="20577"/>
+          <ac:spMkLst>
+            <pc:docMk/>
+            <pc:sldMk cId="4212711763" sldId="267"/>
+            <ac:spMk id="2" creationId="{5862A4FC-15A9-91C1-467D-41E9D295122B}"/>
+          </ac:spMkLst>
+        </pc:spChg>
+        <pc:spChg chg="mod">
+          <ac:chgData name="Anna Lena Marie Beckmann (abeckma5)" userId="c15a436e-ba86-444d-9c6a-37f70c23a2b7" providerId="ADAL" clId="{E76465DC-497B-4EEE-8536-302334EFFBCD}" dt="2026-10-27T14:54:34.580" v="211" actId="14100"/>
+          <ac:spMkLst>
+            <pc:docMk/>
+            <pc:sldMk cId="4212711763" sldId="267"/>
+            <ac:spMk id="3" creationId="{1E74F814-1DBB-B9EC-6DBB-9E49DBE5D630}"/>
+          </ac:spMkLst>
+        </pc:spChg>
+        <pc:spChg chg="add mod">
+          <ac:chgData name="Anna Lena Marie Beckmann (abeckma5)" userId="c15a436e-ba86-444d-9c6a-37f70c23a2b7" providerId="ADAL" clId="{E76465DC-497B-4EEE-8536-302334EFFBCD}" dt="2026-10-27T14:54:22.607" v="208" actId="20577"/>
+          <ac:spMkLst>
+            <pc:docMk/>
+            <pc:sldMk cId="4212711763" sldId="267"/>
+            <ac:spMk id="6" creationId="{CC802EF2-8A7D-0516-FE71-4B6F232FB128}"/>
+          </ac:spMkLst>
+        </pc:spChg>
+        <pc:spChg chg="add mod">
+          <ac:chgData name="Anna Lena Marie Beckmann (abeckma5)" userId="c15a436e-ba86-444d-9c6a-37f70c23a2b7" providerId="ADAL" clId="{E76465DC-497B-4EEE-8536-302334EFFBCD}" dt="2026-10-27T14:54:13.487" v="205" actId="1076"/>
+          <ac:spMkLst>
+            <pc:docMk/>
+            <pc:sldMk cId="4212711763" sldId="267"/>
+            <ac:spMk id="14" creationId="{351AAE87-5DC9-1B92-C826-1AB7A4784741}"/>
+          </ac:spMkLst>
+        </pc:spChg>
+        <pc:graphicFrameChg chg="mod">
+          <ac:chgData name="Anna Lena Marie Beckmann (abeckma5)" userId="c15a436e-ba86-444d-9c6a-37f70c23a2b7" providerId="ADAL" clId="{E76465DC-497B-4EEE-8536-302334EFFBCD}" dt="2026-10-27T14:50:21.400" v="109" actId="1076"/>
+          <ac:graphicFrameMkLst>
+            <pc:docMk/>
+            <pc:sldMk cId="4212711763" sldId="267"/>
+            <ac:graphicFrameMk id="4" creationId="{6AC23EF6-97D2-3B5C-94FA-BFBEB192542D}"/>
+          </ac:graphicFrameMkLst>
+        </pc:graphicFrameChg>
+        <pc:graphicFrameChg chg="add mod modGraphic">
+          <ac:chgData name="Anna Lena Marie Beckmann (abeckma5)" userId="c15a436e-ba86-444d-9c6a-37f70c23a2b7" providerId="ADAL" clId="{E76465DC-497B-4EEE-8536-302334EFFBCD}" dt="2026-10-27T14:53:00.385" v="140" actId="20577"/>
+          <ac:graphicFrameMkLst>
+            <pc:docMk/>
+            <pc:sldMk cId="4212711763" sldId="267"/>
+            <ac:graphicFrameMk id="13" creationId="{F8EFFBAC-547B-26DE-079B-219E33DDE93C}"/>
+          </ac:graphicFrameMkLst>
+        </pc:graphicFrameChg>
+        <pc:cxnChg chg="add">
+          <ac:chgData name="Anna Lena Marie Beckmann (abeckma5)" userId="c15a436e-ba86-444d-9c6a-37f70c23a2b7" providerId="ADAL" clId="{E76465DC-497B-4EEE-8536-302334EFFBCD}" dt="2026-10-27T14:50:00.495" v="106" actId="11529"/>
+          <ac:cxnSpMkLst>
+            <pc:docMk/>
+            <pc:sldMk cId="4212711763" sldId="267"/>
+            <ac:cxnSpMk id="11" creationId="{AA54294E-5FA2-C1E3-5F4F-29B64EA7A79C}"/>
+          </ac:cxnSpMkLst>
+        </pc:cxnChg>
       </pc:sldChg>
     </pc:docChg>
   </pc:docChgLst>
@@ -4968,7 +4738,7 @@
         <a:lstStyle/>
         <a:p>
           <a:r>
-            <a:rPr lang="de-DE" dirty="0"/>
+            <a:rPr lang="de-DE"/>
             <a:t>User</a:t>
           </a:r>
         </a:p>
@@ -5004,7 +4774,7 @@
         <a:lstStyle/>
         <a:p>
           <a:r>
-            <a:rPr lang="de-DE" dirty="0"/>
+            <a:rPr lang="de-DE"/>
             <a:t>Praktikumsgruppen</a:t>
           </a:r>
         </a:p>
@@ -5040,7 +4810,7 @@
         <a:lstStyle/>
         <a:p>
           <a:r>
-            <a:rPr lang="de-DE" dirty="0"/>
+            <a:rPr lang="de-DE"/>
             <a:t>Users</a:t>
           </a:r>
         </a:p>
@@ -5112,7 +4882,7 @@
         <a:lstStyle/>
         <a:p>
           <a:r>
-            <a:rPr lang="de-DE" dirty="0"/>
+            <a:rPr lang="de-DE"/>
             <a:t>Besitzt Zugangsdaten, Name, Budget, Freundesliste, Wohnortdaten, Bewertungen</a:t>
           </a:r>
         </a:p>
@@ -5151,7 +4921,6 @@
             <a:rPr lang="de-DE"/>
             <a:t>Gruppierung von User</a:t>
           </a:r>
-          <a:endParaRPr lang="de-DE" dirty="0"/>
         </a:p>
       </dgm:t>
     </dgm:pt>
@@ -5188,7 +4957,6 @@
             <a:rPr lang="de-DE"/>
             <a:t>Verwaltet alle User</a:t>
           </a:r>
-          <a:endParaRPr lang="de-DE" dirty="0"/>
         </a:p>
       </dgm:t>
     </dgm:pt>
@@ -5222,7 +4990,7 @@
         <a:lstStyle/>
         <a:p>
           <a:r>
-            <a:rPr lang="de-DE" dirty="0"/>
+            <a:rPr lang="de-DE"/>
             <a:t>Ließt Benutzer-/Freundschaftsdaten aus CSV</a:t>
           </a:r>
         </a:p>
@@ -5261,7 +5029,6 @@
             <a:rPr lang="de-DE"/>
             <a:t>Passwortüberprüfung, Freundschaftsempfehlung, Abstands-/Verbindungsberechnung</a:t>
           </a:r>
-          <a:endParaRPr lang="de-DE" dirty="0"/>
         </a:p>
       </dgm:t>
     </dgm:pt>
@@ -5373,36 +5140,36 @@
     </dgm:pt>
   </dgm:ptLst>
   <dgm:cxnLst>
-    <dgm:cxn modelId="{65D93D11-2DB2-4F15-A291-8897B8DE482B}" type="presOf" srcId="{21CC39FE-88C9-47CD-9E00-3CBF4C7ED5BD}" destId="{7F414582-7F16-4491-A4B3-FC8B0BCF506D}" srcOrd="0" destOrd="1" presId="urn:microsoft.com/office/officeart/2005/8/layout/hList1"/>
-    <dgm:cxn modelId="{C9F98C14-DDDC-43CE-A5A4-FBF978AA5D8F}" type="presOf" srcId="{EA8FACF1-6B34-4114-947F-7846A2F6A33C}" destId="{7ABE2A78-99B1-4163-9C3D-B0370FFC030E}" srcOrd="0" destOrd="0" presId="urn:microsoft.com/office/officeart/2005/8/layout/hList1"/>
-    <dgm:cxn modelId="{5C61C430-8623-4928-A5AB-BB48198AAC11}" type="presOf" srcId="{EA9B429D-3F42-4DD1-ABAC-344AA45EF79D}" destId="{E8DBF4FE-3AEF-4F8D-9152-921B72A1D0F5}" srcOrd="0" destOrd="0" presId="urn:microsoft.com/office/officeart/2005/8/layout/hList1"/>
-    <dgm:cxn modelId="{6CE2D33F-80D1-4870-AFDF-01D8D08CB55F}" type="presOf" srcId="{FA9C42C7-5411-48D6-9F15-1BA2F8722AEC}" destId="{7F414582-7F16-4491-A4B3-FC8B0BCF506D}" srcOrd="0" destOrd="0" presId="urn:microsoft.com/office/officeart/2005/8/layout/hList1"/>
+    <dgm:cxn modelId="{4D0E6B1F-D7D9-459B-9CE0-1CD541E27262}" type="presOf" srcId="{EA8FACF1-6B34-4114-947F-7846A2F6A33C}" destId="{7ABE2A78-99B1-4163-9C3D-B0370FFC030E}" srcOrd="0" destOrd="0" presId="urn:microsoft.com/office/officeart/2005/8/layout/hList1"/>
+    <dgm:cxn modelId="{C4074D28-A30A-48B5-955F-DE563C57E1F9}" type="presOf" srcId="{EA9B429D-3F42-4DD1-ABAC-344AA45EF79D}" destId="{E8DBF4FE-3AEF-4F8D-9152-921B72A1D0F5}" srcOrd="0" destOrd="0" presId="urn:microsoft.com/office/officeart/2005/8/layout/hList1"/>
+    <dgm:cxn modelId="{D019D039-DC3C-47B6-879A-B60895BE79E6}" type="presOf" srcId="{21CC39FE-88C9-47CD-9E00-3CBF4C7ED5BD}" destId="{7F414582-7F16-4491-A4B3-FC8B0BCF506D}" srcOrd="0" destOrd="1" presId="urn:microsoft.com/office/officeart/2005/8/layout/hList1"/>
     <dgm:cxn modelId="{096C2863-46B9-47F9-8EF8-DFCBB28753E7}" srcId="{EA9B429D-3F42-4DD1-ABAC-344AA45EF79D}" destId="{EA8FACF1-6B34-4114-947F-7846A2F6A33C}" srcOrd="0" destOrd="0" parTransId="{1553D1D7-D271-4F59-B905-CA76D33BA158}" sibTransId="{3CDB1D2D-701F-4321-B28B-5DA58F9ECCE2}"/>
     <dgm:cxn modelId="{F478DF45-8C42-48F9-99E3-A5C9D76FB5F8}" srcId="{F78CDBCA-24C3-4FF7-82BC-27FA7215761C}" destId="{EA9B429D-3F42-4DD1-ABAC-344AA45EF79D}" srcOrd="2" destOrd="0" parTransId="{A45F3469-5518-41DF-92F9-F6BFA3213284}" sibTransId="{B20AFFC5-0F50-49AA-AAF9-F322BC628EB8}"/>
-    <dgm:cxn modelId="{400EEC4B-7DBD-41EB-AD33-1CDE31354B22}" type="presOf" srcId="{4EBF45D8-8044-460A-83EB-BDC5316FCDCC}" destId="{B4E49A74-AA44-47D9-96EE-A4F36AB92A33}" srcOrd="0" destOrd="0" presId="urn:microsoft.com/office/officeart/2005/8/layout/hList1"/>
-    <dgm:cxn modelId="{965CDA95-5926-4A22-AE8E-51AB3B6F1D04}" type="presOf" srcId="{855C5F98-C932-4C3C-BCDB-34ECD069CD64}" destId="{7ABE2A78-99B1-4163-9C3D-B0370FFC030E}" srcOrd="0" destOrd="2" presId="urn:microsoft.com/office/officeart/2005/8/layout/hList1"/>
-    <dgm:cxn modelId="{0CA0D098-CAC1-4560-9828-C115530F5EAA}" type="presOf" srcId="{0A187D2F-8CB9-4FE2-960F-2E11AED6711F}" destId="{7ABE2A78-99B1-4163-9C3D-B0370FFC030E}" srcOrd="0" destOrd="1" presId="urn:microsoft.com/office/officeart/2005/8/layout/hList1"/>
+    <dgm:cxn modelId="{991B0C51-70F6-444A-88CF-723A5C669ADC}" type="presOf" srcId="{4EBF45D8-8044-460A-83EB-BDC5316FCDCC}" destId="{B4E49A74-AA44-47D9-96EE-A4F36AB92A33}" srcOrd="0" destOrd="0" presId="urn:microsoft.com/office/officeart/2005/8/layout/hList1"/>
+    <dgm:cxn modelId="{2B501F8A-5637-4CCA-B7DE-494583BBDC5F}" type="presOf" srcId="{FA9C42C7-5411-48D6-9F15-1BA2F8722AEC}" destId="{7F414582-7F16-4491-A4B3-FC8B0BCF506D}" srcOrd="0" destOrd="0" presId="urn:microsoft.com/office/officeart/2005/8/layout/hList1"/>
+    <dgm:cxn modelId="{7DA398AD-4ACB-4A96-913E-232D4CB4BA74}" type="presOf" srcId="{0A187D2F-8CB9-4FE2-960F-2E11AED6711F}" destId="{7ABE2A78-99B1-4163-9C3D-B0370FFC030E}" srcOrd="0" destOrd="1" presId="urn:microsoft.com/office/officeart/2005/8/layout/hList1"/>
     <dgm:cxn modelId="{845A25AE-CF03-4282-A37B-893BB2222369}" srcId="{2D1FC2BB-EDC3-4A40-861C-1517AD8D7D5A}" destId="{FA9C42C7-5411-48D6-9F15-1BA2F8722AEC}" srcOrd="0" destOrd="0" parTransId="{4864FCB5-8628-4B13-9A11-9450F61B4D7D}" sibTransId="{187F3B91-8A9B-4274-A59D-397D76B3C9FC}"/>
     <dgm:cxn modelId="{F2D397AF-3D0C-4DD3-A273-D7DA7DD1184D}" srcId="{2D1FC2BB-EDC3-4A40-861C-1517AD8D7D5A}" destId="{21CC39FE-88C9-47CD-9E00-3CBF4C7ED5BD}" srcOrd="1" destOrd="0" parTransId="{9710AE88-3161-4722-A908-A8E820CD887F}" sibTransId="{C07A54EC-A5B9-4929-A22D-06C9B5ED64D2}"/>
     <dgm:cxn modelId="{577C2DB3-50CF-49E0-9AD0-0716952C1BA8}" srcId="{32AD55CE-620F-4E4E-A25A-70B2EA92A33C}" destId="{4EBF45D8-8044-460A-83EB-BDC5316FCDCC}" srcOrd="0" destOrd="0" parTransId="{9356092D-2A32-4C83-8CA2-164F5551557C}" sibTransId="{38BDA8C8-A0E8-44DF-B74B-12A18034D105}"/>
-    <dgm:cxn modelId="{049F84BA-3458-45EC-A684-7CF8ECF69A9C}" type="presOf" srcId="{32AD55CE-620F-4E4E-A25A-70B2EA92A33C}" destId="{662104D4-EF21-4078-AC4D-37152CCD4D3B}" srcOrd="0" destOrd="0" presId="urn:microsoft.com/office/officeart/2005/8/layout/hList1"/>
-    <dgm:cxn modelId="{08FEE6BE-0208-4B80-82A2-776AA2452B6D}" type="presOf" srcId="{F78CDBCA-24C3-4FF7-82BC-27FA7215761C}" destId="{0908EF02-63FC-43D1-A57F-2576EC8E9328}" srcOrd="0" destOrd="0" presId="urn:microsoft.com/office/officeart/2005/8/layout/hList1"/>
+    <dgm:cxn modelId="{939F76BA-9940-4116-AD32-43EDA834B468}" type="presOf" srcId="{855C5F98-C932-4C3C-BCDB-34ECD069CD64}" destId="{7ABE2A78-99B1-4163-9C3D-B0370FFC030E}" srcOrd="0" destOrd="2" presId="urn:microsoft.com/office/officeart/2005/8/layout/hList1"/>
     <dgm:cxn modelId="{DBE245BF-7EAC-4F77-87DD-2D513ED20669}" srcId="{EA9B429D-3F42-4DD1-ABAC-344AA45EF79D}" destId="{855C5F98-C932-4C3C-BCDB-34ECD069CD64}" srcOrd="2" destOrd="0" parTransId="{EBAD9F32-1194-4C25-BEC4-A1B4E24567C3}" sibTransId="{C3276026-B5A2-402B-A1BE-6B864BAADD7E}"/>
-    <dgm:cxn modelId="{38C0DAC2-10A5-4ADF-A4F0-3CE831089B7A}" type="presOf" srcId="{2D1FC2BB-EDC3-4A40-861C-1517AD8D7D5A}" destId="{FA885DE3-1FC6-4937-B28F-5207B2B606CF}" srcOrd="0" destOrd="0" presId="urn:microsoft.com/office/officeart/2005/8/layout/hList1"/>
+    <dgm:cxn modelId="{33A034C2-A71B-4FEC-B821-37C876AFC8C5}" type="presOf" srcId="{2D1FC2BB-EDC3-4A40-861C-1517AD8D7D5A}" destId="{FA885DE3-1FC6-4937-B28F-5207B2B606CF}" srcOrd="0" destOrd="0" presId="urn:microsoft.com/office/officeart/2005/8/layout/hList1"/>
+    <dgm:cxn modelId="{C715DCCC-499D-40FB-B917-2E896AAB4DE7}" type="presOf" srcId="{32AD55CE-620F-4E4E-A25A-70B2EA92A33C}" destId="{662104D4-EF21-4078-AC4D-37152CCD4D3B}" srcOrd="0" destOrd="0" presId="urn:microsoft.com/office/officeart/2005/8/layout/hList1"/>
+    <dgm:cxn modelId="{DF2E57E0-3B13-42C5-B693-A3CE219A13CE}" type="presOf" srcId="{F78CDBCA-24C3-4FF7-82BC-27FA7215761C}" destId="{0908EF02-63FC-43D1-A57F-2576EC8E9328}" srcOrd="0" destOrd="0" presId="urn:microsoft.com/office/officeart/2005/8/layout/hList1"/>
     <dgm:cxn modelId="{892D7AE5-FA7D-4E15-AA74-47CEE29FFB33}" srcId="{F78CDBCA-24C3-4FF7-82BC-27FA7215761C}" destId="{32AD55CE-620F-4E4E-A25A-70B2EA92A33C}" srcOrd="1" destOrd="0" parTransId="{0829CDFC-7A04-44C0-B02D-B1D1848556F0}" sibTransId="{A5D1DAA1-F3E2-48F0-B1E5-43925D7C4E42}"/>
     <dgm:cxn modelId="{97C9BAEB-23D3-44D4-91BB-7BB8B25F384A}" srcId="{EA9B429D-3F42-4DD1-ABAC-344AA45EF79D}" destId="{0A187D2F-8CB9-4FE2-960F-2E11AED6711F}" srcOrd="1" destOrd="0" parTransId="{7A59BDD9-4AD8-455F-A9FC-23FEE54A9745}" sibTransId="{5D5715B7-41DB-4624-8084-6ED283A3C384}"/>
     <dgm:cxn modelId="{32B799F7-A3B1-461D-ABAC-360BA44B680D}" srcId="{F78CDBCA-24C3-4FF7-82BC-27FA7215761C}" destId="{2D1FC2BB-EDC3-4A40-861C-1517AD8D7D5A}" srcOrd="0" destOrd="0" parTransId="{DB620875-1B0B-4ECE-A7CE-4EBB988EFBEA}" sibTransId="{545E6DA7-75C0-4422-9E0C-AE9BD599512F}"/>
-    <dgm:cxn modelId="{D373F089-4955-4E0A-B7E3-C14254F4681E}" type="presParOf" srcId="{0908EF02-63FC-43D1-A57F-2576EC8E9328}" destId="{BFF0B067-89F6-483E-8FDB-1C30BBFB2ABB}" srcOrd="0" destOrd="0" presId="urn:microsoft.com/office/officeart/2005/8/layout/hList1"/>
-    <dgm:cxn modelId="{07BE4BF9-F748-4898-B65C-105404604FD2}" type="presParOf" srcId="{BFF0B067-89F6-483E-8FDB-1C30BBFB2ABB}" destId="{FA885DE3-1FC6-4937-B28F-5207B2B606CF}" srcOrd="0" destOrd="0" presId="urn:microsoft.com/office/officeart/2005/8/layout/hList1"/>
-    <dgm:cxn modelId="{3C2753B5-A43C-4B88-A650-4815D2376DFA}" type="presParOf" srcId="{BFF0B067-89F6-483E-8FDB-1C30BBFB2ABB}" destId="{7F414582-7F16-4491-A4B3-FC8B0BCF506D}" srcOrd="1" destOrd="0" presId="urn:microsoft.com/office/officeart/2005/8/layout/hList1"/>
-    <dgm:cxn modelId="{8D8FC31A-C66F-4DC0-9DD4-FFD195A62265}" type="presParOf" srcId="{0908EF02-63FC-43D1-A57F-2576EC8E9328}" destId="{D3290820-7672-4DE0-AB8B-3B95B4E99962}" srcOrd="1" destOrd="0" presId="urn:microsoft.com/office/officeart/2005/8/layout/hList1"/>
-    <dgm:cxn modelId="{E37E57AD-125B-4A79-BD5E-D827728FFF84}" type="presParOf" srcId="{0908EF02-63FC-43D1-A57F-2576EC8E9328}" destId="{3B18D8B0-9169-421B-9568-2DC4633017B8}" srcOrd="2" destOrd="0" presId="urn:microsoft.com/office/officeart/2005/8/layout/hList1"/>
-    <dgm:cxn modelId="{3DFEE5C0-6363-4CF6-B2FC-742E592FF9D4}" type="presParOf" srcId="{3B18D8B0-9169-421B-9568-2DC4633017B8}" destId="{662104D4-EF21-4078-AC4D-37152CCD4D3B}" srcOrd="0" destOrd="0" presId="urn:microsoft.com/office/officeart/2005/8/layout/hList1"/>
-    <dgm:cxn modelId="{43335B47-B890-4550-9485-FF49BAA6921B}" type="presParOf" srcId="{3B18D8B0-9169-421B-9568-2DC4633017B8}" destId="{B4E49A74-AA44-47D9-96EE-A4F36AB92A33}" srcOrd="1" destOrd="0" presId="urn:microsoft.com/office/officeart/2005/8/layout/hList1"/>
-    <dgm:cxn modelId="{D4ED429A-D08D-407C-BF7F-C51C77D22C70}" type="presParOf" srcId="{0908EF02-63FC-43D1-A57F-2576EC8E9328}" destId="{86211B89-00A5-48B7-A063-EEF2E33F35C2}" srcOrd="3" destOrd="0" presId="urn:microsoft.com/office/officeart/2005/8/layout/hList1"/>
-    <dgm:cxn modelId="{9BA2E396-A278-4C30-A3B8-CF7B99E3E394}" type="presParOf" srcId="{0908EF02-63FC-43D1-A57F-2576EC8E9328}" destId="{E25D777E-6669-4918-92B6-13E3A569CA21}" srcOrd="4" destOrd="0" presId="urn:microsoft.com/office/officeart/2005/8/layout/hList1"/>
-    <dgm:cxn modelId="{872CB726-11C7-4D7B-8DA4-B7EE923CB213}" type="presParOf" srcId="{E25D777E-6669-4918-92B6-13E3A569CA21}" destId="{E8DBF4FE-3AEF-4F8D-9152-921B72A1D0F5}" srcOrd="0" destOrd="0" presId="urn:microsoft.com/office/officeart/2005/8/layout/hList1"/>
-    <dgm:cxn modelId="{49774976-C653-40F2-891B-3D7A10F5EB62}" type="presParOf" srcId="{E25D777E-6669-4918-92B6-13E3A569CA21}" destId="{7ABE2A78-99B1-4163-9C3D-B0370FFC030E}" srcOrd="1" destOrd="0" presId="urn:microsoft.com/office/officeart/2005/8/layout/hList1"/>
+    <dgm:cxn modelId="{3B8FB1E7-E566-4C61-B6ED-A415097D92B9}" type="presParOf" srcId="{0908EF02-63FC-43D1-A57F-2576EC8E9328}" destId="{BFF0B067-89F6-483E-8FDB-1C30BBFB2ABB}" srcOrd="0" destOrd="0" presId="urn:microsoft.com/office/officeart/2005/8/layout/hList1"/>
+    <dgm:cxn modelId="{4C4EBDDB-8564-45E9-B2A0-7E4385FB6E8F}" type="presParOf" srcId="{BFF0B067-89F6-483E-8FDB-1C30BBFB2ABB}" destId="{FA885DE3-1FC6-4937-B28F-5207B2B606CF}" srcOrd="0" destOrd="0" presId="urn:microsoft.com/office/officeart/2005/8/layout/hList1"/>
+    <dgm:cxn modelId="{9D9DF8D2-53F6-4B2D-9068-4BC682400B0A}" type="presParOf" srcId="{BFF0B067-89F6-483E-8FDB-1C30BBFB2ABB}" destId="{7F414582-7F16-4491-A4B3-FC8B0BCF506D}" srcOrd="1" destOrd="0" presId="urn:microsoft.com/office/officeart/2005/8/layout/hList1"/>
+    <dgm:cxn modelId="{7F041838-FD74-4884-A058-D8E93DFA0607}" type="presParOf" srcId="{0908EF02-63FC-43D1-A57F-2576EC8E9328}" destId="{D3290820-7672-4DE0-AB8B-3B95B4E99962}" srcOrd="1" destOrd="0" presId="urn:microsoft.com/office/officeart/2005/8/layout/hList1"/>
+    <dgm:cxn modelId="{1D351AE3-33C1-4327-AEFF-D0157D797877}" type="presParOf" srcId="{0908EF02-63FC-43D1-A57F-2576EC8E9328}" destId="{3B18D8B0-9169-421B-9568-2DC4633017B8}" srcOrd="2" destOrd="0" presId="urn:microsoft.com/office/officeart/2005/8/layout/hList1"/>
+    <dgm:cxn modelId="{64C1BCF6-D842-47F2-A593-C143921387CD}" type="presParOf" srcId="{3B18D8B0-9169-421B-9568-2DC4633017B8}" destId="{662104D4-EF21-4078-AC4D-37152CCD4D3B}" srcOrd="0" destOrd="0" presId="urn:microsoft.com/office/officeart/2005/8/layout/hList1"/>
+    <dgm:cxn modelId="{0CB1CC03-4822-4006-88A6-716BE3AD5AC7}" type="presParOf" srcId="{3B18D8B0-9169-421B-9568-2DC4633017B8}" destId="{B4E49A74-AA44-47D9-96EE-A4F36AB92A33}" srcOrd="1" destOrd="0" presId="urn:microsoft.com/office/officeart/2005/8/layout/hList1"/>
+    <dgm:cxn modelId="{21858A96-B28F-4B57-95B7-94D8806AE016}" type="presParOf" srcId="{0908EF02-63FC-43D1-A57F-2576EC8E9328}" destId="{86211B89-00A5-48B7-A063-EEF2E33F35C2}" srcOrd="3" destOrd="0" presId="urn:microsoft.com/office/officeart/2005/8/layout/hList1"/>
+    <dgm:cxn modelId="{A7492230-B2A5-4987-94C1-FB0F3E6C9133}" type="presParOf" srcId="{0908EF02-63FC-43D1-A57F-2576EC8E9328}" destId="{E25D777E-6669-4918-92B6-13E3A569CA21}" srcOrd="4" destOrd="0" presId="urn:microsoft.com/office/officeart/2005/8/layout/hList1"/>
+    <dgm:cxn modelId="{0854051B-0BEF-45FB-BF59-4DC04B7C17EE}" type="presParOf" srcId="{E25D777E-6669-4918-92B6-13E3A569CA21}" destId="{E8DBF4FE-3AEF-4F8D-9152-921B72A1D0F5}" srcOrd="0" destOrd="0" presId="urn:microsoft.com/office/officeart/2005/8/layout/hList1"/>
+    <dgm:cxn modelId="{66551616-723E-47E0-B433-3D8EF91B2D85}" type="presParOf" srcId="{E25D777E-6669-4918-92B6-13E3A569CA21}" destId="{7ABE2A78-99B1-4163-9C3D-B0370FFC030E}" srcOrd="1" destOrd="0" presId="urn:microsoft.com/office/officeart/2005/8/layout/hList1"/>
   </dgm:cxnLst>
   <dgm:bg/>
   <dgm:whole/>
@@ -5436,10 +5203,10 @@
         <a:lstStyle/>
         <a:p>
           <a:r>
-            <a:rPr lang="de-DE" dirty="0" err="1"/>
+            <a:rPr lang="de-DE" err="1"/>
             <a:t>Auction</a:t>
           </a:r>
-          <a:endParaRPr lang="de-DE" dirty="0"/>
+          <a:endParaRPr lang="de-DE"/>
         </a:p>
       </dgm:t>
     </dgm:pt>
@@ -5473,7 +5240,7 @@
         <a:lstStyle/>
         <a:p>
           <a:r>
-            <a:rPr lang="de-DE" dirty="0"/>
+            <a:rPr lang="de-DE"/>
             <a:t>Item wird an Höchstbietenden versteigert</a:t>
           </a:r>
         </a:p>
@@ -5509,10 +5276,10 @@
         <a:lstStyle/>
         <a:p>
           <a:r>
-            <a:rPr lang="de-DE" dirty="0" err="1"/>
+            <a:rPr lang="de-DE" err="1"/>
             <a:t>Auctions</a:t>
           </a:r>
-          <a:endParaRPr lang="de-DE" dirty="0"/>
+          <a:endParaRPr lang="de-DE"/>
         </a:p>
       </dgm:t>
     </dgm:pt>
@@ -5546,15 +5313,15 @@
         <a:lstStyle/>
         <a:p>
           <a:r>
-            <a:rPr lang="de-DE" dirty="0"/>
+            <a:rPr lang="de-DE"/>
             <a:t>Verwaltet alle Auktionen (</a:t>
           </a:r>
           <a:r>
-            <a:rPr lang="de-DE" dirty="0" err="1"/>
+            <a:rPr lang="de-DE" err="1"/>
             <a:t>Dict</a:t>
           </a:r>
           <a:r>
-            <a:rPr lang="de-DE" dirty="0"/>
+            <a:rPr lang="de-DE"/>
             <a:t>)</a:t>
           </a:r>
         </a:p>
@@ -5590,7 +5357,7 @@
         <a:lstStyle/>
         <a:p>
           <a:r>
-            <a:rPr lang="de-DE" dirty="0"/>
+            <a:rPr lang="de-DE"/>
             <a:t>Hinzufügen, Bieten, Löschen, Suchen, Empfehlen, Abwickeln</a:t>
           </a:r>
         </a:p>
@@ -5626,7 +5393,7 @@
         <a:lstStyle/>
         <a:p>
           <a:r>
-            <a:rPr lang="de-DE" dirty="0"/>
+            <a:rPr lang="de-DE"/>
             <a:t>Item</a:t>
           </a:r>
         </a:p>
@@ -5662,15 +5429,15 @@
         <a:lstStyle/>
         <a:p>
           <a:r>
-            <a:rPr lang="de-DE" dirty="0"/>
+            <a:rPr lang="de-DE"/>
             <a:t>Kann auf Marktplatzt </a:t>
           </a:r>
           <a:r>
-            <a:rPr lang="de-DE" dirty="0" err="1"/>
+            <a:rPr lang="de-DE" err="1"/>
             <a:t>ge</a:t>
           </a:r>
           <a:r>
-            <a:rPr lang="de-DE" dirty="0"/>
+            <a:rPr lang="de-DE"/>
             <a:t>-/verkauft werden</a:t>
           </a:r>
         </a:p>
@@ -5706,7 +5473,7 @@
         <a:lstStyle/>
         <a:p>
           <a:r>
-            <a:rPr lang="de-DE" dirty="0"/>
+            <a:rPr lang="de-DE"/>
             <a:t>Stack</a:t>
           </a:r>
         </a:p>
@@ -5742,7 +5509,7 @@
         <a:lstStyle/>
         <a:p>
           <a:r>
-            <a:rPr lang="de-DE" dirty="0"/>
+            <a:rPr lang="de-DE"/>
             <a:t>Verwaltet: Biet Vorgänge, Mindestgebot, Verfallszeiten, Porto</a:t>
           </a:r>
         </a:p>
@@ -5781,7 +5548,6 @@
             <a:rPr lang="de-DE"/>
             <a:t>Simulator-Thread im Hintergrund</a:t>
           </a:r>
-          <a:endParaRPr lang="de-DE" dirty="0"/>
         </a:p>
       </dgm:t>
     </dgm:pt>
@@ -5815,7 +5581,7 @@
         <a:lstStyle/>
         <a:p>
           <a:r>
-            <a:rPr lang="de-DE" dirty="0"/>
+            <a:rPr lang="de-DE"/>
             <a:t>Besitzt Namen, Beschreibung, Mindestgebot</a:t>
           </a:r>
         </a:p>
@@ -5851,7 +5617,7 @@
         <a:lstStyle/>
         <a:p>
           <a:r>
-            <a:rPr lang="de-DE" dirty="0"/>
+            <a:rPr lang="de-DE"/>
             <a:t>Implementiert Stapel auf Basis der Python-Liste</a:t>
           </a:r>
         </a:p>
@@ -5887,7 +5653,7 @@
         <a:lstStyle/>
         <a:p>
           <a:r>
-            <a:rPr lang="de-DE" dirty="0"/>
+            <a:rPr lang="de-DE"/>
             <a:t>Standard-Stapeloperationen</a:t>
           </a:r>
         </a:p>
@@ -6028,47 +5794,47 @@
   </dgm:ptLst>
   <dgm:cxnLst>
     <dgm:cxn modelId="{D8106A02-30D4-4ED8-873B-7C79729A6A5B}" srcId="{7C09F5AA-A1E7-40DE-8A3D-22B861E87816}" destId="{F4564C31-90D6-48A2-882B-411CFBA57FA2}" srcOrd="0" destOrd="0" parTransId="{F17E61C6-5DD3-41A4-B1FE-5417EB3B87F1}" sibTransId="{BF91B8B3-81CC-4A0C-89F7-4F11FDD1F20B}"/>
-    <dgm:cxn modelId="{90831E03-9607-4F05-A1A7-6DAFF3378F40}" type="presOf" srcId="{8290F8B6-BA9E-4DE0-BBA1-B8571B2F6165}" destId="{2B136E93-0CF3-415F-9C52-F11E46B4D872}" srcOrd="0" destOrd="1" presId="urn:microsoft.com/office/officeart/2005/8/layout/hList1"/>
     <dgm:cxn modelId="{15863604-B3BC-41CF-9997-8CD0822A14EA}" srcId="{96527258-0300-4C95-9D4A-11564CF63440}" destId="{256FF364-040A-412F-9C40-AA48D009AB77}" srcOrd="1" destOrd="0" parTransId="{62B274CA-2DE7-4EBA-AC8F-2B18689CEEFD}" sibTransId="{A885FE80-F24D-4B6B-82D2-3EA0EC417A13}"/>
-    <dgm:cxn modelId="{5910B11D-0F30-4AF5-BFF4-069EFA78F319}" type="presOf" srcId="{536F95CC-F480-4738-8038-9A8B0436FA8E}" destId="{DA60A9EA-03A8-45E3-A820-C9EE8A85DE99}" srcOrd="0" destOrd="0" presId="urn:microsoft.com/office/officeart/2005/8/layout/hList1"/>
+    <dgm:cxn modelId="{91949022-1B2D-4726-9AD6-C508426D51DA}" type="presOf" srcId="{8290F8B6-BA9E-4DE0-BBA1-B8571B2F6165}" destId="{2B136E93-0CF3-415F-9C52-F11E46B4D872}" srcOrd="0" destOrd="1" presId="urn:microsoft.com/office/officeart/2005/8/layout/hList1"/>
+    <dgm:cxn modelId="{5AF3132A-2174-4D06-AFC4-7A8F8195B0C8}" type="presOf" srcId="{97987EDB-E8B0-4E6C-BD51-44555D7D43EA}" destId="{0D68E2BF-84E0-49BF-BFF9-13D6618FEA8D}" srcOrd="0" destOrd="0" presId="urn:microsoft.com/office/officeart/2005/8/layout/hList1"/>
+    <dgm:cxn modelId="{B234612A-AE1D-4867-B14F-183F231921CC}" type="presOf" srcId="{50CED5B4-A642-4927-8B62-19F96998AB4A}" destId="{8C66B216-8C40-41E7-8A84-A29E9C3C4690}" srcOrd="0" destOrd="0" presId="urn:microsoft.com/office/officeart/2005/8/layout/hList1"/>
     <dgm:cxn modelId="{6AD05D37-1365-4D35-8C17-78410EEE3ADA}" srcId="{09AE1101-D6B1-4FFC-9E3F-14CCE827B8C4}" destId="{50CED5B4-A642-4927-8B62-19F96998AB4A}" srcOrd="1" destOrd="0" parTransId="{FBC0E31C-BFD4-4C0A-A769-F40B47B75ADE}" sibTransId="{ACDDD92D-CA27-4E65-90BC-3C46D25DF4EE}"/>
+    <dgm:cxn modelId="{C3A0DA3F-3FA8-4187-972E-C694C2A0CB43}" type="presOf" srcId="{679CB426-1249-4E13-B637-1B9306693E08}" destId="{DA60A9EA-03A8-45E3-A820-C9EE8A85DE99}" srcOrd="0" destOrd="1" presId="urn:microsoft.com/office/officeart/2005/8/layout/hList1"/>
     <dgm:cxn modelId="{D016A75E-313B-4A07-A751-4A49020987DE}" srcId="{96527258-0300-4C95-9D4A-11564CF63440}" destId="{B94EB6BE-C84A-47F7-B27E-BF39BF253DE2}" srcOrd="0" destOrd="0" parTransId="{6F58571A-F3B4-4DD8-9F1E-D283ECA427D4}" sibTransId="{044F4EB1-5866-44E3-BC68-E199D0BBBA34}"/>
     <dgm:cxn modelId="{314DF744-CCC5-4F4D-BCBB-1D5FCE7FBF20}" srcId="{09AE1101-D6B1-4FFC-9E3F-14CCE827B8C4}" destId="{96527258-0300-4C95-9D4A-11564CF63440}" srcOrd="3" destOrd="0" parTransId="{883326B9-0ED4-4367-BFE8-B58294CCF383}" sibTransId="{D842242C-0A92-4254-8648-7E0735136662}"/>
     <dgm:cxn modelId="{5DC9DC71-B889-49C0-B2E5-534D24DDC58B}" srcId="{97987EDB-E8B0-4E6C-BD51-44555D7D43EA}" destId="{18A47FFF-0D3A-47BE-80BB-F2613C1306DB}" srcOrd="0" destOrd="0" parTransId="{D1F91A8A-ADC6-4A7E-AA2C-CBF5D95EFA87}" sibTransId="{BBBC2286-4CBB-4A12-A86F-3A3F9F6554A0}"/>
-    <dgm:cxn modelId="{DD74BB73-CF55-499D-ABFE-1ED9EA481CF2}" type="presOf" srcId="{16CAA4AB-AAF4-40C8-91E7-3AA6080F2D60}" destId="{502A4AD6-1036-4C67-8435-1DCA1D9746A3}" srcOrd="0" destOrd="1" presId="urn:microsoft.com/office/officeart/2005/8/layout/hList1"/>
+    <dgm:cxn modelId="{104D2152-58FD-401A-9844-C78E0CE98DDE}" type="presOf" srcId="{18A47FFF-0D3A-47BE-80BB-F2613C1306DB}" destId="{502A4AD6-1036-4C67-8435-1DCA1D9746A3}" srcOrd="0" destOrd="0" presId="urn:microsoft.com/office/officeart/2005/8/layout/hList1"/>
+    <dgm:cxn modelId="{06843052-F0A7-4988-9D63-3BA58F2DA96D}" type="presOf" srcId="{16CAA4AB-AAF4-40C8-91E7-3AA6080F2D60}" destId="{502A4AD6-1036-4C67-8435-1DCA1D9746A3}" srcOrd="0" destOrd="1" presId="urn:microsoft.com/office/officeart/2005/8/layout/hList1"/>
     <dgm:cxn modelId="{2720A877-3877-40BD-AFB8-28BEE88D501C}" srcId="{50CED5B4-A642-4927-8B62-19F96998AB4A}" destId="{536F95CC-F480-4738-8038-9A8B0436FA8E}" srcOrd="0" destOrd="0" parTransId="{285A65B5-6AED-48B1-8D37-271B2B0C837D}" sibTransId="{C4C8710F-9ED8-4859-B974-7CFAB3D8EFD6}"/>
-    <dgm:cxn modelId="{8FEB5078-51F0-4E16-889D-4ADF7C6ACA51}" type="presOf" srcId="{D1929C18-D92E-411F-BF2D-FC6D9C27D671}" destId="{DA60A9EA-03A8-45E3-A820-C9EE8A85DE99}" srcOrd="0" destOrd="2" presId="urn:microsoft.com/office/officeart/2005/8/layout/hList1"/>
-    <dgm:cxn modelId="{4C20E158-7E62-4BB6-A863-FFA94166C946}" type="presOf" srcId="{7C09F5AA-A1E7-40DE-8A3D-22B861E87816}" destId="{D5EAD071-5DA6-48E9-A3CD-0612E5BBC876}" srcOrd="0" destOrd="0" presId="urn:microsoft.com/office/officeart/2005/8/layout/hList1"/>
-    <dgm:cxn modelId="{DDAF0281-B352-40E2-8856-D21E343A289B}" type="presOf" srcId="{18A47FFF-0D3A-47BE-80BB-F2613C1306DB}" destId="{502A4AD6-1036-4C67-8435-1DCA1D9746A3}" srcOrd="0" destOrd="0" presId="urn:microsoft.com/office/officeart/2005/8/layout/hList1"/>
-    <dgm:cxn modelId="{3B178A81-79E5-4857-8C84-27C6FEEDCACE}" type="presOf" srcId="{B94EB6BE-C84A-47F7-B27E-BF39BF253DE2}" destId="{41D49699-3BF9-47AF-8ABB-39C6C6C3B550}" srcOrd="0" destOrd="0" presId="urn:microsoft.com/office/officeart/2005/8/layout/hList1"/>
-    <dgm:cxn modelId="{9A2C6A84-6403-45C9-8CFF-3D6D1E62C32A}" type="presOf" srcId="{09AE1101-D6B1-4FFC-9E3F-14CCE827B8C4}" destId="{2943C09E-F4C7-44CA-A909-A40B34C2B43C}" srcOrd="0" destOrd="0" presId="urn:microsoft.com/office/officeart/2005/8/layout/hList1"/>
+    <dgm:cxn modelId="{EE6ACA79-11C4-4382-9E7A-3FA1235BA5A5}" type="presOf" srcId="{7C09F5AA-A1E7-40DE-8A3D-22B861E87816}" destId="{D5EAD071-5DA6-48E9-A3CD-0612E5BBC876}" srcOrd="0" destOrd="0" presId="urn:microsoft.com/office/officeart/2005/8/layout/hList1"/>
+    <dgm:cxn modelId="{7E00C280-9C96-4DF8-A9CD-0C19C6451735}" type="presOf" srcId="{536F95CC-F480-4738-8038-9A8B0436FA8E}" destId="{DA60A9EA-03A8-45E3-A820-C9EE8A85DE99}" srcOrd="0" destOrd="0" presId="urn:microsoft.com/office/officeart/2005/8/layout/hList1"/>
     <dgm:cxn modelId="{93954E8C-47E6-4171-936C-935B5D1C4D66}" srcId="{97987EDB-E8B0-4E6C-BD51-44555D7D43EA}" destId="{16CAA4AB-AAF4-40C8-91E7-3AA6080F2D60}" srcOrd="1" destOrd="0" parTransId="{C6FA8B37-FC4E-42CF-B0BD-81B8650AF514}" sibTransId="{1E5B26C7-2256-482A-BCD4-631E42EF3F3D}"/>
-    <dgm:cxn modelId="{867F9491-6C4E-4652-AB7F-FC433111113F}" type="presOf" srcId="{256FF364-040A-412F-9C40-AA48D009AB77}" destId="{41D49699-3BF9-47AF-8ABB-39C6C6C3B550}" srcOrd="0" destOrd="1" presId="urn:microsoft.com/office/officeart/2005/8/layout/hList1"/>
     <dgm:cxn modelId="{A203D397-42DC-4CC5-A7D1-13B1917862FA}" srcId="{09AE1101-D6B1-4FFC-9E3F-14CCE827B8C4}" destId="{97987EDB-E8B0-4E6C-BD51-44555D7D43EA}" srcOrd="0" destOrd="0" parTransId="{33FF702E-E294-45F5-ACC0-78C8A347376B}" sibTransId="{0AF4CFA4-CD2D-46FF-B244-096DDB053AB0}"/>
-    <dgm:cxn modelId="{7726C3B1-72FA-476B-87C3-719B337FA1AC}" type="presOf" srcId="{679CB426-1249-4E13-B637-1B9306693E08}" destId="{DA60A9EA-03A8-45E3-A820-C9EE8A85DE99}" srcOrd="0" destOrd="1" presId="urn:microsoft.com/office/officeart/2005/8/layout/hList1"/>
+    <dgm:cxn modelId="{CDDEA398-0709-4855-8D18-202E2E9A5C6F}" type="presOf" srcId="{09AE1101-D6B1-4FFC-9E3F-14CCE827B8C4}" destId="{2943C09E-F4C7-44CA-A909-A40B34C2B43C}" srcOrd="0" destOrd="0" presId="urn:microsoft.com/office/officeart/2005/8/layout/hList1"/>
+    <dgm:cxn modelId="{EFD7E7AE-ADA0-4721-9559-DD4E1D1D853A}" type="presOf" srcId="{B94EB6BE-C84A-47F7-B27E-BF39BF253DE2}" destId="{41D49699-3BF9-47AF-8ABB-39C6C6C3B550}" srcOrd="0" destOrd="0" presId="urn:microsoft.com/office/officeart/2005/8/layout/hList1"/>
     <dgm:cxn modelId="{5A060FBE-D4B5-4806-8800-81B983B69981}" srcId="{50CED5B4-A642-4927-8B62-19F96998AB4A}" destId="{D1929C18-D92E-411F-BF2D-FC6D9C27D671}" srcOrd="2" destOrd="0" parTransId="{D3558162-23DE-43CF-A1C3-6C17E17610AC}" sibTransId="{5560EE90-F0C4-4EBC-B34A-E0D1F0454E49}"/>
     <dgm:cxn modelId="{4BB392CB-2753-4C4A-9F5A-3963315A6BF8}" srcId="{09AE1101-D6B1-4FFC-9E3F-14CCE827B8C4}" destId="{7C09F5AA-A1E7-40DE-8A3D-22B861E87816}" srcOrd="2" destOrd="0" parTransId="{FC431EB7-995D-4567-954C-C045A7ADE7E5}" sibTransId="{7382BA45-0123-4D2E-AA9D-C046746C5ED6}"/>
+    <dgm:cxn modelId="{4AABAECB-15B6-4299-ACA2-494B189A22E1}" type="presOf" srcId="{96527258-0300-4C95-9D4A-11564CF63440}" destId="{5EC15CC8-115F-43FC-87FF-478537DDD29B}" srcOrd="0" destOrd="0" presId="urn:microsoft.com/office/officeart/2005/8/layout/hList1"/>
+    <dgm:cxn modelId="{0DC26ACE-EA3E-4491-A792-C864F1A8C4D7}" type="presOf" srcId="{D1929C18-D92E-411F-BF2D-FC6D9C27D671}" destId="{DA60A9EA-03A8-45E3-A820-C9EE8A85DE99}" srcOrd="0" destOrd="2" presId="urn:microsoft.com/office/officeart/2005/8/layout/hList1"/>
     <dgm:cxn modelId="{7200DDD5-9C3B-49C9-9387-F0CD76AD010F}" srcId="{7C09F5AA-A1E7-40DE-8A3D-22B861E87816}" destId="{8290F8B6-BA9E-4DE0-BBA1-B8571B2F6165}" srcOrd="1" destOrd="0" parTransId="{A5A94869-1BE2-4509-A294-9B2A12F62C14}" sibTransId="{3D1F4F19-9EAE-45A9-AFD4-A67DBDA84439}"/>
-    <dgm:cxn modelId="{86D7A5DE-61E7-481B-92E8-411C068FD979}" type="presOf" srcId="{50CED5B4-A642-4927-8B62-19F96998AB4A}" destId="{8C66B216-8C40-41E7-8A84-A29E9C3C4690}" srcOrd="0" destOrd="0" presId="urn:microsoft.com/office/officeart/2005/8/layout/hList1"/>
-    <dgm:cxn modelId="{10B8CAE0-79D1-40D5-BA9E-C77C4F18B804}" type="presOf" srcId="{97987EDB-E8B0-4E6C-BD51-44555D7D43EA}" destId="{0D68E2BF-84E0-49BF-BFF9-13D6618FEA8D}" srcOrd="0" destOrd="0" presId="urn:microsoft.com/office/officeart/2005/8/layout/hList1"/>
-    <dgm:cxn modelId="{2E5D8EEB-F450-40B9-A0B6-D4F168FE1E3D}" type="presOf" srcId="{96527258-0300-4C95-9D4A-11564CF63440}" destId="{5EC15CC8-115F-43FC-87FF-478537DDD29B}" srcOrd="0" destOrd="0" presId="urn:microsoft.com/office/officeart/2005/8/layout/hList1"/>
-    <dgm:cxn modelId="{BB3A4EF0-8082-4C94-AFEB-02B2DC6C6A05}" type="presOf" srcId="{F4564C31-90D6-48A2-882B-411CFBA57FA2}" destId="{2B136E93-0CF3-415F-9C52-F11E46B4D872}" srcOrd="0" destOrd="0" presId="urn:microsoft.com/office/officeart/2005/8/layout/hList1"/>
+    <dgm:cxn modelId="{7767F1E0-DD0F-46B0-B8EF-599EC0EFF237}" type="presOf" srcId="{256FF364-040A-412F-9C40-AA48D009AB77}" destId="{41D49699-3BF9-47AF-8ABB-39C6C6C3B550}" srcOrd="0" destOrd="1" presId="urn:microsoft.com/office/officeart/2005/8/layout/hList1"/>
+    <dgm:cxn modelId="{ECFCB0EE-FFA6-4277-A968-733A1CC22D89}" type="presOf" srcId="{F4564C31-90D6-48A2-882B-411CFBA57FA2}" destId="{2B136E93-0CF3-415F-9C52-F11E46B4D872}" srcOrd="0" destOrd="0" presId="urn:microsoft.com/office/officeart/2005/8/layout/hList1"/>
     <dgm:cxn modelId="{69E064F2-8FB7-44E1-B649-B5D7876A5020}" srcId="{50CED5B4-A642-4927-8B62-19F96998AB4A}" destId="{679CB426-1249-4E13-B637-1B9306693E08}" srcOrd="1" destOrd="0" parTransId="{D6497039-BCC5-4C54-9AFF-0828375889CA}" sibTransId="{F65615C0-B5C0-485C-AE9E-548C127E73A6}"/>
-    <dgm:cxn modelId="{DFEAF8D5-1591-479C-BFE1-88D9D262FDD2}" type="presParOf" srcId="{2943C09E-F4C7-44CA-A909-A40B34C2B43C}" destId="{52C63B31-5962-4371-AC73-3A12F8737BD9}" srcOrd="0" destOrd="0" presId="urn:microsoft.com/office/officeart/2005/8/layout/hList1"/>
-    <dgm:cxn modelId="{4E22758B-2090-475A-9BCC-4B2FF726EE64}" type="presParOf" srcId="{52C63B31-5962-4371-AC73-3A12F8737BD9}" destId="{0D68E2BF-84E0-49BF-BFF9-13D6618FEA8D}" srcOrd="0" destOrd="0" presId="urn:microsoft.com/office/officeart/2005/8/layout/hList1"/>
-    <dgm:cxn modelId="{0A5B8563-347A-4816-AF78-6436C9C877ED}" type="presParOf" srcId="{52C63B31-5962-4371-AC73-3A12F8737BD9}" destId="{502A4AD6-1036-4C67-8435-1DCA1D9746A3}" srcOrd="1" destOrd="0" presId="urn:microsoft.com/office/officeart/2005/8/layout/hList1"/>
-    <dgm:cxn modelId="{769BBE91-A4A6-474F-B612-8BA722A3877B}" type="presParOf" srcId="{2943C09E-F4C7-44CA-A909-A40B34C2B43C}" destId="{733D4BBD-C397-4DBD-90B1-C312979FB884}" srcOrd="1" destOrd="0" presId="urn:microsoft.com/office/officeart/2005/8/layout/hList1"/>
-    <dgm:cxn modelId="{17725B50-DB02-41EE-B761-771C5BC3A189}" type="presParOf" srcId="{2943C09E-F4C7-44CA-A909-A40B34C2B43C}" destId="{B2A87E55-46DE-4E8D-8880-C9CF5F5F2157}" srcOrd="2" destOrd="0" presId="urn:microsoft.com/office/officeart/2005/8/layout/hList1"/>
-    <dgm:cxn modelId="{603032F6-FF24-431D-9DD5-A88F5C9EB1D4}" type="presParOf" srcId="{B2A87E55-46DE-4E8D-8880-C9CF5F5F2157}" destId="{8C66B216-8C40-41E7-8A84-A29E9C3C4690}" srcOrd="0" destOrd="0" presId="urn:microsoft.com/office/officeart/2005/8/layout/hList1"/>
-    <dgm:cxn modelId="{AD4A48D7-9DD8-4C30-AFF9-1A880807B995}" type="presParOf" srcId="{B2A87E55-46DE-4E8D-8880-C9CF5F5F2157}" destId="{DA60A9EA-03A8-45E3-A820-C9EE8A85DE99}" srcOrd="1" destOrd="0" presId="urn:microsoft.com/office/officeart/2005/8/layout/hList1"/>
-    <dgm:cxn modelId="{EAF59547-F2A2-407B-B0A4-4FBDFFC36684}" type="presParOf" srcId="{2943C09E-F4C7-44CA-A909-A40B34C2B43C}" destId="{EDF24B78-6BAB-49ED-B120-A9925F2925AA}" srcOrd="3" destOrd="0" presId="urn:microsoft.com/office/officeart/2005/8/layout/hList1"/>
-    <dgm:cxn modelId="{550C0BA6-8FB3-4D07-B876-26887F8F4771}" type="presParOf" srcId="{2943C09E-F4C7-44CA-A909-A40B34C2B43C}" destId="{DB0C7B25-8543-488C-AD23-9C28CEC7CFB7}" srcOrd="4" destOrd="0" presId="urn:microsoft.com/office/officeart/2005/8/layout/hList1"/>
-    <dgm:cxn modelId="{82A55614-4143-444C-915A-A08E78AB1D4F}" type="presParOf" srcId="{DB0C7B25-8543-488C-AD23-9C28CEC7CFB7}" destId="{D5EAD071-5DA6-48E9-A3CD-0612E5BBC876}" srcOrd="0" destOrd="0" presId="urn:microsoft.com/office/officeart/2005/8/layout/hList1"/>
-    <dgm:cxn modelId="{337A13B4-33F6-40E0-A7FA-CC0BB5B0F6EC}" type="presParOf" srcId="{DB0C7B25-8543-488C-AD23-9C28CEC7CFB7}" destId="{2B136E93-0CF3-415F-9C52-F11E46B4D872}" srcOrd="1" destOrd="0" presId="urn:microsoft.com/office/officeart/2005/8/layout/hList1"/>
-    <dgm:cxn modelId="{2BE2AD41-A347-48CF-B14D-A56E41A10550}" type="presParOf" srcId="{2943C09E-F4C7-44CA-A909-A40B34C2B43C}" destId="{4A0E2AAF-9F65-40F6-BB9C-91349076B848}" srcOrd="5" destOrd="0" presId="urn:microsoft.com/office/officeart/2005/8/layout/hList1"/>
-    <dgm:cxn modelId="{D434572B-FBFE-44A9-A1F5-17E5C5C2D5F5}" type="presParOf" srcId="{2943C09E-F4C7-44CA-A909-A40B34C2B43C}" destId="{D406B133-68C2-43E7-BBEB-E9202D64BAB9}" srcOrd="6" destOrd="0" presId="urn:microsoft.com/office/officeart/2005/8/layout/hList1"/>
-    <dgm:cxn modelId="{115E4864-0F82-4DC6-9758-6C180F12B916}" type="presParOf" srcId="{D406B133-68C2-43E7-BBEB-E9202D64BAB9}" destId="{5EC15CC8-115F-43FC-87FF-478537DDD29B}" srcOrd="0" destOrd="0" presId="urn:microsoft.com/office/officeart/2005/8/layout/hList1"/>
-    <dgm:cxn modelId="{55733262-33C1-4DC0-B8B1-081EDACD80EE}" type="presParOf" srcId="{D406B133-68C2-43E7-BBEB-E9202D64BAB9}" destId="{41D49699-3BF9-47AF-8ABB-39C6C6C3B550}" srcOrd="1" destOrd="0" presId="urn:microsoft.com/office/officeart/2005/8/layout/hList1"/>
+    <dgm:cxn modelId="{BB47E212-3E78-4C4D-986F-C09DF9FD4977}" type="presParOf" srcId="{2943C09E-F4C7-44CA-A909-A40B34C2B43C}" destId="{52C63B31-5962-4371-AC73-3A12F8737BD9}" srcOrd="0" destOrd="0" presId="urn:microsoft.com/office/officeart/2005/8/layout/hList1"/>
+    <dgm:cxn modelId="{951EF83F-F63A-4BBD-B807-10B5C4065794}" type="presParOf" srcId="{52C63B31-5962-4371-AC73-3A12F8737BD9}" destId="{0D68E2BF-84E0-49BF-BFF9-13D6618FEA8D}" srcOrd="0" destOrd="0" presId="urn:microsoft.com/office/officeart/2005/8/layout/hList1"/>
+    <dgm:cxn modelId="{32E28EAF-86EB-4399-8045-86114081BFF1}" type="presParOf" srcId="{52C63B31-5962-4371-AC73-3A12F8737BD9}" destId="{502A4AD6-1036-4C67-8435-1DCA1D9746A3}" srcOrd="1" destOrd="0" presId="urn:microsoft.com/office/officeart/2005/8/layout/hList1"/>
+    <dgm:cxn modelId="{BFFB237C-FA25-4BCC-A65C-F3237F7B80FA}" type="presParOf" srcId="{2943C09E-F4C7-44CA-A909-A40B34C2B43C}" destId="{733D4BBD-C397-4DBD-90B1-C312979FB884}" srcOrd="1" destOrd="0" presId="urn:microsoft.com/office/officeart/2005/8/layout/hList1"/>
+    <dgm:cxn modelId="{AC752373-5C19-46DB-9E8E-A30724D297A0}" type="presParOf" srcId="{2943C09E-F4C7-44CA-A909-A40B34C2B43C}" destId="{B2A87E55-46DE-4E8D-8880-C9CF5F5F2157}" srcOrd="2" destOrd="0" presId="urn:microsoft.com/office/officeart/2005/8/layout/hList1"/>
+    <dgm:cxn modelId="{C2F74AE3-99F1-4FAC-8283-CDF981B3B028}" type="presParOf" srcId="{B2A87E55-46DE-4E8D-8880-C9CF5F5F2157}" destId="{8C66B216-8C40-41E7-8A84-A29E9C3C4690}" srcOrd="0" destOrd="0" presId="urn:microsoft.com/office/officeart/2005/8/layout/hList1"/>
+    <dgm:cxn modelId="{47B11809-01DB-40E8-A057-644B610A6E0C}" type="presParOf" srcId="{B2A87E55-46DE-4E8D-8880-C9CF5F5F2157}" destId="{DA60A9EA-03A8-45E3-A820-C9EE8A85DE99}" srcOrd="1" destOrd="0" presId="urn:microsoft.com/office/officeart/2005/8/layout/hList1"/>
+    <dgm:cxn modelId="{36059274-19E8-4326-B7F9-DE75E81E827E}" type="presParOf" srcId="{2943C09E-F4C7-44CA-A909-A40B34C2B43C}" destId="{EDF24B78-6BAB-49ED-B120-A9925F2925AA}" srcOrd="3" destOrd="0" presId="urn:microsoft.com/office/officeart/2005/8/layout/hList1"/>
+    <dgm:cxn modelId="{3ED36858-9799-4541-8650-9A5316AED5B9}" type="presParOf" srcId="{2943C09E-F4C7-44CA-A909-A40B34C2B43C}" destId="{DB0C7B25-8543-488C-AD23-9C28CEC7CFB7}" srcOrd="4" destOrd="0" presId="urn:microsoft.com/office/officeart/2005/8/layout/hList1"/>
+    <dgm:cxn modelId="{4EE0D8F4-549C-4658-B7E8-DB5B742E5DE5}" type="presParOf" srcId="{DB0C7B25-8543-488C-AD23-9C28CEC7CFB7}" destId="{D5EAD071-5DA6-48E9-A3CD-0612E5BBC876}" srcOrd="0" destOrd="0" presId="urn:microsoft.com/office/officeart/2005/8/layout/hList1"/>
+    <dgm:cxn modelId="{D17AC8A8-C7AA-4CCF-BB3B-1908ADD2A07F}" type="presParOf" srcId="{DB0C7B25-8543-488C-AD23-9C28CEC7CFB7}" destId="{2B136E93-0CF3-415F-9C52-F11E46B4D872}" srcOrd="1" destOrd="0" presId="urn:microsoft.com/office/officeart/2005/8/layout/hList1"/>
+    <dgm:cxn modelId="{F845258B-C5E5-4400-B942-7E423FAAB142}" type="presParOf" srcId="{2943C09E-F4C7-44CA-A909-A40B34C2B43C}" destId="{4A0E2AAF-9F65-40F6-BB9C-91349076B848}" srcOrd="5" destOrd="0" presId="urn:microsoft.com/office/officeart/2005/8/layout/hList1"/>
+    <dgm:cxn modelId="{782CA43F-CF38-4F91-9908-EC71A6ED5573}" type="presParOf" srcId="{2943C09E-F4C7-44CA-A909-A40B34C2B43C}" destId="{D406B133-68C2-43E7-BBEB-E9202D64BAB9}" srcOrd="6" destOrd="0" presId="urn:microsoft.com/office/officeart/2005/8/layout/hList1"/>
+    <dgm:cxn modelId="{53C8EEC8-9B0B-4483-946E-8779693B9346}" type="presParOf" srcId="{D406B133-68C2-43E7-BBEB-E9202D64BAB9}" destId="{5EC15CC8-115F-43FC-87FF-478537DDD29B}" srcOrd="0" destOrd="0" presId="urn:microsoft.com/office/officeart/2005/8/layout/hList1"/>
+    <dgm:cxn modelId="{0E545D43-3B47-4C03-9762-0D79DACCCCF6}" type="presParOf" srcId="{D406B133-68C2-43E7-BBEB-E9202D64BAB9}" destId="{41D49699-3BF9-47AF-8ABB-39C6C6C3B550}" srcOrd="1" destOrd="0" presId="urn:microsoft.com/office/officeart/2005/8/layout/hList1"/>
   </dgm:cxnLst>
   <dgm:bg/>
   <dgm:whole/>
@@ -6102,10 +5868,10 @@
         <a:lstStyle/>
         <a:p>
           <a:r>
-            <a:rPr lang="de-DE" dirty="0" err="1"/>
+            <a:rPr lang="de-DE" err="1"/>
             <a:t>SystemMessages</a:t>
           </a:r>
-          <a:endParaRPr lang="de-DE" dirty="0"/>
+          <a:endParaRPr lang="de-DE"/>
         </a:p>
       </dgm:t>
     </dgm:pt>
@@ -6139,7 +5905,7 @@
         <a:lstStyle/>
         <a:p>
           <a:r>
-            <a:rPr lang="de-DE" dirty="0"/>
+            <a:rPr lang="de-DE"/>
             <a:t>Verwaltet Systemnachrichten in Wartschlage</a:t>
           </a:r>
         </a:p>
@@ -6175,23 +5941,23 @@
         <a:lstStyle/>
         <a:p>
           <a:r>
-            <a:rPr lang="de-DE" dirty="0"/>
+            <a:rPr lang="de-DE"/>
             <a:t>Anzeige über GUI-</a:t>
           </a:r>
           <a:r>
-            <a:rPr lang="de-DE" dirty="0" err="1"/>
+            <a:rPr lang="de-DE" err="1"/>
             <a:t>Callbacks</a:t>
           </a:r>
           <a:r>
-            <a:rPr lang="de-DE" dirty="0"/>
+            <a:rPr lang="de-DE"/>
             <a:t> oder </a:t>
           </a:r>
           <a:r>
-            <a:rPr lang="de-DE" dirty="0" err="1"/>
+            <a:rPr lang="de-DE" err="1"/>
             <a:t>Tkinter</a:t>
           </a:r>
           <a:r>
-            <a:rPr lang="de-DE" dirty="0"/>
+            <a:rPr lang="de-DE"/>
             <a:t>-Label-Aktualisierung</a:t>
           </a:r>
         </a:p>
@@ -6227,7 +5993,7 @@
         <a:lstStyle/>
         <a:p>
           <a:r>
-            <a:rPr lang="de-DE" dirty="0"/>
+            <a:rPr lang="de-DE"/>
             <a:t>Trie</a:t>
           </a:r>
         </a:p>
@@ -6263,14 +6029,9 @@
         <a:lstStyle/>
         <a:p>
           <a:r>
-            <a:rPr lang="de-DE" dirty="0"/>
-            <a:t>Effiziente Präfixsuche</a:t>
+            <a:rPr lang="de-DE"/>
+            <a:t>Effiziente Präfixsuche/Autovervollständigung</a:t>
           </a:r>
-          <a:r>
-            <a:rPr lang="de-DE"/>
-            <a:t>/Autovervollständigung</a:t>
-          </a:r>
-          <a:endParaRPr lang="de-DE" dirty="0"/>
         </a:p>
       </dgm:t>
     </dgm:pt>
@@ -7190,431 +6951,15 @@
       <dsp:cNvGrpSpPr/>
     </dsp:nvGrpSpPr>
     <dsp:grpSpPr/>
-    <dsp:sp modelId="{40FB2990-D587-4623-8D3B-2A5B45C4E8A4}">
+    <dsp:sp modelId="{FA885DE3-1FC6-4937-B28F-5207B2B606CF}">
       <dsp:nvSpPr>
         <dsp:cNvPr id="0" name=""/>
         <dsp:cNvSpPr/>
       </dsp:nvSpPr>
       <dsp:spPr>
         <a:xfrm>
-          <a:off x="3487" y="88568"/>
-          <a:ext cx="3400312" cy="547200"/>
-        </a:xfrm>
-        <a:prstGeom prst="rect">
-          <a:avLst/>
-        </a:prstGeom>
-      </dsp:spPr>
-      <dsp:style>
-        <a:lnRef idx="2">
-          <a:scrgbClr r="0" g="0" b="0"/>
-        </a:lnRef>
-        <a:fillRef idx="1">
-          <a:scrgbClr r="0" g="0" b="0"/>
-        </a:fillRef>
-        <a:effectRef idx="0">
-          <a:scrgbClr r="0" g="0" b="0"/>
-        </a:effectRef>
-        <a:fontRef idx="minor">
-          <a:schemeClr val="lt1"/>
-        </a:fontRef>
-      </dsp:style>
-    </dsp:sp>
-    <dsp:sp modelId="{B1F91725-B64C-492C-900B-A88931A666E2}">
-      <dsp:nvSpPr>
-        <dsp:cNvPr id="0" name=""/>
-        <dsp:cNvSpPr/>
-      </dsp:nvSpPr>
-      <dsp:spPr>
-        <a:xfrm>
-          <a:off x="3487" y="635768"/>
-          <a:ext cx="3400312" cy="2515663"/>
-        </a:xfrm>
-        <a:prstGeom prst="rect">
-          <a:avLst/>
-        </a:prstGeom>
-      </dsp:spPr>
-      <dsp:style>
-        <a:lnRef idx="2">
-          <a:scrgbClr r="0" g="0" b="0"/>
-        </a:lnRef>
-        <a:fillRef idx="1">
-          <a:scrgbClr r="0" g="0" b="0"/>
-        </a:fillRef>
-        <a:effectRef idx="0">
-          <a:scrgbClr r="0" g="0" b="0"/>
-        </a:effectRef>
-        <a:fontRef idx="minor"/>
-      </dsp:style>
-    </dsp:sp>
-    <dsp:sp modelId="{0BFADDE7-6F75-43FA-A50A-B560AEA5AD02}">
-      <dsp:nvSpPr>
-        <dsp:cNvPr id="0" name=""/>
-        <dsp:cNvSpPr/>
-      </dsp:nvSpPr>
-      <dsp:spPr>
-        <a:xfrm>
-          <a:off x="3879843" y="88568"/>
-          <a:ext cx="3400312" cy="547200"/>
-        </a:xfrm>
-        <a:prstGeom prst="rect">
-          <a:avLst/>
-        </a:prstGeom>
-      </dsp:spPr>
-      <dsp:style>
-        <a:lnRef idx="2">
-          <a:scrgbClr r="0" g="0" b="0"/>
-        </a:lnRef>
-        <a:fillRef idx="1">
-          <a:scrgbClr r="0" g="0" b="0"/>
-        </a:fillRef>
-        <a:effectRef idx="0">
-          <a:scrgbClr r="0" g="0" b="0"/>
-        </a:effectRef>
-        <a:fontRef idx="minor">
-          <a:schemeClr val="lt1"/>
-        </a:fontRef>
-      </dsp:style>
-    </dsp:sp>
-    <dsp:sp modelId="{0E8B177C-E34B-495F-B152-D92066CAA418}">
-      <dsp:nvSpPr>
-        <dsp:cNvPr id="0" name=""/>
-        <dsp:cNvSpPr/>
-      </dsp:nvSpPr>
-      <dsp:spPr>
-        <a:xfrm>
-          <a:off x="3879843" y="635768"/>
-          <a:ext cx="3400312" cy="2515663"/>
-        </a:xfrm>
-        <a:prstGeom prst="rect">
-          <a:avLst/>
-        </a:prstGeom>
-      </dsp:spPr>
-      <dsp:style>
-        <a:lnRef idx="2">
-          <a:scrgbClr r="0" g="0" b="0"/>
-        </a:lnRef>
-        <a:fillRef idx="1">
-          <a:scrgbClr r="0" g="0" b="0"/>
-        </a:fillRef>
-        <a:effectRef idx="0">
-          <a:scrgbClr r="0" g="0" b="0"/>
-        </a:effectRef>
-        <a:fontRef idx="minor"/>
-      </dsp:style>
-    </dsp:sp>
-    <dsp:sp modelId="{274B94C0-D7B4-41F1-87EE-AF8A5A17143F}">
-      <dsp:nvSpPr>
-        <dsp:cNvPr id="0" name=""/>
-        <dsp:cNvSpPr/>
-      </dsp:nvSpPr>
-      <dsp:spPr>
-        <a:xfrm>
-          <a:off x="7756200" y="88568"/>
-          <a:ext cx="3400312" cy="547200"/>
-        </a:xfrm>
-        <a:prstGeom prst="rect">
-          <a:avLst/>
-        </a:prstGeom>
-      </dsp:spPr>
-      <dsp:style>
-        <a:lnRef idx="2">
-          <a:scrgbClr r="0" g="0" b="0"/>
-        </a:lnRef>
-        <a:fillRef idx="1">
-          <a:scrgbClr r="0" g="0" b="0"/>
-        </a:fillRef>
-        <a:effectRef idx="0">
-          <a:scrgbClr r="0" g="0" b="0"/>
-        </a:effectRef>
-        <a:fontRef idx="minor">
-          <a:schemeClr val="lt1"/>
-        </a:fontRef>
-      </dsp:style>
-    </dsp:sp>
-    <dsp:sp modelId="{316A583B-4AF7-4410-AF00-605338337040}">
-      <dsp:nvSpPr>
-        <dsp:cNvPr id="0" name=""/>
-        <dsp:cNvSpPr/>
-      </dsp:nvSpPr>
-      <dsp:spPr>
-        <a:xfrm>
-          <a:off x="7756200" y="635768"/>
-          <a:ext cx="3400312" cy="2515663"/>
-        </a:xfrm>
-        <a:prstGeom prst="rect">
-          <a:avLst/>
-        </a:prstGeom>
-      </dsp:spPr>
-      <dsp:style>
-        <a:lnRef idx="2">
-          <a:scrgbClr r="0" g="0" b="0"/>
-        </a:lnRef>
-        <a:fillRef idx="1">
-          <a:scrgbClr r="0" g="0" b="0"/>
-        </a:fillRef>
-        <a:effectRef idx="0">
-          <a:scrgbClr r="0" g="0" b="0"/>
-        </a:effectRef>
-        <a:fontRef idx="minor"/>
-      </dsp:style>
-    </dsp:sp>
-  </dsp:spTree>
-</dsp:drawing>
-</file>
-
-<file path=ppt/diagrams/drawing2.xml><?xml version="1.0" encoding="utf-8"?>
-<dsp:drawing xmlns:dgm="http://schemas.openxmlformats.org/drawingml/2006/diagram" xmlns:dsp="http://schemas.microsoft.com/office/drawing/2008/diagram" xmlns:a="http://schemas.openxmlformats.org/drawingml/2006/main">
-  <dsp:spTree>
-    <dsp:nvGrpSpPr>
-      <dsp:cNvPr id="0" name=""/>
-      <dsp:cNvGrpSpPr/>
-    </dsp:nvGrpSpPr>
-    <dsp:grpSpPr/>
-    <dsp:sp modelId="{68BA0183-8553-4557-99FA-F02DEB8A532C}">
-      <dsp:nvSpPr>
-        <dsp:cNvPr id="0" name=""/>
-        <dsp:cNvSpPr/>
-      </dsp:nvSpPr>
-      <dsp:spPr>
-        <a:xfrm>
-          <a:off x="4195" y="80011"/>
-          <a:ext cx="2522988" cy="547200"/>
-        </a:xfrm>
-        <a:prstGeom prst="rect">
-          <a:avLst/>
-        </a:prstGeom>
-      </dsp:spPr>
-      <dsp:style>
-        <a:lnRef idx="2">
-          <a:scrgbClr r="0" g="0" b="0"/>
-        </a:lnRef>
-        <a:fillRef idx="1">
-          <a:scrgbClr r="0" g="0" b="0"/>
-        </a:fillRef>
-        <a:effectRef idx="0">
-          <a:scrgbClr r="0" g="0" b="0"/>
-        </a:effectRef>
-        <a:fontRef idx="minor">
-          <a:schemeClr val="lt1"/>
-        </a:fontRef>
-      </dsp:style>
-    </dsp:sp>
-    <dsp:sp modelId="{6A30A778-522C-44E9-9ED1-1C8EAD607456}">
-      <dsp:nvSpPr>
-        <dsp:cNvPr id="0" name=""/>
-        <dsp:cNvSpPr/>
-      </dsp:nvSpPr>
-      <dsp:spPr>
-        <a:xfrm>
-          <a:off x="4195" y="627211"/>
-          <a:ext cx="2522988" cy="2532777"/>
-        </a:xfrm>
-        <a:prstGeom prst="rect">
-          <a:avLst/>
-        </a:prstGeom>
-      </dsp:spPr>
-      <dsp:style>
-        <a:lnRef idx="2">
-          <a:scrgbClr r="0" g="0" b="0"/>
-        </a:lnRef>
-        <a:fillRef idx="1">
-          <a:scrgbClr r="0" g="0" b="0"/>
-        </a:fillRef>
-        <a:effectRef idx="0">
-          <a:scrgbClr r="0" g="0" b="0"/>
-        </a:effectRef>
-        <a:fontRef idx="minor"/>
-      </dsp:style>
-    </dsp:sp>
-    <dsp:sp modelId="{67920C5B-CBC7-405A-B4F5-2B1E25C6DBD8}">
-      <dsp:nvSpPr>
-        <dsp:cNvPr id="0" name=""/>
-        <dsp:cNvSpPr/>
-      </dsp:nvSpPr>
-      <dsp:spPr>
-        <a:xfrm>
-          <a:off x="2880402" y="80011"/>
-          <a:ext cx="2522988" cy="547200"/>
-        </a:xfrm>
-        <a:prstGeom prst="rect">
-          <a:avLst/>
-        </a:prstGeom>
-      </dsp:spPr>
-      <dsp:style>
-        <a:lnRef idx="2">
-          <a:scrgbClr r="0" g="0" b="0"/>
-        </a:lnRef>
-        <a:fillRef idx="1">
-          <a:scrgbClr r="0" g="0" b="0"/>
-        </a:fillRef>
-        <a:effectRef idx="0">
-          <a:scrgbClr r="0" g="0" b="0"/>
-        </a:effectRef>
-        <a:fontRef idx="minor">
-          <a:schemeClr val="lt1"/>
-        </a:fontRef>
-      </dsp:style>
-    </dsp:sp>
-    <dsp:sp modelId="{965E4914-842C-42AF-867A-305AE4AF7822}">
-      <dsp:nvSpPr>
-        <dsp:cNvPr id="0" name=""/>
-        <dsp:cNvSpPr/>
-      </dsp:nvSpPr>
-      <dsp:spPr>
-        <a:xfrm>
-          <a:off x="2880402" y="627211"/>
-          <a:ext cx="2522988" cy="2532777"/>
-        </a:xfrm>
-        <a:prstGeom prst="rect">
-          <a:avLst/>
-        </a:prstGeom>
-      </dsp:spPr>
-      <dsp:style>
-        <a:lnRef idx="2">
-          <a:scrgbClr r="0" g="0" b="0"/>
-        </a:lnRef>
-        <a:fillRef idx="1">
-          <a:scrgbClr r="0" g="0" b="0"/>
-        </a:fillRef>
-        <a:effectRef idx="0">
-          <a:scrgbClr r="0" g="0" b="0"/>
-        </a:effectRef>
-        <a:fontRef idx="minor"/>
-      </dsp:style>
-    </dsp:sp>
-    <dsp:sp modelId="{AA6F4146-05FA-4E97-BD60-371C789465FE}">
-      <dsp:nvSpPr>
-        <dsp:cNvPr id="0" name=""/>
-        <dsp:cNvSpPr/>
-      </dsp:nvSpPr>
-      <dsp:spPr>
-        <a:xfrm>
-          <a:off x="5756609" y="80011"/>
-          <a:ext cx="2522988" cy="547200"/>
-        </a:xfrm>
-        <a:prstGeom prst="rect">
-          <a:avLst/>
-        </a:prstGeom>
-      </dsp:spPr>
-      <dsp:style>
-        <a:lnRef idx="2">
-          <a:scrgbClr r="0" g="0" b="0"/>
-        </a:lnRef>
-        <a:fillRef idx="1">
-          <a:scrgbClr r="0" g="0" b="0"/>
-        </a:fillRef>
-        <a:effectRef idx="0">
-          <a:scrgbClr r="0" g="0" b="0"/>
-        </a:effectRef>
-        <a:fontRef idx="minor">
-          <a:schemeClr val="lt1"/>
-        </a:fontRef>
-      </dsp:style>
-    </dsp:sp>
-    <dsp:sp modelId="{A01EF500-0232-476E-9AA7-D7A1C25DFC4D}">
-      <dsp:nvSpPr>
-        <dsp:cNvPr id="0" name=""/>
-        <dsp:cNvSpPr/>
-      </dsp:nvSpPr>
-      <dsp:spPr>
-        <a:xfrm>
-          <a:off x="5756609" y="627211"/>
-          <a:ext cx="2522988" cy="2532777"/>
-        </a:xfrm>
-        <a:prstGeom prst="rect">
-          <a:avLst/>
-        </a:prstGeom>
-      </dsp:spPr>
-      <dsp:style>
-        <a:lnRef idx="2">
-          <a:scrgbClr r="0" g="0" b="0"/>
-        </a:lnRef>
-        <a:fillRef idx="1">
-          <a:scrgbClr r="0" g="0" b="0"/>
-        </a:fillRef>
-        <a:effectRef idx="0">
-          <a:scrgbClr r="0" g="0" b="0"/>
-        </a:effectRef>
-        <a:fontRef idx="minor"/>
-      </dsp:style>
-    </dsp:sp>
-    <dsp:sp modelId="{7C8F0731-1C32-4FAC-9830-9B95F31BDE5B}">
-      <dsp:nvSpPr>
-        <dsp:cNvPr id="0" name=""/>
-        <dsp:cNvSpPr/>
-      </dsp:nvSpPr>
-      <dsp:spPr>
-        <a:xfrm>
-          <a:off x="8632815" y="80011"/>
-          <a:ext cx="2522988" cy="547200"/>
-        </a:xfrm>
-        <a:prstGeom prst="rect">
-          <a:avLst/>
-        </a:prstGeom>
-      </dsp:spPr>
-      <dsp:style>
-        <a:lnRef idx="2">
-          <a:scrgbClr r="0" g="0" b="0"/>
-        </a:lnRef>
-        <a:fillRef idx="1">
-          <a:scrgbClr r="0" g="0" b="0"/>
-        </a:fillRef>
-        <a:effectRef idx="0">
-          <a:scrgbClr r="0" g="0" b="0"/>
-        </a:effectRef>
-        <a:fontRef idx="minor">
-          <a:schemeClr val="lt1"/>
-        </a:fontRef>
-      </dsp:style>
-    </dsp:sp>
-    <dsp:sp modelId="{1F24D687-E604-4722-A4EC-7A42BDB75A1C}">
-      <dsp:nvSpPr>
-        <dsp:cNvPr id="0" name=""/>
-        <dsp:cNvSpPr/>
-      </dsp:nvSpPr>
-      <dsp:spPr>
-        <a:xfrm>
-          <a:off x="8637003" y="602288"/>
-          <a:ext cx="2522988" cy="2532777"/>
-        </a:xfrm>
-        <a:prstGeom prst="rect">
-          <a:avLst/>
-        </a:prstGeom>
-      </dsp:spPr>
-      <dsp:style>
-        <a:lnRef idx="2">
-          <a:scrgbClr r="0" g="0" b="0"/>
-        </a:lnRef>
-        <a:fillRef idx="1">
-          <a:scrgbClr r="0" g="0" b="0"/>
-        </a:fillRef>
-        <a:effectRef idx="0">
-          <a:scrgbClr r="0" g="0" b="0"/>
-        </a:effectRef>
-        <a:fontRef idx="minor"/>
-      </dsp:style>
-    </dsp:sp>
-  </dsp:spTree>
-</dsp:drawing>
-</file>
-
-<file path=ppt/diagrams/drawing3.xml><?xml version="1.0" encoding="utf-8"?>
-<dsp:drawing xmlns:dgm="http://schemas.openxmlformats.org/drawingml/2006/diagram" xmlns:dsp="http://schemas.microsoft.com/office/drawing/2008/diagram" xmlns:a="http://schemas.openxmlformats.org/drawingml/2006/main">
-  <dsp:spTree>
-    <dsp:nvGrpSpPr>
-      <dsp:cNvPr id="0" name=""/>
-      <dsp:cNvGrpSpPr/>
-    </dsp:nvGrpSpPr>
-    <dsp:grpSpPr/>
-    <dsp:sp modelId="{61C967B9-95E2-4F22-974A-D017711FC2D7}">
-      <dsp:nvSpPr>
-        <dsp:cNvPr id="0" name=""/>
-        <dsp:cNvSpPr/>
-      </dsp:nvSpPr>
-      <dsp:spPr>
-        <a:xfrm>
-          <a:off x="54" y="401490"/>
-          <a:ext cx="5214902" cy="691200"/>
+          <a:off x="3487" y="189628"/>
+          <a:ext cx="3400312" cy="518400"/>
         </a:xfrm>
         <a:prstGeom prst="rect">
           <a:avLst/>
@@ -7648,7 +6993,7 @@
         <a:fillRef idx="1">
           <a:scrgbClr r="0" g="0" b="0"/>
         </a:fillRef>
-        <a:effectRef idx="0">
+        <a:effectRef idx="1">
           <a:scrgbClr r="0" g="0" b="0"/>
         </a:effectRef>
         <a:fontRef idx="minor">
@@ -7656,12 +7001,12 @@
         </a:fontRef>
       </dsp:style>
       <dsp:txBody>
-        <a:bodyPr spcFirstLastPara="0" vert="horz" wrap="square" lIns="170688" tIns="97536" rIns="170688" bIns="97536" numCol="1" spcCol="1270" anchor="ctr" anchorCtr="0">
+        <a:bodyPr spcFirstLastPara="0" vert="horz" wrap="square" lIns="128016" tIns="73152" rIns="128016" bIns="73152" numCol="1" spcCol="1270" anchor="ctr" anchorCtr="0">
           <a:noAutofit/>
         </a:bodyPr>
         <a:lstStyle/>
         <a:p>
-          <a:pPr marL="0" lvl="0" indent="0" algn="ctr" defTabSz="1066800">
+          <a:pPr marL="0" lvl="0" indent="0" algn="ctr" defTabSz="800100">
             <a:lnSpc>
               <a:spcPct val="90000"/>
             </a:lnSpc>
@@ -7674,26 +7019,25 @@
             <a:buNone/>
           </a:pPr>
           <a:r>
-            <a:rPr lang="de-DE" sz="2400" kern="1200" dirty="0" err="1"/>
-            <a:t>SystemMessages</a:t>
+            <a:rPr lang="de-DE" sz="1800" kern="1200"/>
+            <a:t>User</a:t>
           </a:r>
-          <a:endParaRPr lang="de-DE" sz="2400" kern="1200" dirty="0"/>
         </a:p>
       </dsp:txBody>
       <dsp:txXfrm>
-        <a:off x="54" y="401490"/>
-        <a:ext cx="5214902" cy="691200"/>
+        <a:off x="3487" y="189628"/>
+        <a:ext cx="3400312" cy="518400"/>
       </dsp:txXfrm>
     </dsp:sp>
-    <dsp:sp modelId="{4F3F9D98-76B6-42E7-955B-F3705AC4452F}">
+    <dsp:sp modelId="{7F414582-7F16-4491-A4B3-FC8B0BCF506D}">
       <dsp:nvSpPr>
         <dsp:cNvPr id="0" name=""/>
         <dsp:cNvSpPr/>
       </dsp:nvSpPr>
       <dsp:spPr>
         <a:xfrm>
-          <a:off x="54" y="1092690"/>
-          <a:ext cx="5214902" cy="1745820"/>
+          <a:off x="3487" y="708028"/>
+          <a:ext cx="3400312" cy="2342342"/>
         </a:xfrm>
         <a:prstGeom prst="rect">
           <a:avLst/>
@@ -7737,12 +7081,12 @@
         <a:fontRef idx="minor"/>
       </dsp:style>
       <dsp:txBody>
-        <a:bodyPr spcFirstLastPara="0" vert="horz" wrap="square" lIns="128016" tIns="128016" rIns="170688" bIns="192024" numCol="1" spcCol="1270" anchor="t" anchorCtr="0">
+        <a:bodyPr spcFirstLastPara="0" vert="horz" wrap="square" lIns="96012" tIns="96012" rIns="128016" bIns="144018" numCol="1" spcCol="1270" anchor="t" anchorCtr="0">
           <a:noAutofit/>
         </a:bodyPr>
         <a:lstStyle/>
         <a:p>
-          <a:pPr marL="228600" lvl="1" indent="-228600" algn="l" defTabSz="1066800">
+          <a:pPr marL="171450" lvl="1" indent="-171450" algn="l" defTabSz="800100">
             <a:lnSpc>
               <a:spcPct val="90000"/>
             </a:lnSpc>
@@ -7755,12 +7099,12 @@
             <a:buChar char="•"/>
           </a:pPr>
           <a:r>
-            <a:rPr lang="de-DE" sz="2400" kern="1200" dirty="0"/>
-            <a:t>Verwaltet Systemnachrichten in Wartschlage</a:t>
+            <a:rPr lang="de-DE" sz="1800" kern="1200"/>
+            <a:t>Teilnehmer am Marktplatz</a:t>
           </a:r>
         </a:p>
         <a:p>
-          <a:pPr marL="228600" lvl="1" indent="-228600" algn="l" defTabSz="1066800">
+          <a:pPr marL="171450" lvl="1" indent="-171450" algn="l" defTabSz="800100">
             <a:lnSpc>
               <a:spcPct val="90000"/>
             </a:lnSpc>
@@ -7773,41 +7117,25 @@
             <a:buChar char="•"/>
           </a:pPr>
           <a:r>
-            <a:rPr lang="de-DE" sz="2400" kern="1200" dirty="0"/>
-            <a:t>Anzeige über GUI-</a:t>
-          </a:r>
-          <a:r>
-            <a:rPr lang="de-DE" sz="2400" kern="1200" dirty="0" err="1"/>
-            <a:t>Callbacks</a:t>
-          </a:r>
-          <a:r>
-            <a:rPr lang="de-DE" sz="2400" kern="1200" dirty="0"/>
-            <a:t> oder </a:t>
-          </a:r>
-          <a:r>
-            <a:rPr lang="de-DE" sz="2400" kern="1200" dirty="0" err="1"/>
-            <a:t>Tkinter</a:t>
-          </a:r>
-          <a:r>
-            <a:rPr lang="de-DE" sz="2400" kern="1200" dirty="0"/>
-            <a:t>-Label-Aktualisierung</a:t>
+            <a:rPr lang="de-DE" sz="1800" kern="1200"/>
+            <a:t>Besitzt Zugangsdaten, Name, Budget, Freundesliste, Wohnortdaten, Bewertungen</a:t>
           </a:r>
         </a:p>
       </dsp:txBody>
       <dsp:txXfrm>
-        <a:off x="54" y="1092690"/>
-        <a:ext cx="5214902" cy="1745820"/>
+        <a:off x="3487" y="708028"/>
+        <a:ext cx="3400312" cy="2342342"/>
       </dsp:txXfrm>
     </dsp:sp>
-    <dsp:sp modelId="{0388FFD8-C7F3-422A-8ACD-F37B57043B9E}">
+    <dsp:sp modelId="{662104D4-EF21-4078-AC4D-37152CCD4D3B}">
       <dsp:nvSpPr>
         <dsp:cNvPr id="0" name=""/>
         <dsp:cNvSpPr/>
       </dsp:nvSpPr>
       <dsp:spPr>
         <a:xfrm>
-          <a:off x="5945043" y="401490"/>
-          <a:ext cx="5214902" cy="691200"/>
+          <a:off x="3879843" y="189628"/>
+          <a:ext cx="3400312" cy="518400"/>
         </a:xfrm>
         <a:prstGeom prst="rect">
           <a:avLst/>
@@ -7841,7 +7169,7 @@
         <a:fillRef idx="1">
           <a:scrgbClr r="0" g="0" b="0"/>
         </a:fillRef>
-        <a:effectRef idx="0">
+        <a:effectRef idx="1">
           <a:scrgbClr r="0" g="0" b="0"/>
         </a:effectRef>
         <a:fontRef idx="minor">
@@ -7849,12 +7177,12 @@
         </a:fontRef>
       </dsp:style>
       <dsp:txBody>
-        <a:bodyPr spcFirstLastPara="0" vert="horz" wrap="square" lIns="170688" tIns="97536" rIns="170688" bIns="97536" numCol="1" spcCol="1270" anchor="ctr" anchorCtr="0">
+        <a:bodyPr spcFirstLastPara="0" vert="horz" wrap="square" lIns="128016" tIns="73152" rIns="128016" bIns="73152" numCol="1" spcCol="1270" anchor="ctr" anchorCtr="0">
           <a:noAutofit/>
         </a:bodyPr>
         <a:lstStyle/>
         <a:p>
-          <a:pPr marL="0" lvl="0" indent="0" algn="ctr" defTabSz="1066800">
+          <a:pPr marL="0" lvl="0" indent="0" algn="ctr" defTabSz="800100">
             <a:lnSpc>
               <a:spcPct val="90000"/>
             </a:lnSpc>
@@ -7867,25 +7195,25 @@
             <a:buNone/>
           </a:pPr>
           <a:r>
-            <a:rPr lang="de-DE" sz="2400" kern="1200" dirty="0"/>
-            <a:t>Trie</a:t>
+            <a:rPr lang="de-DE" sz="1800" kern="1200"/>
+            <a:t>Praktikumsgruppen</a:t>
           </a:r>
         </a:p>
       </dsp:txBody>
       <dsp:txXfrm>
-        <a:off x="5945043" y="401490"/>
-        <a:ext cx="5214902" cy="691200"/>
+        <a:off x="3879843" y="189628"/>
+        <a:ext cx="3400312" cy="518400"/>
       </dsp:txXfrm>
     </dsp:sp>
-    <dsp:sp modelId="{D9752ADB-1534-454C-9CDF-E950D37327CB}">
+    <dsp:sp modelId="{B4E49A74-AA44-47D9-96EE-A4F36AB92A33}">
       <dsp:nvSpPr>
         <dsp:cNvPr id="0" name=""/>
         <dsp:cNvSpPr/>
       </dsp:nvSpPr>
       <dsp:spPr>
         <a:xfrm>
-          <a:off x="5945043" y="1092690"/>
-          <a:ext cx="5214902" cy="1745820"/>
+          <a:off x="3879843" y="708028"/>
+          <a:ext cx="3400312" cy="2342342"/>
         </a:xfrm>
         <a:prstGeom prst="rect">
           <a:avLst/>
@@ -7929,12 +7257,12 @@
         <a:fontRef idx="minor"/>
       </dsp:style>
       <dsp:txBody>
-        <a:bodyPr spcFirstLastPara="0" vert="horz" wrap="square" lIns="128016" tIns="128016" rIns="170688" bIns="192024" numCol="1" spcCol="1270" anchor="t" anchorCtr="0">
+        <a:bodyPr spcFirstLastPara="0" vert="horz" wrap="square" lIns="96012" tIns="96012" rIns="128016" bIns="144018" numCol="1" spcCol="1270" anchor="t" anchorCtr="0">
           <a:noAutofit/>
         </a:bodyPr>
         <a:lstStyle/>
         <a:p>
-          <a:pPr marL="228600" lvl="1" indent="-228600" algn="l" defTabSz="1066800">
+          <a:pPr marL="171450" lvl="1" indent="-171450" algn="l" defTabSz="800100">
             <a:lnSpc>
               <a:spcPct val="90000"/>
             </a:lnSpc>
@@ -7947,19 +7275,1323 @@
             <a:buChar char="•"/>
           </a:pPr>
           <a:r>
-            <a:rPr lang="de-DE" sz="2400" kern="1200" dirty="0"/>
-            <a:t>Effiziente Präfixsuche</a:t>
+            <a:rPr lang="de-DE" sz="1800" kern="1200"/>
+            <a:t>Gruppierung von User</a:t>
           </a:r>
-          <a:r>
-            <a:rPr lang="de-DE" sz="2400" kern="1200"/>
-            <a:t>/Autovervollständigung</a:t>
-          </a:r>
-          <a:endParaRPr lang="de-DE" sz="2400" kern="1200" dirty="0"/>
         </a:p>
       </dsp:txBody>
       <dsp:txXfrm>
-        <a:off x="5945043" y="1092690"/>
-        <a:ext cx="5214902" cy="1745820"/>
+        <a:off x="3879843" y="708028"/>
+        <a:ext cx="3400312" cy="2342342"/>
+      </dsp:txXfrm>
+    </dsp:sp>
+    <dsp:sp modelId="{E8DBF4FE-3AEF-4F8D-9152-921B72A1D0F5}">
+      <dsp:nvSpPr>
+        <dsp:cNvPr id="0" name=""/>
+        <dsp:cNvSpPr/>
+      </dsp:nvSpPr>
+      <dsp:spPr>
+        <a:xfrm>
+          <a:off x="7756200" y="189628"/>
+          <a:ext cx="3400312" cy="518400"/>
+        </a:xfrm>
+        <a:prstGeom prst="rect">
+          <a:avLst/>
+        </a:prstGeom>
+        <a:solidFill>
+          <a:schemeClr val="accent1">
+            <a:hueOff val="0"/>
+            <a:satOff val="0"/>
+            <a:lumOff val="0"/>
+            <a:alphaOff val="0"/>
+          </a:schemeClr>
+        </a:solidFill>
+        <a:ln w="12700" cap="flat" cmpd="sng" algn="ctr">
+          <a:solidFill>
+            <a:schemeClr val="accent1">
+              <a:hueOff val="0"/>
+              <a:satOff val="0"/>
+              <a:lumOff val="0"/>
+              <a:alphaOff val="0"/>
+            </a:schemeClr>
+          </a:solidFill>
+          <a:prstDash val="solid"/>
+          <a:miter lim="800000"/>
+        </a:ln>
+        <a:effectLst/>
+      </dsp:spPr>
+      <dsp:style>
+        <a:lnRef idx="2">
+          <a:scrgbClr r="0" g="0" b="0"/>
+        </a:lnRef>
+        <a:fillRef idx="1">
+          <a:scrgbClr r="0" g="0" b="0"/>
+        </a:fillRef>
+        <a:effectRef idx="1">
+          <a:scrgbClr r="0" g="0" b="0"/>
+        </a:effectRef>
+        <a:fontRef idx="minor">
+          <a:schemeClr val="lt1"/>
+        </a:fontRef>
+      </dsp:style>
+      <dsp:txBody>
+        <a:bodyPr spcFirstLastPara="0" vert="horz" wrap="square" lIns="128016" tIns="73152" rIns="128016" bIns="73152" numCol="1" spcCol="1270" anchor="ctr" anchorCtr="0">
+          <a:noAutofit/>
+        </a:bodyPr>
+        <a:lstStyle/>
+        <a:p>
+          <a:pPr marL="0" lvl="0" indent="0" algn="ctr" defTabSz="800100">
+            <a:lnSpc>
+              <a:spcPct val="90000"/>
+            </a:lnSpc>
+            <a:spcBef>
+              <a:spcPct val="0"/>
+            </a:spcBef>
+            <a:spcAft>
+              <a:spcPct val="35000"/>
+            </a:spcAft>
+            <a:buNone/>
+          </a:pPr>
+          <a:r>
+            <a:rPr lang="de-DE" sz="1800" kern="1200"/>
+            <a:t>Users</a:t>
+          </a:r>
+        </a:p>
+      </dsp:txBody>
+      <dsp:txXfrm>
+        <a:off x="7756200" y="189628"/>
+        <a:ext cx="3400312" cy="518400"/>
+      </dsp:txXfrm>
+    </dsp:sp>
+    <dsp:sp modelId="{7ABE2A78-99B1-4163-9C3D-B0370FFC030E}">
+      <dsp:nvSpPr>
+        <dsp:cNvPr id="0" name=""/>
+        <dsp:cNvSpPr/>
+      </dsp:nvSpPr>
+      <dsp:spPr>
+        <a:xfrm>
+          <a:off x="7756200" y="708028"/>
+          <a:ext cx="3400312" cy="2342342"/>
+        </a:xfrm>
+        <a:prstGeom prst="rect">
+          <a:avLst/>
+        </a:prstGeom>
+        <a:solidFill>
+          <a:schemeClr val="accent1">
+            <a:alpha val="90000"/>
+            <a:tint val="40000"/>
+            <a:hueOff val="0"/>
+            <a:satOff val="0"/>
+            <a:lumOff val="0"/>
+            <a:alphaOff val="0"/>
+          </a:schemeClr>
+        </a:solidFill>
+        <a:ln w="12700" cap="flat" cmpd="sng" algn="ctr">
+          <a:solidFill>
+            <a:schemeClr val="accent1">
+              <a:alpha val="90000"/>
+              <a:tint val="40000"/>
+              <a:hueOff val="0"/>
+              <a:satOff val="0"/>
+              <a:lumOff val="0"/>
+              <a:alphaOff val="0"/>
+            </a:schemeClr>
+          </a:solidFill>
+          <a:prstDash val="solid"/>
+          <a:miter lim="800000"/>
+        </a:ln>
+        <a:effectLst/>
+      </dsp:spPr>
+      <dsp:style>
+        <a:lnRef idx="2">
+          <a:scrgbClr r="0" g="0" b="0"/>
+        </a:lnRef>
+        <a:fillRef idx="1">
+          <a:scrgbClr r="0" g="0" b="0"/>
+        </a:fillRef>
+        <a:effectRef idx="0">
+          <a:scrgbClr r="0" g="0" b="0"/>
+        </a:effectRef>
+        <a:fontRef idx="minor"/>
+      </dsp:style>
+      <dsp:txBody>
+        <a:bodyPr spcFirstLastPara="0" vert="horz" wrap="square" lIns="96012" tIns="96012" rIns="128016" bIns="144018" numCol="1" spcCol="1270" anchor="t" anchorCtr="0">
+          <a:noAutofit/>
+        </a:bodyPr>
+        <a:lstStyle/>
+        <a:p>
+          <a:pPr marL="171450" lvl="1" indent="-171450" algn="l" defTabSz="800100">
+            <a:lnSpc>
+              <a:spcPct val="90000"/>
+            </a:lnSpc>
+            <a:spcBef>
+              <a:spcPct val="0"/>
+            </a:spcBef>
+            <a:spcAft>
+              <a:spcPct val="15000"/>
+            </a:spcAft>
+            <a:buChar char="•"/>
+          </a:pPr>
+          <a:r>
+            <a:rPr lang="de-DE" sz="1800" kern="1200"/>
+            <a:t>Verwaltet alle User</a:t>
+          </a:r>
+        </a:p>
+        <a:p>
+          <a:pPr marL="171450" lvl="1" indent="-171450" algn="l" defTabSz="800100">
+            <a:lnSpc>
+              <a:spcPct val="90000"/>
+            </a:lnSpc>
+            <a:spcBef>
+              <a:spcPct val="0"/>
+            </a:spcBef>
+            <a:spcAft>
+              <a:spcPct val="15000"/>
+            </a:spcAft>
+            <a:buChar char="•"/>
+          </a:pPr>
+          <a:r>
+            <a:rPr lang="de-DE" sz="1800" kern="1200"/>
+            <a:t>Ließt Benutzer-/Freundschaftsdaten aus CSV</a:t>
+          </a:r>
+        </a:p>
+        <a:p>
+          <a:pPr marL="171450" lvl="1" indent="-171450" algn="l" defTabSz="800100">
+            <a:lnSpc>
+              <a:spcPct val="90000"/>
+            </a:lnSpc>
+            <a:spcBef>
+              <a:spcPct val="0"/>
+            </a:spcBef>
+            <a:spcAft>
+              <a:spcPct val="15000"/>
+            </a:spcAft>
+            <a:buChar char="•"/>
+          </a:pPr>
+          <a:r>
+            <a:rPr lang="de-DE" sz="1800" kern="1200"/>
+            <a:t>Passwortüberprüfung, Freundschaftsempfehlung, Abstands-/Verbindungsberechnung</a:t>
+          </a:r>
+        </a:p>
+      </dsp:txBody>
+      <dsp:txXfrm>
+        <a:off x="7756200" y="708028"/>
+        <a:ext cx="3400312" cy="2342342"/>
+      </dsp:txXfrm>
+    </dsp:sp>
+  </dsp:spTree>
+</dsp:drawing>
+</file>
+
+<file path=ppt/diagrams/drawing2.xml><?xml version="1.0" encoding="utf-8"?>
+<dsp:drawing xmlns:dgm="http://schemas.openxmlformats.org/drawingml/2006/diagram" xmlns:dsp="http://schemas.microsoft.com/office/drawing/2008/diagram" xmlns:a="http://schemas.openxmlformats.org/drawingml/2006/main">
+  <dsp:spTree>
+    <dsp:nvGrpSpPr>
+      <dsp:cNvPr id="0" name=""/>
+      <dsp:cNvGrpSpPr/>
+    </dsp:nvGrpSpPr>
+    <dsp:grpSpPr/>
+    <dsp:sp modelId="{0D68E2BF-84E0-49BF-BFF9-13D6618FEA8D}">
+      <dsp:nvSpPr>
+        <dsp:cNvPr id="0" name=""/>
+        <dsp:cNvSpPr/>
+      </dsp:nvSpPr>
+      <dsp:spPr>
+        <a:xfrm>
+          <a:off x="4195" y="163379"/>
+          <a:ext cx="2522988" cy="518400"/>
+        </a:xfrm>
+        <a:prstGeom prst="rect">
+          <a:avLst/>
+        </a:prstGeom>
+        <a:solidFill>
+          <a:schemeClr val="accent1">
+            <a:hueOff val="0"/>
+            <a:satOff val="0"/>
+            <a:lumOff val="0"/>
+            <a:alphaOff val="0"/>
+          </a:schemeClr>
+        </a:solidFill>
+        <a:ln w="12700" cap="flat" cmpd="sng" algn="ctr">
+          <a:solidFill>
+            <a:schemeClr val="accent1">
+              <a:hueOff val="0"/>
+              <a:satOff val="0"/>
+              <a:lumOff val="0"/>
+              <a:alphaOff val="0"/>
+            </a:schemeClr>
+          </a:solidFill>
+          <a:prstDash val="solid"/>
+          <a:miter lim="800000"/>
+        </a:ln>
+        <a:effectLst/>
+      </dsp:spPr>
+      <dsp:style>
+        <a:lnRef idx="2">
+          <a:scrgbClr r="0" g="0" b="0"/>
+        </a:lnRef>
+        <a:fillRef idx="1">
+          <a:scrgbClr r="0" g="0" b="0"/>
+        </a:fillRef>
+        <a:effectRef idx="0">
+          <a:scrgbClr r="0" g="0" b="0"/>
+        </a:effectRef>
+        <a:fontRef idx="minor">
+          <a:schemeClr val="lt1"/>
+        </a:fontRef>
+      </dsp:style>
+      <dsp:txBody>
+        <a:bodyPr spcFirstLastPara="0" vert="horz" wrap="square" lIns="128016" tIns="73152" rIns="128016" bIns="73152" numCol="1" spcCol="1270" anchor="ctr" anchorCtr="0">
+          <a:noAutofit/>
+        </a:bodyPr>
+        <a:lstStyle/>
+        <a:p>
+          <a:pPr marL="0" lvl="0" indent="0" algn="ctr" defTabSz="800100">
+            <a:lnSpc>
+              <a:spcPct val="90000"/>
+            </a:lnSpc>
+            <a:spcBef>
+              <a:spcPct val="0"/>
+            </a:spcBef>
+            <a:spcAft>
+              <a:spcPct val="35000"/>
+            </a:spcAft>
+            <a:buNone/>
+          </a:pPr>
+          <a:r>
+            <a:rPr lang="de-DE" sz="1800" kern="1200" err="1"/>
+            <a:t>Auction</a:t>
+          </a:r>
+          <a:endParaRPr lang="de-DE" sz="1800" kern="1200"/>
+        </a:p>
+      </dsp:txBody>
+      <dsp:txXfrm>
+        <a:off x="4195" y="163379"/>
+        <a:ext cx="2522988" cy="518400"/>
+      </dsp:txXfrm>
+    </dsp:sp>
+    <dsp:sp modelId="{502A4AD6-1036-4C67-8435-1DCA1D9746A3}">
+      <dsp:nvSpPr>
+        <dsp:cNvPr id="0" name=""/>
+        <dsp:cNvSpPr/>
+      </dsp:nvSpPr>
+      <dsp:spPr>
+        <a:xfrm>
+          <a:off x="4195" y="681779"/>
+          <a:ext cx="2522988" cy="2394840"/>
+        </a:xfrm>
+        <a:prstGeom prst="rect">
+          <a:avLst/>
+        </a:prstGeom>
+        <a:solidFill>
+          <a:schemeClr val="accent1">
+            <a:alpha val="90000"/>
+            <a:tint val="40000"/>
+            <a:hueOff val="0"/>
+            <a:satOff val="0"/>
+            <a:lumOff val="0"/>
+            <a:alphaOff val="0"/>
+          </a:schemeClr>
+        </a:solidFill>
+        <a:ln w="12700" cap="flat" cmpd="sng" algn="ctr">
+          <a:solidFill>
+            <a:schemeClr val="accent1">
+              <a:alpha val="90000"/>
+              <a:tint val="40000"/>
+              <a:hueOff val="0"/>
+              <a:satOff val="0"/>
+              <a:lumOff val="0"/>
+              <a:alphaOff val="0"/>
+            </a:schemeClr>
+          </a:solidFill>
+          <a:prstDash val="solid"/>
+          <a:miter lim="800000"/>
+        </a:ln>
+        <a:effectLst/>
+      </dsp:spPr>
+      <dsp:style>
+        <a:lnRef idx="2">
+          <a:scrgbClr r="0" g="0" b="0"/>
+        </a:lnRef>
+        <a:fillRef idx="1">
+          <a:scrgbClr r="0" g="0" b="0"/>
+        </a:fillRef>
+        <a:effectRef idx="0">
+          <a:scrgbClr r="0" g="0" b="0"/>
+        </a:effectRef>
+        <a:fontRef idx="minor"/>
+      </dsp:style>
+      <dsp:txBody>
+        <a:bodyPr spcFirstLastPara="0" vert="horz" wrap="square" lIns="96012" tIns="96012" rIns="128016" bIns="144018" numCol="1" spcCol="1270" anchor="t" anchorCtr="0">
+          <a:noAutofit/>
+        </a:bodyPr>
+        <a:lstStyle/>
+        <a:p>
+          <a:pPr marL="171450" lvl="1" indent="-171450" algn="l" defTabSz="800100">
+            <a:lnSpc>
+              <a:spcPct val="90000"/>
+            </a:lnSpc>
+            <a:spcBef>
+              <a:spcPct val="0"/>
+            </a:spcBef>
+            <a:spcAft>
+              <a:spcPct val="15000"/>
+            </a:spcAft>
+            <a:buChar char="•"/>
+          </a:pPr>
+          <a:r>
+            <a:rPr lang="de-DE" sz="1800" kern="1200"/>
+            <a:t>Item wird an Höchstbietenden versteigert</a:t>
+          </a:r>
+        </a:p>
+        <a:p>
+          <a:pPr marL="171450" lvl="1" indent="-171450" algn="l" defTabSz="800100">
+            <a:lnSpc>
+              <a:spcPct val="90000"/>
+            </a:lnSpc>
+            <a:spcBef>
+              <a:spcPct val="0"/>
+            </a:spcBef>
+            <a:spcAft>
+              <a:spcPct val="15000"/>
+            </a:spcAft>
+            <a:buChar char="•"/>
+          </a:pPr>
+          <a:r>
+            <a:rPr lang="de-DE" sz="1800" kern="1200"/>
+            <a:t>Verwaltet: Biet Vorgänge, Mindestgebot, Verfallszeiten, Porto</a:t>
+          </a:r>
+        </a:p>
+      </dsp:txBody>
+      <dsp:txXfrm>
+        <a:off x="4195" y="681779"/>
+        <a:ext cx="2522988" cy="2394840"/>
+      </dsp:txXfrm>
+    </dsp:sp>
+    <dsp:sp modelId="{8C66B216-8C40-41E7-8A84-A29E9C3C4690}">
+      <dsp:nvSpPr>
+        <dsp:cNvPr id="0" name=""/>
+        <dsp:cNvSpPr/>
+      </dsp:nvSpPr>
+      <dsp:spPr>
+        <a:xfrm>
+          <a:off x="2880402" y="163379"/>
+          <a:ext cx="2522988" cy="518400"/>
+        </a:xfrm>
+        <a:prstGeom prst="rect">
+          <a:avLst/>
+        </a:prstGeom>
+        <a:solidFill>
+          <a:schemeClr val="accent1">
+            <a:hueOff val="0"/>
+            <a:satOff val="0"/>
+            <a:lumOff val="0"/>
+            <a:alphaOff val="0"/>
+          </a:schemeClr>
+        </a:solidFill>
+        <a:ln w="12700" cap="flat" cmpd="sng" algn="ctr">
+          <a:solidFill>
+            <a:schemeClr val="accent1">
+              <a:hueOff val="0"/>
+              <a:satOff val="0"/>
+              <a:lumOff val="0"/>
+              <a:alphaOff val="0"/>
+            </a:schemeClr>
+          </a:solidFill>
+          <a:prstDash val="solid"/>
+          <a:miter lim="800000"/>
+        </a:ln>
+        <a:effectLst/>
+      </dsp:spPr>
+      <dsp:style>
+        <a:lnRef idx="2">
+          <a:scrgbClr r="0" g="0" b="0"/>
+        </a:lnRef>
+        <a:fillRef idx="1">
+          <a:scrgbClr r="0" g="0" b="0"/>
+        </a:fillRef>
+        <a:effectRef idx="0">
+          <a:scrgbClr r="0" g="0" b="0"/>
+        </a:effectRef>
+        <a:fontRef idx="minor">
+          <a:schemeClr val="lt1"/>
+        </a:fontRef>
+      </dsp:style>
+      <dsp:txBody>
+        <a:bodyPr spcFirstLastPara="0" vert="horz" wrap="square" lIns="128016" tIns="73152" rIns="128016" bIns="73152" numCol="1" spcCol="1270" anchor="ctr" anchorCtr="0">
+          <a:noAutofit/>
+        </a:bodyPr>
+        <a:lstStyle/>
+        <a:p>
+          <a:pPr marL="0" lvl="0" indent="0" algn="ctr" defTabSz="800100">
+            <a:lnSpc>
+              <a:spcPct val="90000"/>
+            </a:lnSpc>
+            <a:spcBef>
+              <a:spcPct val="0"/>
+            </a:spcBef>
+            <a:spcAft>
+              <a:spcPct val="35000"/>
+            </a:spcAft>
+            <a:buNone/>
+          </a:pPr>
+          <a:r>
+            <a:rPr lang="de-DE" sz="1800" kern="1200" err="1"/>
+            <a:t>Auctions</a:t>
+          </a:r>
+          <a:endParaRPr lang="de-DE" sz="1800" kern="1200"/>
+        </a:p>
+      </dsp:txBody>
+      <dsp:txXfrm>
+        <a:off x="2880402" y="163379"/>
+        <a:ext cx="2522988" cy="518400"/>
+      </dsp:txXfrm>
+    </dsp:sp>
+    <dsp:sp modelId="{DA60A9EA-03A8-45E3-A820-C9EE8A85DE99}">
+      <dsp:nvSpPr>
+        <dsp:cNvPr id="0" name=""/>
+        <dsp:cNvSpPr/>
+      </dsp:nvSpPr>
+      <dsp:spPr>
+        <a:xfrm>
+          <a:off x="2880402" y="681779"/>
+          <a:ext cx="2522988" cy="2394840"/>
+        </a:xfrm>
+        <a:prstGeom prst="rect">
+          <a:avLst/>
+        </a:prstGeom>
+        <a:solidFill>
+          <a:schemeClr val="accent1">
+            <a:alpha val="90000"/>
+            <a:tint val="40000"/>
+            <a:hueOff val="0"/>
+            <a:satOff val="0"/>
+            <a:lumOff val="0"/>
+            <a:alphaOff val="0"/>
+          </a:schemeClr>
+        </a:solidFill>
+        <a:ln w="12700" cap="flat" cmpd="sng" algn="ctr">
+          <a:solidFill>
+            <a:schemeClr val="accent1">
+              <a:alpha val="90000"/>
+              <a:tint val="40000"/>
+              <a:hueOff val="0"/>
+              <a:satOff val="0"/>
+              <a:lumOff val="0"/>
+              <a:alphaOff val="0"/>
+            </a:schemeClr>
+          </a:solidFill>
+          <a:prstDash val="solid"/>
+          <a:miter lim="800000"/>
+        </a:ln>
+        <a:effectLst/>
+      </dsp:spPr>
+      <dsp:style>
+        <a:lnRef idx="2">
+          <a:scrgbClr r="0" g="0" b="0"/>
+        </a:lnRef>
+        <a:fillRef idx="1">
+          <a:scrgbClr r="0" g="0" b="0"/>
+        </a:fillRef>
+        <a:effectRef idx="0">
+          <a:scrgbClr r="0" g="0" b="0"/>
+        </a:effectRef>
+        <a:fontRef idx="minor"/>
+      </dsp:style>
+      <dsp:txBody>
+        <a:bodyPr spcFirstLastPara="0" vert="horz" wrap="square" lIns="96012" tIns="96012" rIns="128016" bIns="144018" numCol="1" spcCol="1270" anchor="t" anchorCtr="0">
+          <a:noAutofit/>
+        </a:bodyPr>
+        <a:lstStyle/>
+        <a:p>
+          <a:pPr marL="171450" lvl="1" indent="-171450" algn="l" defTabSz="800100">
+            <a:lnSpc>
+              <a:spcPct val="90000"/>
+            </a:lnSpc>
+            <a:spcBef>
+              <a:spcPct val="0"/>
+            </a:spcBef>
+            <a:spcAft>
+              <a:spcPct val="15000"/>
+            </a:spcAft>
+            <a:buChar char="•"/>
+          </a:pPr>
+          <a:r>
+            <a:rPr lang="de-DE" sz="1800" kern="1200"/>
+            <a:t>Verwaltet alle Auktionen (</a:t>
+          </a:r>
+          <a:r>
+            <a:rPr lang="de-DE" sz="1800" kern="1200" err="1"/>
+            <a:t>Dict</a:t>
+          </a:r>
+          <a:r>
+            <a:rPr lang="de-DE" sz="1800" kern="1200"/>
+            <a:t>)</a:t>
+          </a:r>
+        </a:p>
+        <a:p>
+          <a:pPr marL="171450" lvl="1" indent="-171450" algn="l" defTabSz="800100">
+            <a:lnSpc>
+              <a:spcPct val="90000"/>
+            </a:lnSpc>
+            <a:spcBef>
+              <a:spcPct val="0"/>
+            </a:spcBef>
+            <a:spcAft>
+              <a:spcPct val="15000"/>
+            </a:spcAft>
+            <a:buChar char="•"/>
+          </a:pPr>
+          <a:r>
+            <a:rPr lang="de-DE" sz="1800" kern="1200"/>
+            <a:t>Hinzufügen, Bieten, Löschen, Suchen, Empfehlen, Abwickeln</a:t>
+          </a:r>
+        </a:p>
+        <a:p>
+          <a:pPr marL="171450" lvl="1" indent="-171450" algn="l" defTabSz="800100">
+            <a:lnSpc>
+              <a:spcPct val="90000"/>
+            </a:lnSpc>
+            <a:spcBef>
+              <a:spcPct val="0"/>
+            </a:spcBef>
+            <a:spcAft>
+              <a:spcPct val="15000"/>
+            </a:spcAft>
+            <a:buChar char="•"/>
+          </a:pPr>
+          <a:r>
+            <a:rPr lang="de-DE" sz="1800" kern="1200"/>
+            <a:t>Simulator-Thread im Hintergrund</a:t>
+          </a:r>
+        </a:p>
+      </dsp:txBody>
+      <dsp:txXfrm>
+        <a:off x="2880402" y="681779"/>
+        <a:ext cx="2522988" cy="2394840"/>
+      </dsp:txXfrm>
+    </dsp:sp>
+    <dsp:sp modelId="{D5EAD071-5DA6-48E9-A3CD-0612E5BBC876}">
+      <dsp:nvSpPr>
+        <dsp:cNvPr id="0" name=""/>
+        <dsp:cNvSpPr/>
+      </dsp:nvSpPr>
+      <dsp:spPr>
+        <a:xfrm>
+          <a:off x="5756609" y="163379"/>
+          <a:ext cx="2522988" cy="518400"/>
+        </a:xfrm>
+        <a:prstGeom prst="rect">
+          <a:avLst/>
+        </a:prstGeom>
+        <a:solidFill>
+          <a:schemeClr val="accent1">
+            <a:hueOff val="0"/>
+            <a:satOff val="0"/>
+            <a:lumOff val="0"/>
+            <a:alphaOff val="0"/>
+          </a:schemeClr>
+        </a:solidFill>
+        <a:ln w="12700" cap="flat" cmpd="sng" algn="ctr">
+          <a:solidFill>
+            <a:schemeClr val="accent1">
+              <a:hueOff val="0"/>
+              <a:satOff val="0"/>
+              <a:lumOff val="0"/>
+              <a:alphaOff val="0"/>
+            </a:schemeClr>
+          </a:solidFill>
+          <a:prstDash val="solid"/>
+          <a:miter lim="800000"/>
+        </a:ln>
+        <a:effectLst/>
+      </dsp:spPr>
+      <dsp:style>
+        <a:lnRef idx="2">
+          <a:scrgbClr r="0" g="0" b="0"/>
+        </a:lnRef>
+        <a:fillRef idx="1">
+          <a:scrgbClr r="0" g="0" b="0"/>
+        </a:fillRef>
+        <a:effectRef idx="0">
+          <a:scrgbClr r="0" g="0" b="0"/>
+        </a:effectRef>
+        <a:fontRef idx="minor">
+          <a:schemeClr val="lt1"/>
+        </a:fontRef>
+      </dsp:style>
+      <dsp:txBody>
+        <a:bodyPr spcFirstLastPara="0" vert="horz" wrap="square" lIns="128016" tIns="73152" rIns="128016" bIns="73152" numCol="1" spcCol="1270" anchor="ctr" anchorCtr="0">
+          <a:noAutofit/>
+        </a:bodyPr>
+        <a:lstStyle/>
+        <a:p>
+          <a:pPr marL="0" lvl="0" indent="0" algn="ctr" defTabSz="800100">
+            <a:lnSpc>
+              <a:spcPct val="90000"/>
+            </a:lnSpc>
+            <a:spcBef>
+              <a:spcPct val="0"/>
+            </a:spcBef>
+            <a:spcAft>
+              <a:spcPct val="35000"/>
+            </a:spcAft>
+            <a:buNone/>
+          </a:pPr>
+          <a:r>
+            <a:rPr lang="de-DE" sz="1800" kern="1200"/>
+            <a:t>Item</a:t>
+          </a:r>
+        </a:p>
+      </dsp:txBody>
+      <dsp:txXfrm>
+        <a:off x="5756609" y="163379"/>
+        <a:ext cx="2522988" cy="518400"/>
+      </dsp:txXfrm>
+    </dsp:sp>
+    <dsp:sp modelId="{2B136E93-0CF3-415F-9C52-F11E46B4D872}">
+      <dsp:nvSpPr>
+        <dsp:cNvPr id="0" name=""/>
+        <dsp:cNvSpPr/>
+      </dsp:nvSpPr>
+      <dsp:spPr>
+        <a:xfrm>
+          <a:off x="5756609" y="681779"/>
+          <a:ext cx="2522988" cy="2394840"/>
+        </a:xfrm>
+        <a:prstGeom prst="rect">
+          <a:avLst/>
+        </a:prstGeom>
+        <a:solidFill>
+          <a:schemeClr val="accent1">
+            <a:alpha val="90000"/>
+            <a:tint val="40000"/>
+            <a:hueOff val="0"/>
+            <a:satOff val="0"/>
+            <a:lumOff val="0"/>
+            <a:alphaOff val="0"/>
+          </a:schemeClr>
+        </a:solidFill>
+        <a:ln w="12700" cap="flat" cmpd="sng" algn="ctr">
+          <a:solidFill>
+            <a:schemeClr val="accent1">
+              <a:alpha val="90000"/>
+              <a:tint val="40000"/>
+              <a:hueOff val="0"/>
+              <a:satOff val="0"/>
+              <a:lumOff val="0"/>
+              <a:alphaOff val="0"/>
+            </a:schemeClr>
+          </a:solidFill>
+          <a:prstDash val="solid"/>
+          <a:miter lim="800000"/>
+        </a:ln>
+        <a:effectLst/>
+      </dsp:spPr>
+      <dsp:style>
+        <a:lnRef idx="2">
+          <a:scrgbClr r="0" g="0" b="0"/>
+        </a:lnRef>
+        <a:fillRef idx="1">
+          <a:scrgbClr r="0" g="0" b="0"/>
+        </a:fillRef>
+        <a:effectRef idx="0">
+          <a:scrgbClr r="0" g="0" b="0"/>
+        </a:effectRef>
+        <a:fontRef idx="minor"/>
+      </dsp:style>
+      <dsp:txBody>
+        <a:bodyPr spcFirstLastPara="0" vert="horz" wrap="square" lIns="96012" tIns="96012" rIns="128016" bIns="144018" numCol="1" spcCol="1270" anchor="t" anchorCtr="0">
+          <a:noAutofit/>
+        </a:bodyPr>
+        <a:lstStyle/>
+        <a:p>
+          <a:pPr marL="171450" lvl="1" indent="-171450" algn="l" defTabSz="800100">
+            <a:lnSpc>
+              <a:spcPct val="90000"/>
+            </a:lnSpc>
+            <a:spcBef>
+              <a:spcPct val="0"/>
+            </a:spcBef>
+            <a:spcAft>
+              <a:spcPct val="15000"/>
+            </a:spcAft>
+            <a:buChar char="•"/>
+          </a:pPr>
+          <a:r>
+            <a:rPr lang="de-DE" sz="1800" kern="1200"/>
+            <a:t>Kann auf Marktplatzt </a:t>
+          </a:r>
+          <a:r>
+            <a:rPr lang="de-DE" sz="1800" kern="1200" err="1"/>
+            <a:t>ge</a:t>
+          </a:r>
+          <a:r>
+            <a:rPr lang="de-DE" sz="1800" kern="1200"/>
+            <a:t>-/verkauft werden</a:t>
+          </a:r>
+        </a:p>
+        <a:p>
+          <a:pPr marL="171450" lvl="1" indent="-171450" algn="l" defTabSz="800100">
+            <a:lnSpc>
+              <a:spcPct val="90000"/>
+            </a:lnSpc>
+            <a:spcBef>
+              <a:spcPct val="0"/>
+            </a:spcBef>
+            <a:spcAft>
+              <a:spcPct val="15000"/>
+            </a:spcAft>
+            <a:buChar char="•"/>
+          </a:pPr>
+          <a:r>
+            <a:rPr lang="de-DE" sz="1800" kern="1200"/>
+            <a:t>Besitzt Namen, Beschreibung, Mindestgebot</a:t>
+          </a:r>
+        </a:p>
+      </dsp:txBody>
+      <dsp:txXfrm>
+        <a:off x="5756609" y="681779"/>
+        <a:ext cx="2522988" cy="2394840"/>
+      </dsp:txXfrm>
+    </dsp:sp>
+    <dsp:sp modelId="{5EC15CC8-115F-43FC-87FF-478537DDD29B}">
+      <dsp:nvSpPr>
+        <dsp:cNvPr id="0" name=""/>
+        <dsp:cNvSpPr/>
+      </dsp:nvSpPr>
+      <dsp:spPr>
+        <a:xfrm>
+          <a:off x="8632815" y="163379"/>
+          <a:ext cx="2522988" cy="518400"/>
+        </a:xfrm>
+        <a:prstGeom prst="rect">
+          <a:avLst/>
+        </a:prstGeom>
+        <a:solidFill>
+          <a:schemeClr val="accent1">
+            <a:hueOff val="0"/>
+            <a:satOff val="0"/>
+            <a:lumOff val="0"/>
+            <a:alphaOff val="0"/>
+          </a:schemeClr>
+        </a:solidFill>
+        <a:ln w="12700" cap="flat" cmpd="sng" algn="ctr">
+          <a:solidFill>
+            <a:schemeClr val="accent1">
+              <a:hueOff val="0"/>
+              <a:satOff val="0"/>
+              <a:lumOff val="0"/>
+              <a:alphaOff val="0"/>
+            </a:schemeClr>
+          </a:solidFill>
+          <a:prstDash val="solid"/>
+          <a:miter lim="800000"/>
+        </a:ln>
+        <a:effectLst/>
+      </dsp:spPr>
+      <dsp:style>
+        <a:lnRef idx="2">
+          <a:scrgbClr r="0" g="0" b="0"/>
+        </a:lnRef>
+        <a:fillRef idx="1">
+          <a:scrgbClr r="0" g="0" b="0"/>
+        </a:fillRef>
+        <a:effectRef idx="0">
+          <a:scrgbClr r="0" g="0" b="0"/>
+        </a:effectRef>
+        <a:fontRef idx="minor">
+          <a:schemeClr val="lt1"/>
+        </a:fontRef>
+      </dsp:style>
+      <dsp:txBody>
+        <a:bodyPr spcFirstLastPara="0" vert="horz" wrap="square" lIns="128016" tIns="73152" rIns="128016" bIns="73152" numCol="1" spcCol="1270" anchor="ctr" anchorCtr="0">
+          <a:noAutofit/>
+        </a:bodyPr>
+        <a:lstStyle/>
+        <a:p>
+          <a:pPr marL="0" lvl="0" indent="0" algn="ctr" defTabSz="800100">
+            <a:lnSpc>
+              <a:spcPct val="90000"/>
+            </a:lnSpc>
+            <a:spcBef>
+              <a:spcPct val="0"/>
+            </a:spcBef>
+            <a:spcAft>
+              <a:spcPct val="35000"/>
+            </a:spcAft>
+            <a:buNone/>
+          </a:pPr>
+          <a:r>
+            <a:rPr lang="de-DE" sz="1800" kern="1200"/>
+            <a:t>Stack</a:t>
+          </a:r>
+        </a:p>
+      </dsp:txBody>
+      <dsp:txXfrm>
+        <a:off x="8632815" y="163379"/>
+        <a:ext cx="2522988" cy="518400"/>
+      </dsp:txXfrm>
+    </dsp:sp>
+    <dsp:sp modelId="{41D49699-3BF9-47AF-8ABB-39C6C6C3B550}">
+      <dsp:nvSpPr>
+        <dsp:cNvPr id="0" name=""/>
+        <dsp:cNvSpPr/>
+      </dsp:nvSpPr>
+      <dsp:spPr>
+        <a:xfrm>
+          <a:off x="8632815" y="681779"/>
+          <a:ext cx="2522988" cy="2394840"/>
+        </a:xfrm>
+        <a:prstGeom prst="rect">
+          <a:avLst/>
+        </a:prstGeom>
+        <a:solidFill>
+          <a:schemeClr val="accent1">
+            <a:alpha val="90000"/>
+            <a:tint val="40000"/>
+            <a:hueOff val="0"/>
+            <a:satOff val="0"/>
+            <a:lumOff val="0"/>
+            <a:alphaOff val="0"/>
+          </a:schemeClr>
+        </a:solidFill>
+        <a:ln w="12700" cap="flat" cmpd="sng" algn="ctr">
+          <a:solidFill>
+            <a:schemeClr val="accent1">
+              <a:alpha val="90000"/>
+              <a:tint val="40000"/>
+              <a:hueOff val="0"/>
+              <a:satOff val="0"/>
+              <a:lumOff val="0"/>
+              <a:alphaOff val="0"/>
+            </a:schemeClr>
+          </a:solidFill>
+          <a:prstDash val="solid"/>
+          <a:miter lim="800000"/>
+        </a:ln>
+        <a:effectLst/>
+      </dsp:spPr>
+      <dsp:style>
+        <a:lnRef idx="2">
+          <a:scrgbClr r="0" g="0" b="0"/>
+        </a:lnRef>
+        <a:fillRef idx="1">
+          <a:scrgbClr r="0" g="0" b="0"/>
+        </a:fillRef>
+        <a:effectRef idx="0">
+          <a:scrgbClr r="0" g="0" b="0"/>
+        </a:effectRef>
+        <a:fontRef idx="minor"/>
+      </dsp:style>
+      <dsp:txBody>
+        <a:bodyPr spcFirstLastPara="0" vert="horz" wrap="square" lIns="96012" tIns="96012" rIns="128016" bIns="144018" numCol="1" spcCol="1270" anchor="t" anchorCtr="0">
+          <a:noAutofit/>
+        </a:bodyPr>
+        <a:lstStyle/>
+        <a:p>
+          <a:pPr marL="171450" lvl="1" indent="-171450" algn="l" defTabSz="800100">
+            <a:lnSpc>
+              <a:spcPct val="90000"/>
+            </a:lnSpc>
+            <a:spcBef>
+              <a:spcPct val="0"/>
+            </a:spcBef>
+            <a:spcAft>
+              <a:spcPct val="15000"/>
+            </a:spcAft>
+            <a:buChar char="•"/>
+          </a:pPr>
+          <a:r>
+            <a:rPr lang="de-DE" sz="1800" kern="1200"/>
+            <a:t>Implementiert Stapel auf Basis der Python-Liste</a:t>
+          </a:r>
+        </a:p>
+        <a:p>
+          <a:pPr marL="171450" lvl="1" indent="-171450" algn="l" defTabSz="800100">
+            <a:lnSpc>
+              <a:spcPct val="90000"/>
+            </a:lnSpc>
+            <a:spcBef>
+              <a:spcPct val="0"/>
+            </a:spcBef>
+            <a:spcAft>
+              <a:spcPct val="15000"/>
+            </a:spcAft>
+            <a:buChar char="•"/>
+          </a:pPr>
+          <a:r>
+            <a:rPr lang="de-DE" sz="1800" kern="1200"/>
+            <a:t>Standard-Stapeloperationen</a:t>
+          </a:r>
+        </a:p>
+      </dsp:txBody>
+      <dsp:txXfrm>
+        <a:off x="8632815" y="681779"/>
+        <a:ext cx="2522988" cy="2394840"/>
+      </dsp:txXfrm>
+    </dsp:sp>
+  </dsp:spTree>
+</dsp:drawing>
+</file>
+
+<file path=ppt/diagrams/drawing3.xml><?xml version="1.0" encoding="utf-8"?>
+<dsp:drawing xmlns:dgm="http://schemas.openxmlformats.org/drawingml/2006/diagram" xmlns:dsp="http://schemas.microsoft.com/office/drawing/2008/diagram" xmlns:a="http://schemas.openxmlformats.org/drawingml/2006/main">
+  <dsp:spTree>
+    <dsp:nvGrpSpPr>
+      <dsp:cNvPr id="0" name=""/>
+      <dsp:cNvGrpSpPr/>
+    </dsp:nvGrpSpPr>
+    <dsp:grpSpPr/>
+    <dsp:sp modelId="{61C967B9-95E2-4F22-974A-D017711FC2D7}">
+      <dsp:nvSpPr>
+        <dsp:cNvPr id="0" name=""/>
+        <dsp:cNvSpPr/>
+      </dsp:nvSpPr>
+      <dsp:spPr>
+        <a:xfrm>
+          <a:off x="54" y="503032"/>
+          <a:ext cx="5214902" cy="633600"/>
+        </a:xfrm>
+        <a:prstGeom prst="rect">
+          <a:avLst/>
+        </a:prstGeom>
+        <a:solidFill>
+          <a:schemeClr val="accent1">
+            <a:hueOff val="0"/>
+            <a:satOff val="0"/>
+            <a:lumOff val="0"/>
+            <a:alphaOff val="0"/>
+          </a:schemeClr>
+        </a:solidFill>
+        <a:ln w="12700" cap="flat" cmpd="sng" algn="ctr">
+          <a:solidFill>
+            <a:schemeClr val="accent1">
+              <a:hueOff val="0"/>
+              <a:satOff val="0"/>
+              <a:lumOff val="0"/>
+              <a:alphaOff val="0"/>
+            </a:schemeClr>
+          </a:solidFill>
+          <a:prstDash val="solid"/>
+          <a:miter lim="800000"/>
+        </a:ln>
+        <a:effectLst/>
+      </dsp:spPr>
+      <dsp:style>
+        <a:lnRef idx="2">
+          <a:scrgbClr r="0" g="0" b="0"/>
+        </a:lnRef>
+        <a:fillRef idx="1">
+          <a:scrgbClr r="0" g="0" b="0"/>
+        </a:fillRef>
+        <a:effectRef idx="0">
+          <a:scrgbClr r="0" g="0" b="0"/>
+        </a:effectRef>
+        <a:fontRef idx="minor">
+          <a:schemeClr val="lt1"/>
+        </a:fontRef>
+      </dsp:style>
+      <dsp:txBody>
+        <a:bodyPr spcFirstLastPara="0" vert="horz" wrap="square" lIns="156464" tIns="89408" rIns="156464" bIns="89408" numCol="1" spcCol="1270" anchor="ctr" anchorCtr="0">
+          <a:noAutofit/>
+        </a:bodyPr>
+        <a:lstStyle/>
+        <a:p>
+          <a:pPr marL="0" lvl="0" indent="0" algn="ctr" defTabSz="977900">
+            <a:lnSpc>
+              <a:spcPct val="90000"/>
+            </a:lnSpc>
+            <a:spcBef>
+              <a:spcPct val="0"/>
+            </a:spcBef>
+            <a:spcAft>
+              <a:spcPct val="35000"/>
+            </a:spcAft>
+            <a:buNone/>
+          </a:pPr>
+          <a:r>
+            <a:rPr lang="de-DE" sz="2200" kern="1200" err="1"/>
+            <a:t>SystemMessages</a:t>
+          </a:r>
+          <a:endParaRPr lang="de-DE" sz="2200" kern="1200"/>
+        </a:p>
+      </dsp:txBody>
+      <dsp:txXfrm>
+        <a:off x="54" y="503032"/>
+        <a:ext cx="5214902" cy="633600"/>
+      </dsp:txXfrm>
+    </dsp:sp>
+    <dsp:sp modelId="{4F3F9D98-76B6-42E7-955B-F3705AC4452F}">
+      <dsp:nvSpPr>
+        <dsp:cNvPr id="0" name=""/>
+        <dsp:cNvSpPr/>
+      </dsp:nvSpPr>
+      <dsp:spPr>
+        <a:xfrm>
+          <a:off x="54" y="1136632"/>
+          <a:ext cx="5214902" cy="1600335"/>
+        </a:xfrm>
+        <a:prstGeom prst="rect">
+          <a:avLst/>
+        </a:prstGeom>
+        <a:solidFill>
+          <a:schemeClr val="accent1">
+            <a:alpha val="90000"/>
+            <a:tint val="40000"/>
+            <a:hueOff val="0"/>
+            <a:satOff val="0"/>
+            <a:lumOff val="0"/>
+            <a:alphaOff val="0"/>
+          </a:schemeClr>
+        </a:solidFill>
+        <a:ln w="12700" cap="flat" cmpd="sng" algn="ctr">
+          <a:solidFill>
+            <a:schemeClr val="accent1">
+              <a:alpha val="90000"/>
+              <a:tint val="40000"/>
+              <a:hueOff val="0"/>
+              <a:satOff val="0"/>
+              <a:lumOff val="0"/>
+              <a:alphaOff val="0"/>
+            </a:schemeClr>
+          </a:solidFill>
+          <a:prstDash val="solid"/>
+          <a:miter lim="800000"/>
+        </a:ln>
+        <a:effectLst/>
+      </dsp:spPr>
+      <dsp:style>
+        <a:lnRef idx="2">
+          <a:scrgbClr r="0" g="0" b="0"/>
+        </a:lnRef>
+        <a:fillRef idx="1">
+          <a:scrgbClr r="0" g="0" b="0"/>
+        </a:fillRef>
+        <a:effectRef idx="0">
+          <a:scrgbClr r="0" g="0" b="0"/>
+        </a:effectRef>
+        <a:fontRef idx="minor"/>
+      </dsp:style>
+      <dsp:txBody>
+        <a:bodyPr spcFirstLastPara="0" vert="horz" wrap="square" lIns="117348" tIns="117348" rIns="156464" bIns="176022" numCol="1" spcCol="1270" anchor="t" anchorCtr="0">
+          <a:noAutofit/>
+        </a:bodyPr>
+        <a:lstStyle/>
+        <a:p>
+          <a:pPr marL="228600" lvl="1" indent="-228600" algn="l" defTabSz="977900">
+            <a:lnSpc>
+              <a:spcPct val="90000"/>
+            </a:lnSpc>
+            <a:spcBef>
+              <a:spcPct val="0"/>
+            </a:spcBef>
+            <a:spcAft>
+              <a:spcPct val="15000"/>
+            </a:spcAft>
+            <a:buChar char="•"/>
+          </a:pPr>
+          <a:r>
+            <a:rPr lang="de-DE" sz="2200" kern="1200"/>
+            <a:t>Verwaltet Systemnachrichten in Wartschlage</a:t>
+          </a:r>
+        </a:p>
+        <a:p>
+          <a:pPr marL="228600" lvl="1" indent="-228600" algn="l" defTabSz="977900">
+            <a:lnSpc>
+              <a:spcPct val="90000"/>
+            </a:lnSpc>
+            <a:spcBef>
+              <a:spcPct val="0"/>
+            </a:spcBef>
+            <a:spcAft>
+              <a:spcPct val="15000"/>
+            </a:spcAft>
+            <a:buChar char="•"/>
+          </a:pPr>
+          <a:r>
+            <a:rPr lang="de-DE" sz="2200" kern="1200"/>
+            <a:t>Anzeige über GUI-</a:t>
+          </a:r>
+          <a:r>
+            <a:rPr lang="de-DE" sz="2200" kern="1200" err="1"/>
+            <a:t>Callbacks</a:t>
+          </a:r>
+          <a:r>
+            <a:rPr lang="de-DE" sz="2200" kern="1200"/>
+            <a:t> oder </a:t>
+          </a:r>
+          <a:r>
+            <a:rPr lang="de-DE" sz="2200" kern="1200" err="1"/>
+            <a:t>Tkinter</a:t>
+          </a:r>
+          <a:r>
+            <a:rPr lang="de-DE" sz="2200" kern="1200"/>
+            <a:t>-Label-Aktualisierung</a:t>
+          </a:r>
+        </a:p>
+      </dsp:txBody>
+      <dsp:txXfrm>
+        <a:off x="54" y="1136632"/>
+        <a:ext cx="5214902" cy="1600335"/>
+      </dsp:txXfrm>
+    </dsp:sp>
+    <dsp:sp modelId="{0388FFD8-C7F3-422A-8ACD-F37B57043B9E}">
+      <dsp:nvSpPr>
+        <dsp:cNvPr id="0" name=""/>
+        <dsp:cNvSpPr/>
+      </dsp:nvSpPr>
+      <dsp:spPr>
+        <a:xfrm>
+          <a:off x="5945043" y="503032"/>
+          <a:ext cx="5214902" cy="633600"/>
+        </a:xfrm>
+        <a:prstGeom prst="rect">
+          <a:avLst/>
+        </a:prstGeom>
+        <a:solidFill>
+          <a:schemeClr val="accent1">
+            <a:hueOff val="0"/>
+            <a:satOff val="0"/>
+            <a:lumOff val="0"/>
+            <a:alphaOff val="0"/>
+          </a:schemeClr>
+        </a:solidFill>
+        <a:ln w="12700" cap="flat" cmpd="sng" algn="ctr">
+          <a:solidFill>
+            <a:schemeClr val="accent1">
+              <a:hueOff val="0"/>
+              <a:satOff val="0"/>
+              <a:lumOff val="0"/>
+              <a:alphaOff val="0"/>
+            </a:schemeClr>
+          </a:solidFill>
+          <a:prstDash val="solid"/>
+          <a:miter lim="800000"/>
+        </a:ln>
+        <a:effectLst/>
+      </dsp:spPr>
+      <dsp:style>
+        <a:lnRef idx="2">
+          <a:scrgbClr r="0" g="0" b="0"/>
+        </a:lnRef>
+        <a:fillRef idx="1">
+          <a:scrgbClr r="0" g="0" b="0"/>
+        </a:fillRef>
+        <a:effectRef idx="0">
+          <a:scrgbClr r="0" g="0" b="0"/>
+        </a:effectRef>
+        <a:fontRef idx="minor">
+          <a:schemeClr val="lt1"/>
+        </a:fontRef>
+      </dsp:style>
+      <dsp:txBody>
+        <a:bodyPr spcFirstLastPara="0" vert="horz" wrap="square" lIns="156464" tIns="89408" rIns="156464" bIns="89408" numCol="1" spcCol="1270" anchor="ctr" anchorCtr="0">
+          <a:noAutofit/>
+        </a:bodyPr>
+        <a:lstStyle/>
+        <a:p>
+          <a:pPr marL="0" lvl="0" indent="0" algn="ctr" defTabSz="977900">
+            <a:lnSpc>
+              <a:spcPct val="90000"/>
+            </a:lnSpc>
+            <a:spcBef>
+              <a:spcPct val="0"/>
+            </a:spcBef>
+            <a:spcAft>
+              <a:spcPct val="35000"/>
+            </a:spcAft>
+            <a:buNone/>
+          </a:pPr>
+          <a:r>
+            <a:rPr lang="de-DE" sz="2200" kern="1200"/>
+            <a:t>Trie</a:t>
+          </a:r>
+        </a:p>
+      </dsp:txBody>
+      <dsp:txXfrm>
+        <a:off x="5945043" y="503032"/>
+        <a:ext cx="5214902" cy="633600"/>
+      </dsp:txXfrm>
+    </dsp:sp>
+    <dsp:sp modelId="{D9752ADB-1534-454C-9CDF-E950D37327CB}">
+      <dsp:nvSpPr>
+        <dsp:cNvPr id="0" name=""/>
+        <dsp:cNvSpPr/>
+      </dsp:nvSpPr>
+      <dsp:spPr>
+        <a:xfrm>
+          <a:off x="5945043" y="1136632"/>
+          <a:ext cx="5214902" cy="1600335"/>
+        </a:xfrm>
+        <a:prstGeom prst="rect">
+          <a:avLst/>
+        </a:prstGeom>
+        <a:solidFill>
+          <a:schemeClr val="accent1">
+            <a:alpha val="90000"/>
+            <a:tint val="40000"/>
+            <a:hueOff val="0"/>
+            <a:satOff val="0"/>
+            <a:lumOff val="0"/>
+            <a:alphaOff val="0"/>
+          </a:schemeClr>
+        </a:solidFill>
+        <a:ln w="12700" cap="flat" cmpd="sng" algn="ctr">
+          <a:solidFill>
+            <a:schemeClr val="accent1">
+              <a:alpha val="90000"/>
+              <a:tint val="40000"/>
+              <a:hueOff val="0"/>
+              <a:satOff val="0"/>
+              <a:lumOff val="0"/>
+              <a:alphaOff val="0"/>
+            </a:schemeClr>
+          </a:solidFill>
+          <a:prstDash val="solid"/>
+          <a:miter lim="800000"/>
+        </a:ln>
+        <a:effectLst/>
+      </dsp:spPr>
+      <dsp:style>
+        <a:lnRef idx="2">
+          <a:scrgbClr r="0" g="0" b="0"/>
+        </a:lnRef>
+        <a:fillRef idx="1">
+          <a:scrgbClr r="0" g="0" b="0"/>
+        </a:fillRef>
+        <a:effectRef idx="0">
+          <a:scrgbClr r="0" g="0" b="0"/>
+        </a:effectRef>
+        <a:fontRef idx="minor"/>
+      </dsp:style>
+      <dsp:txBody>
+        <a:bodyPr spcFirstLastPara="0" vert="horz" wrap="square" lIns="117348" tIns="117348" rIns="156464" bIns="176022" numCol="1" spcCol="1270" anchor="t" anchorCtr="0">
+          <a:noAutofit/>
+        </a:bodyPr>
+        <a:lstStyle/>
+        <a:p>
+          <a:pPr marL="228600" lvl="1" indent="-228600" algn="l" defTabSz="977900">
+            <a:lnSpc>
+              <a:spcPct val="90000"/>
+            </a:lnSpc>
+            <a:spcBef>
+              <a:spcPct val="0"/>
+            </a:spcBef>
+            <a:spcAft>
+              <a:spcPct val="15000"/>
+            </a:spcAft>
+            <a:buChar char="•"/>
+          </a:pPr>
+          <a:r>
+            <a:rPr lang="de-DE" sz="2200" kern="1200"/>
+            <a:t>Effiziente Präfixsuche/Autovervollständigung</a:t>
+          </a:r>
+        </a:p>
+      </dsp:txBody>
+      <dsp:txXfrm>
+        <a:off x="5945043" y="1136632"/>
+        <a:ext cx="5214902" cy="1600335"/>
       </dsp:txXfrm>
     </dsp:sp>
   </dsp:spTree>
@@ -15768,6 +16400,74 @@
           <a:bodyPr/>
           <a:lstStyle/>
           <a:p>
+            <a:endParaRPr lang="de-DE" dirty="0"/>
+          </a:p>
+        </p:txBody>
+      </p:sp>
+    </p:spTree>
+    <p:extLst>
+      <p:ext uri="{BB962C8B-B14F-4D97-AF65-F5344CB8AC3E}">
+        <p14:creationId xmlns:p14="http://schemas.microsoft.com/office/powerpoint/2010/main" val="1199754172"/>
+      </p:ext>
+    </p:extLst>
+  </p:cSld>
+  <p:clrMapOvr>
+    <a:masterClrMapping/>
+  </p:clrMapOvr>
+</p:notes>
+</file>
+
+<file path=ppt/notesSlides/notesSlide2.xml><?xml version="1.0" encoding="utf-8"?>
+<p:notes xmlns:a="http://schemas.openxmlformats.org/drawingml/2006/main" xmlns:r="http://schemas.openxmlformats.org/officeDocument/2006/relationships" xmlns:p="http://schemas.openxmlformats.org/presentationml/2006/main">
+  <p:cSld>
+    <p:spTree>
+      <p:nvGrpSpPr>
+        <p:cNvPr id="1" name=""/>
+        <p:cNvGrpSpPr/>
+        <p:nvPr/>
+      </p:nvGrpSpPr>
+      <p:grpSpPr>
+        <a:xfrm>
+          <a:off x="0" y="0"/>
+          <a:ext cx="0" cy="0"/>
+          <a:chOff x="0" y="0"/>
+          <a:chExt cx="0" cy="0"/>
+        </a:xfrm>
+      </p:grpSpPr>
+      <p:sp>
+        <p:nvSpPr>
+          <p:cNvPr id="2" name="Folienbildplatzhalter 1"/>
+          <p:cNvSpPr>
+            <a:spLocks noGrp="1" noRot="1" noChangeAspect="1"/>
+          </p:cNvSpPr>
+          <p:nvPr>
+            <p:ph type="sldImg"/>
+          </p:nvPr>
+        </p:nvSpPr>
+        <p:spPr/>
+        <p:txBody>
+          <a:bodyPr/>
+          <a:lstStyle/>
+          <a:p>
+            <a:endParaRPr lang="de-DE"/>
+          </a:p>
+        </p:txBody>
+      </p:sp>
+      <p:sp>
+        <p:nvSpPr>
+          <p:cNvPr id="3" name="Notizenplatzhalter 2"/>
+          <p:cNvSpPr>
+            <a:spLocks noGrp="1"/>
+          </p:cNvSpPr>
+          <p:nvPr>
+            <p:ph type="body" idx="1"/>
+          </p:nvPr>
+        </p:nvSpPr>
+        <p:spPr/>
+        <p:txBody>
+          <a:bodyPr/>
+          <a:lstStyle/>
+          <a:p>
             <a:r>
               <a:rPr lang="de-DE"/>
               <a:t>1024 </a:t>
@@ -15898,7 +16598,7 @@
 </p:notes>
 </file>
 
-<file path=ppt/notesSlides/notesSlide2.xml><?xml version="1.0" encoding="utf-8"?>
+<file path=ppt/notesSlides/notesSlide3.xml><?xml version="1.0" encoding="utf-8"?>
 <p:notes xmlns:a="http://schemas.openxmlformats.org/drawingml/2006/main" xmlns:r="http://schemas.openxmlformats.org/officeDocument/2006/relationships" xmlns:p="http://schemas.openxmlformats.org/presentationml/2006/main">
   <p:cSld>
     <p:spTree>
@@ -15938,6 +16638,13 @@
           </p:nvPr>
         </p:nvSpPr>
         <p:spPr/>
+        <p:txBody>
+          <a:bodyPr/>
+          <a:lstStyle/>
+          <a:p>
+            <a:endParaRPr lang="de-DE"/>
+          </a:p>
+        </p:txBody>
       </p:sp>
       <p:sp>
         <p:nvSpPr>
@@ -15961,15 +16668,15 @@
           <a:lstStyle/>
           <a:p>
             <a:r>
-              <a:rPr lang="de-DE"/>
+              <a:rPr lang="de-DE" dirty="0"/>
               <a:t>1024 </a:t>
             </a:r>
             <a:r>
-              <a:rPr lang="de-DE" err="1"/>
+              <a:rPr lang="de-DE" dirty="0" err="1"/>
               <a:t>Buckets</a:t>
             </a:r>
             <a:r>
-              <a:rPr lang="de-DE"/>
+              <a:rPr lang="de-DE" dirty="0"/>
               <a:t>: 0 – 1023</a:t>
             </a:r>
           </a:p>
@@ -15978,31 +16685,31 @@
               <a:buAutoNum type="arabicPeriod"/>
             </a:pPr>
             <a:r>
-              <a:rPr lang="de-DE"/>
+              <a:rPr lang="de-DE" dirty="0"/>
               <a:t>Buchstabe des Produkts: (</a:t>
             </a:r>
             <a:r>
-              <a:rPr lang="de-DE" err="1"/>
+              <a:rPr lang="de-DE" dirty="0" err="1"/>
               <a:t>ord</a:t>
             </a:r>
             <a:r>
-              <a:rPr lang="de-DE"/>
+              <a:rPr lang="de-DE" dirty="0"/>
               <a:t>(</a:t>
             </a:r>
             <a:r>
-              <a:rPr lang="de-DE" err="1"/>
+              <a:rPr lang="de-DE" dirty="0" err="1"/>
               <a:t>first</a:t>
             </a:r>
             <a:r>
-              <a:rPr lang="de-DE"/>
+              <a:rPr lang="de-DE" dirty="0"/>
               <a:t>) –</a:t>
             </a:r>
             <a:r>
-              <a:rPr lang="de-DE" err="1"/>
+              <a:rPr lang="de-DE" dirty="0" err="1"/>
               <a:t>ord</a:t>
             </a:r>
             <a:r>
-              <a:rPr lang="de-DE"/>
+              <a:rPr lang="de-DE" dirty="0"/>
               <a:t>(‚a‘)) % 1024</a:t>
             </a:r>
           </a:p>
@@ -16011,30 +16718,22 @@
               <a:buNone/>
             </a:pPr>
             <a:r>
-              <a:rPr lang="de-DE"/>
-              <a:t>Kollision bei </a:t>
-            </a:r>
-            <a:r>
-              <a:rPr lang="de-DE" err="1"/>
-              <a:t>geleichem</a:t>
-            </a:r>
-            <a:r>
-              <a:rPr lang="de-DE"/>
-              <a:t> Anfangsbuchstaben</a:t>
+              <a:rPr lang="de-DE" dirty="0"/>
+              <a:t>Kollision bei gleichem Anfangsbuchstaben</a:t>
             </a:r>
           </a:p>
           <a:p>
             <a:pPr marL="228600" indent="-228600">
               <a:buAutoNum type="arabicPeriod"/>
             </a:pPr>
-            <a:endParaRPr lang="de-DE"/>
+            <a:endParaRPr lang="de-DE" dirty="0"/>
           </a:p>
           <a:p>
             <a:pPr marL="0" indent="0">
               <a:buNone/>
             </a:pPr>
             <a:r>
-              <a:rPr lang="de-DE"/>
+              <a:rPr lang="de-DE" dirty="0"/>
               <a:t>Neu:</a:t>
             </a:r>
           </a:p>
@@ -16057,15 +16756,15 @@
               <a:defRPr/>
             </a:pPr>
             <a:r>
-              <a:rPr lang="de-DE"/>
+              <a:rPr lang="de-DE" dirty="0"/>
               <a:t>Polynom-Hash: h=(h*31+ord(</a:t>
             </a:r>
             <a:r>
-              <a:rPr lang="de-DE" err="1"/>
+              <a:rPr lang="de-DE" dirty="0" err="1"/>
               <a:t>ch</a:t>
             </a:r>
             <a:r>
-              <a:rPr lang="de-DE"/>
+              <a:rPr lang="de-DE" dirty="0"/>
               <a:t>)%(2^31 – 1)</a:t>
             </a:r>
           </a:p>
@@ -16073,7 +16772,7 @@
             <a:pPr marL="0" indent="0">
               <a:buNone/>
             </a:pPr>
-            <a:endParaRPr lang="de-DE"/>
+            <a:endParaRPr lang="de-DE" dirty="0"/>
           </a:p>
         </p:txBody>
       </p:sp>
@@ -25297,7 +25996,7 @@
           <a:blip>
             <a:extLst>
               <a:ext uri="{96DAC541-7B7A-43D3-8B79-37D633B846F1}">
-                <asvg:svgBlip xmlns:asvg="http://schemas.microsoft.com/office/drawing/2016/SVG/main" r:embed="rId2"/>
+                <asvg:svgBlip xmlns:asvg="http://schemas.microsoft.com/office/drawing/2016/SVG/main" r:embed="rId3"/>
               </a:ext>
             </a:extLst>
           </a:blip>
@@ -25470,34 +26169,29 @@
               </a:lnSpc>
             </a:pPr>
             <a:r>
-              <a:rPr lang="de-DE"/>
+              <a:rPr lang="de-DE" dirty="0"/>
               <a:t>Lena Beckmann</a:t>
             </a:r>
           </a:p>
           <a:p>
             <a:r>
-              <a:rPr lang="de-DE"/>
-              <a:t>Freyja </a:t>
-            </a:r>
-            <a:r>
-              <a:rPr lang="de-DE" err="1"/>
-              <a:t>Reffelmann</a:t>
-            </a:r>
-            <a:endParaRPr lang="de-DE"/>
-          </a:p>
-          <a:p>
-            <a:r>
-              <a:rPr lang="de-DE"/>
+              <a:rPr lang="de-DE" dirty="0"/>
+              <a:t>Freyja Reffelmann</a:t>
+            </a:r>
+          </a:p>
+          <a:p>
+            <a:r>
+              <a:rPr lang="de-DE" dirty="0"/>
               <a:t>Lucia Stracke</a:t>
             </a:r>
           </a:p>
           <a:p>
             <a:r>
-              <a:rPr lang="de-DE"/>
+              <a:rPr lang="de-DE" dirty="0"/>
               <a:t>Zeynep </a:t>
             </a:r>
             <a:r>
-              <a:rPr lang="de-DE">
+              <a:rPr lang="de-DE" dirty="0">
                 <a:ea typeface="+mn-lt"/>
                 <a:cs typeface="+mn-lt"/>
               </a:rPr>
@@ -25813,8 +26507,8 @@
           <a:chExt cx="0" cy="0"/>
         </a:xfrm>
       </p:grpSpPr>
-      <mc:AlternateContent xmlns:mc="http://schemas.openxmlformats.org/markup-compatibility/2006" xmlns:a14="http://schemas.microsoft.com/office/drawing/2010/main">
-        <mc:Choice Requires="a14">
+      <mc:AlternateContent xmlns:mc="http://schemas.openxmlformats.org/markup-compatibility/2006">
+        <mc:Choice xmlns:a14="http://schemas.microsoft.com/office/drawing/2010/main" Requires="a14">
           <p:sp>
             <p:nvSpPr>
               <p:cNvPr id="3" name="Inhaltsplatzhalter 2">
@@ -25833,8 +26527,8 @@
             </p:nvSpPr>
             <p:spPr>
               <a:xfrm>
-                <a:off x="1332688" y="2696651"/>
-                <a:ext cx="6128427" cy="1464698"/>
+                <a:off x="5981596" y="2097255"/>
+                <a:ext cx="6128427" cy="1216362"/>
               </a:xfrm>
             </p:spPr>
             <p:txBody>
@@ -25847,8 +26541,20 @@
                   <a:buNone/>
                 </a:pPr>
                 <a:r>
-                  <a:rPr lang="de-DE" sz="2000"/>
-                  <a:t>Erwartete Kollisionen:</a:t>
+                  <a:rPr lang="de-DE" sz="1800" dirty="0"/>
+                  <a:t>Erwartete</a:t>
+                </a:r>
+                <a:r>
+                  <a:rPr lang="de-DE" sz="2000" dirty="0"/>
+                  <a:t> </a:t>
+                </a:r>
+                <a:r>
+                  <a:rPr lang="de-DE" sz="1800" dirty="0"/>
+                  <a:t>Kollisionen</a:t>
+                </a:r>
+                <a:r>
+                  <a:rPr lang="de-DE" sz="2000" dirty="0"/>
+                  <a:t>:</a:t>
                 </a:r>
               </a:p>
               <a:p>
@@ -25951,18 +26657,18 @@
                   </m:oMath>
                 </a14:m>
                 <a:r>
-                  <a:rPr lang="de-DE" sz="2000"/>
+                  <a:rPr lang="de-DE" sz="2000" dirty="0"/>
                   <a:t> , mit m 1024</a:t>
                 </a:r>
               </a:p>
               <a:p>
                 <a:pPr lvl="1" algn="ctr"/>
-                <a:endParaRPr lang="de-DE" sz="2000"/>
+                <a:endParaRPr lang="de-DE" sz="2000" dirty="0"/>
               </a:p>
             </p:txBody>
           </p:sp>
         </mc:Choice>
-        <mc:Fallback xmlns="">
+        <mc:Fallback>
           <p:sp>
             <p:nvSpPr>
               <p:cNvPr id="3" name="Inhaltsplatzhalter 2">
@@ -25981,8 +26687,8 @@
             </p:nvSpPr>
             <p:spPr>
               <a:xfrm>
-                <a:off x="1332688" y="2696651"/>
-                <a:ext cx="6128427" cy="1464698"/>
+                <a:off x="5981596" y="2097255"/>
+                <a:ext cx="6128427" cy="1216362"/>
               </a:xfrm>
               <a:blipFill>
                 <a:blip r:embed="rId3"/>
@@ -25996,7 +26702,7 @@
               <a:lstStyle/>
               <a:p>
                 <a:r>
-                  <a:rPr lang="en-US">
+                  <a:rPr lang="de-DE">
                     <a:noFill/>
                   </a:rPr>
                   <a:t> </a:t>
@@ -26078,13 +26784,13 @@
           <p:nvPr>
             <p:extLst>
               <p:ext uri="{D42A27DB-BD31-4B8C-83A1-F6EECF244321}">
-                <p14:modId xmlns:p14="http://schemas.microsoft.com/office/powerpoint/2010/main" val="913449192"/>
+                <p14:modId xmlns:p14="http://schemas.microsoft.com/office/powerpoint/2010/main" val="3216965744"/>
               </p:ext>
             </p:extLst>
           </p:nvPr>
         </p:nvGraphicFramePr>
         <p:xfrm>
-          <a:off x="7706468" y="2523642"/>
+          <a:off x="7469387" y="3465391"/>
           <a:ext cx="3152844" cy="2494280"/>
         </p:xfrm>
         <a:graphic>
@@ -26116,7 +26822,7 @@
                     <a:lstStyle/>
                     <a:p>
                       <a:r>
-                        <a:rPr lang="de-DE"/>
+                        <a:rPr lang="de-DE" dirty="0"/>
                         <a:t>N</a:t>
                       </a:r>
                     </a:p>
@@ -26129,7 +26835,7 @@
                     <a:lstStyle/>
                     <a:p>
                       <a:r>
-                        <a:rPr lang="de-DE"/>
+                        <a:rPr lang="de-DE" dirty="0"/>
                         <a:t>Erwartete Kollisionen</a:t>
                       </a:r>
                     </a:p>
@@ -26294,7 +27000,7 @@
                     <a:lstStyle/>
                     <a:p>
                       <a:r>
-                        <a:rPr lang="de-DE"/>
+                        <a:rPr lang="de-DE" dirty="0"/>
                         <a:t>Ca. 377</a:t>
                       </a:r>
                     </a:p>
@@ -26367,6 +27073,397 @@
               <a:t>Hashfunktion verbessern – Polynom-Hash</a:t>
             </a:r>
             <a:endParaRPr lang="de-DE" sz="5400"/>
+          </a:p>
+        </p:txBody>
+      </p:sp>
+      <p:sp>
+        <p:nvSpPr>
+          <p:cNvPr id="2" name="Textfeld 1">
+            <a:extLst>
+              <a:ext uri="{FF2B5EF4-FFF2-40B4-BE49-F238E27FC236}">
+                <a16:creationId xmlns:a16="http://schemas.microsoft.com/office/drawing/2014/main" id="{5862A4FC-15A9-91C1-467D-41E9D295122B}"/>
+              </a:ext>
+            </a:extLst>
+          </p:cNvPr>
+          <p:cNvSpPr txBox="1"/>
+          <p:nvPr/>
+        </p:nvSpPr>
+        <p:spPr>
+          <a:xfrm>
+            <a:off x="1266738" y="1269688"/>
+            <a:ext cx="2692865" cy="400110"/>
+          </a:xfrm>
+          <a:prstGeom prst="rect">
+            <a:avLst/>
+          </a:prstGeom>
+          <a:noFill/>
+        </p:spPr>
+        <p:txBody>
+          <a:bodyPr wrap="square" rtlCol="0">
+            <a:spAutoFit/>
+          </a:bodyPr>
+          <a:lstStyle/>
+          <a:p>
+            <a:r>
+              <a:rPr lang="de-DE" sz="2000" dirty="0"/>
+              <a:t>Alte Hashfunktion:</a:t>
+            </a:r>
+          </a:p>
+        </p:txBody>
+      </p:sp>
+      <p:sp>
+        <p:nvSpPr>
+          <p:cNvPr id="6" name="Textfeld 5">
+            <a:extLst>
+              <a:ext uri="{FF2B5EF4-FFF2-40B4-BE49-F238E27FC236}">
+                <a16:creationId xmlns:a16="http://schemas.microsoft.com/office/drawing/2014/main" id="{CC802EF2-8A7D-0516-FE71-4B6F232FB128}"/>
+              </a:ext>
+            </a:extLst>
+          </p:cNvPr>
+          <p:cNvSpPr txBox="1"/>
+          <p:nvPr/>
+        </p:nvSpPr>
+        <p:spPr>
+          <a:xfrm>
+            <a:off x="7795151" y="1269688"/>
+            <a:ext cx="2518096" cy="400110"/>
+          </a:xfrm>
+          <a:prstGeom prst="rect">
+            <a:avLst/>
+          </a:prstGeom>
+          <a:noFill/>
+        </p:spPr>
+        <p:txBody>
+          <a:bodyPr wrap="square" rtlCol="0">
+            <a:spAutoFit/>
+          </a:bodyPr>
+          <a:lstStyle/>
+          <a:p>
+            <a:r>
+              <a:rPr lang="de-DE" sz="2000" dirty="0"/>
+              <a:t>Neue Hashfunktion:</a:t>
+            </a:r>
+          </a:p>
+        </p:txBody>
+      </p:sp>
+      <p:cxnSp>
+        <p:nvCxnSpPr>
+          <p:cNvPr id="11" name="Gerader Verbinder 10">
+            <a:extLst>
+              <a:ext uri="{FF2B5EF4-FFF2-40B4-BE49-F238E27FC236}">
+                <a16:creationId xmlns:a16="http://schemas.microsoft.com/office/drawing/2014/main" id="{AA54294E-5FA2-C1E3-5F4F-29B64EA7A79C}"/>
+              </a:ext>
+            </a:extLst>
+          </p:cNvPr>
+          <p:cNvCxnSpPr>
+            <a:stCxn id="10" idx="2"/>
+          </p:cNvCxnSpPr>
+          <p:nvPr/>
+        </p:nvCxnSpPr>
+        <p:spPr>
+          <a:xfrm flipH="1">
+            <a:off x="5804767" y="1269689"/>
+            <a:ext cx="1" cy="5286603"/>
+          </a:xfrm>
+          <a:prstGeom prst="line">
+            <a:avLst/>
+          </a:prstGeom>
+        </p:spPr>
+        <p:style>
+          <a:lnRef idx="1">
+            <a:schemeClr val="accent1"/>
+          </a:lnRef>
+          <a:fillRef idx="0">
+            <a:schemeClr val="accent1"/>
+          </a:fillRef>
+          <a:effectRef idx="0">
+            <a:schemeClr val="accent1"/>
+          </a:effectRef>
+          <a:fontRef idx="minor">
+            <a:schemeClr val="tx1"/>
+          </a:fontRef>
+        </p:style>
+      </p:cxnSp>
+      <p:graphicFrame>
+        <p:nvGraphicFramePr>
+          <p:cNvPr id="13" name="Tabelle 12">
+            <a:extLst>
+              <a:ext uri="{FF2B5EF4-FFF2-40B4-BE49-F238E27FC236}">
+                <a16:creationId xmlns:a16="http://schemas.microsoft.com/office/drawing/2014/main" id="{F8EFFBAC-547B-26DE-079B-219E33DDE93C}"/>
+              </a:ext>
+            </a:extLst>
+          </p:cNvPr>
+          <p:cNvGraphicFramePr>
+            <a:graphicFrameLocks noGrp="1"/>
+          </p:cNvGraphicFramePr>
+          <p:nvPr>
+            <p:extLst>
+              <p:ext uri="{D42A27DB-BD31-4B8C-83A1-F6EECF244321}">
+                <p14:modId xmlns:p14="http://schemas.microsoft.com/office/powerpoint/2010/main" val="3500828148"/>
+              </p:ext>
+            </p:extLst>
+          </p:nvPr>
+        </p:nvGraphicFramePr>
+        <p:xfrm>
+          <a:off x="1069985" y="3465391"/>
+          <a:ext cx="3152844" cy="2494280"/>
+        </p:xfrm>
+        <a:graphic>
+          <a:graphicData uri="http://schemas.openxmlformats.org/drawingml/2006/table">
+            <a:tbl>
+              <a:tblPr firstRow="1" bandRow="1">
+                <a:tableStyleId>{5C22544A-7EE6-4342-B048-85BDC9FD1C3A}</a:tableStyleId>
+              </a:tblPr>
+              <a:tblGrid>
+                <a:gridCol w="1576422">
+                  <a:extLst>
+                    <a:ext uri="{9D8B030D-6E8A-4147-A177-3AD203B41FA5}">
+                      <a16:colId xmlns:a16="http://schemas.microsoft.com/office/drawing/2014/main" val="669396171"/>
+                    </a:ext>
+                  </a:extLst>
+                </a:gridCol>
+                <a:gridCol w="1576422">
+                  <a:extLst>
+                    <a:ext uri="{9D8B030D-6E8A-4147-A177-3AD203B41FA5}">
+                      <a16:colId xmlns:a16="http://schemas.microsoft.com/office/drawing/2014/main" val="4131784425"/>
+                    </a:ext>
+                  </a:extLst>
+                </a:gridCol>
+              </a:tblGrid>
+              <a:tr h="370840">
+                <a:tc>
+                  <a:txBody>
+                    <a:bodyPr/>
+                    <a:lstStyle/>
+                    <a:p>
+                      <a:r>
+                        <a:rPr lang="de-DE" dirty="0"/>
+                        <a:t>N</a:t>
+                      </a:r>
+                    </a:p>
+                  </a:txBody>
+                  <a:tcPr anchor="ctr"/>
+                </a:tc>
+                <a:tc>
+                  <a:txBody>
+                    <a:bodyPr/>
+                    <a:lstStyle/>
+                    <a:p>
+                      <a:r>
+                        <a:rPr lang="de-DE" dirty="0"/>
+                        <a:t>Erwartete Kollisionen</a:t>
+                      </a:r>
+                    </a:p>
+                  </a:txBody>
+                  <a:tcPr anchor="ctr"/>
+                </a:tc>
+                <a:extLst>
+                  <a:ext uri="{0D108BD9-81ED-4DB2-BD59-A6C34878D82A}">
+                    <a16:rowId xmlns:a16="http://schemas.microsoft.com/office/drawing/2014/main" val="4255736938"/>
+                  </a:ext>
+                </a:extLst>
+              </a:tr>
+              <a:tr h="370840">
+                <a:tc>
+                  <a:txBody>
+                    <a:bodyPr/>
+                    <a:lstStyle/>
+                    <a:p>
+                      <a:r>
+                        <a:rPr lang="de-DE"/>
+                        <a:t>50</a:t>
+                      </a:r>
+                    </a:p>
+                  </a:txBody>
+                  <a:tcPr/>
+                </a:tc>
+                <a:tc>
+                  <a:txBody>
+                    <a:bodyPr/>
+                    <a:lstStyle/>
+                    <a:p>
+                      <a:r>
+                        <a:rPr lang="de-DE" dirty="0"/>
+                        <a:t>Ca. 49</a:t>
+                      </a:r>
+                    </a:p>
+                  </a:txBody>
+                  <a:tcPr/>
+                </a:tc>
+                <a:extLst>
+                  <a:ext uri="{0D108BD9-81ED-4DB2-BD59-A6C34878D82A}">
+                    <a16:rowId xmlns:a16="http://schemas.microsoft.com/office/drawing/2014/main" val="1868926935"/>
+                  </a:ext>
+                </a:extLst>
+              </a:tr>
+              <a:tr h="370840">
+                <a:tc>
+                  <a:txBody>
+                    <a:bodyPr/>
+                    <a:lstStyle/>
+                    <a:p>
+                      <a:r>
+                        <a:rPr lang="de-DE"/>
+                        <a:t>100</a:t>
+                      </a:r>
+                    </a:p>
+                  </a:txBody>
+                  <a:tcPr/>
+                </a:tc>
+                <a:tc>
+                  <a:txBody>
+                    <a:bodyPr/>
+                    <a:lstStyle/>
+                    <a:p>
+                      <a:r>
+                        <a:rPr lang="de-DE" dirty="0"/>
+                        <a:t>Ca. 198</a:t>
+                      </a:r>
+                    </a:p>
+                  </a:txBody>
+                  <a:tcPr/>
+                </a:tc>
+                <a:extLst>
+                  <a:ext uri="{0D108BD9-81ED-4DB2-BD59-A6C34878D82A}">
+                    <a16:rowId xmlns:a16="http://schemas.microsoft.com/office/drawing/2014/main" val="2823373019"/>
+                  </a:ext>
+                </a:extLst>
+              </a:tr>
+              <a:tr h="370840">
+                <a:tc>
+                  <a:txBody>
+                    <a:bodyPr/>
+                    <a:lstStyle/>
+                    <a:p>
+                      <a:r>
+                        <a:rPr lang="de-DE"/>
+                        <a:t>300</a:t>
+                      </a:r>
+                    </a:p>
+                  </a:txBody>
+                  <a:tcPr/>
+                </a:tc>
+                <a:tc>
+                  <a:txBody>
+                    <a:bodyPr/>
+                    <a:lstStyle/>
+                    <a:p>
+                      <a:r>
+                        <a:rPr lang="de-DE" dirty="0"/>
+                        <a:t>Ca. 1794</a:t>
+                      </a:r>
+                    </a:p>
+                  </a:txBody>
+                  <a:tcPr/>
+                </a:tc>
+                <a:extLst>
+                  <a:ext uri="{0D108BD9-81ED-4DB2-BD59-A6C34878D82A}">
+                    <a16:rowId xmlns:a16="http://schemas.microsoft.com/office/drawing/2014/main" val="908804942"/>
+                  </a:ext>
+                </a:extLst>
+              </a:tr>
+              <a:tr h="370840">
+                <a:tc>
+                  <a:txBody>
+                    <a:bodyPr/>
+                    <a:lstStyle/>
+                    <a:p>
+                      <a:r>
+                        <a:rPr lang="de-DE"/>
+                        <a:t>500</a:t>
+                      </a:r>
+                    </a:p>
+                  </a:txBody>
+                  <a:tcPr/>
+                </a:tc>
+                <a:tc>
+                  <a:txBody>
+                    <a:bodyPr/>
+                    <a:lstStyle/>
+                    <a:p>
+                      <a:r>
+                        <a:rPr lang="de-DE" dirty="0"/>
+                        <a:t>Ca. 4990</a:t>
+                      </a:r>
+                    </a:p>
+                  </a:txBody>
+                  <a:tcPr/>
+                </a:tc>
+                <a:extLst>
+                  <a:ext uri="{0D108BD9-81ED-4DB2-BD59-A6C34878D82A}">
+                    <a16:rowId xmlns:a16="http://schemas.microsoft.com/office/drawing/2014/main" val="2255595437"/>
+                  </a:ext>
+                </a:extLst>
+              </a:tr>
+              <a:tr h="370840">
+                <a:tc>
+                  <a:txBody>
+                    <a:bodyPr/>
+                    <a:lstStyle/>
+                    <a:p>
+                      <a:r>
+                        <a:rPr lang="de-DE"/>
+                        <a:t>1024</a:t>
+                      </a:r>
+                    </a:p>
+                  </a:txBody>
+                  <a:tcPr/>
+                </a:tc>
+                <a:tc>
+                  <a:txBody>
+                    <a:bodyPr/>
+                    <a:lstStyle/>
+                    <a:p>
+                      <a:r>
+                        <a:rPr lang="de-DE" dirty="0"/>
+                        <a:t>Ca. 20591</a:t>
+                      </a:r>
+                    </a:p>
+                  </a:txBody>
+                  <a:tcPr/>
+                </a:tc>
+                <a:extLst>
+                  <a:ext uri="{0D108BD9-81ED-4DB2-BD59-A6C34878D82A}">
+                    <a16:rowId xmlns:a16="http://schemas.microsoft.com/office/drawing/2014/main" val="3216974543"/>
+                  </a:ext>
+                </a:extLst>
+              </a:tr>
+            </a:tbl>
+          </a:graphicData>
+        </a:graphic>
+      </p:graphicFrame>
+      <p:sp>
+        <p:nvSpPr>
+          <p:cNvPr id="14" name="Textfeld 13">
+            <a:extLst>
+              <a:ext uri="{FF2B5EF4-FFF2-40B4-BE49-F238E27FC236}">
+                <a16:creationId xmlns:a16="http://schemas.microsoft.com/office/drawing/2014/main" id="{351AAE87-5DC9-1B92-C826-1AB7A4784741}"/>
+              </a:ext>
+            </a:extLst>
+          </p:cNvPr>
+          <p:cNvSpPr txBox="1"/>
+          <p:nvPr/>
+        </p:nvSpPr>
+        <p:spPr>
+          <a:xfrm>
+            <a:off x="1266738" y="1905875"/>
+            <a:ext cx="3152841" cy="923330"/>
+          </a:xfrm>
+          <a:prstGeom prst="rect">
+            <a:avLst/>
+          </a:prstGeom>
+          <a:noFill/>
+        </p:spPr>
+        <p:txBody>
+          <a:bodyPr wrap="square" rtlCol="0">
+            <a:spAutoFit/>
+          </a:bodyPr>
+          <a:lstStyle/>
+          <a:p>
+            <a:r>
+              <a:rPr lang="de-DE" dirty="0"/>
+              <a:t>Fast jede zweite Transaktion führt zu einer Kollision</a:t>
+            </a:r>
           </a:p>
         </p:txBody>
       </p:sp>
@@ -26545,6 +27642,17 @@
 <file path=ppt/slides/slide2.xml><?xml version="1.0" encoding="utf-8"?>
 <p:sld xmlns:a="http://schemas.openxmlformats.org/drawingml/2006/main" xmlns:r="http://schemas.openxmlformats.org/officeDocument/2006/relationships" xmlns:p="http://schemas.openxmlformats.org/presentationml/2006/main">
   <p:cSld>
+    <p:bg>
+      <p:bgPr>
+        <a:solidFill>
+          <a:schemeClr val="bg2">
+            <a:tint val="95000"/>
+            <a:satMod val="170000"/>
+          </a:schemeClr>
+        </a:solidFill>
+        <a:effectLst/>
+      </p:bgPr>
+    </p:bg>
     <p:spTree>
       <p:nvGrpSpPr>
         <p:cNvPr id="1" name=""/>
@@ -27522,7 +28630,7 @@
                     <a:lstStyle/>
                     <a:p>
                       <a:r>
-                        <a:rPr lang="de-DE" dirty="0"/>
+                        <a:rPr lang="de-DE"/>
                         <a:t>Attribute</a:t>
                       </a:r>
                     </a:p>
@@ -27535,7 +28643,7 @@
                     <a:lstStyle/>
                     <a:p>
                       <a:r>
-                        <a:rPr lang="de-DE" dirty="0"/>
+                        <a:rPr lang="de-DE"/>
                         <a:t>Beschreibung</a:t>
                       </a:r>
                     </a:p>
@@ -27555,14 +28663,14 @@
                     <a:lstStyle/>
                     <a:p>
                       <a:r>
-                        <a:rPr lang="de-DE" dirty="0"/>
+                        <a:rPr lang="de-DE"/>
                         <a:t>_</a:t>
                       </a:r>
                       <a:r>
-                        <a:rPr lang="de-DE" dirty="0" err="1"/>
+                        <a:rPr lang="de-DE" err="1"/>
                         <a:t>id</a:t>
                       </a:r>
-                      <a:endParaRPr lang="de-DE" dirty="0"/>
+                      <a:endParaRPr lang="de-DE"/>
                     </a:p>
                   </a:txBody>
                   <a:tcPr/>
@@ -27573,7 +28681,7 @@
                     <a:lstStyle/>
                     <a:p>
                       <a:r>
-                        <a:rPr lang="de-DE" dirty="0"/>
+                        <a:rPr lang="de-DE"/>
                         <a:t>Nutzer ID</a:t>
                       </a:r>
                     </a:p>
@@ -27593,14 +28701,14 @@
                     <a:lstStyle/>
                     <a:p>
                       <a:r>
-                        <a:rPr lang="de-DE" dirty="0"/>
+                        <a:rPr lang="de-DE"/>
                         <a:t>_</a:t>
                       </a:r>
                       <a:r>
-                        <a:rPr lang="de-DE" dirty="0" err="1"/>
+                        <a:rPr lang="de-DE" err="1"/>
                         <a:t>password</a:t>
                       </a:r>
-                      <a:endParaRPr lang="de-DE" dirty="0"/>
+                      <a:endParaRPr lang="de-DE"/>
                     </a:p>
                   </a:txBody>
                   <a:tcPr/>
@@ -27611,7 +28719,7 @@
                     <a:lstStyle/>
                     <a:p>
                       <a:r>
-                        <a:rPr lang="de-DE" dirty="0"/>
+                        <a:rPr lang="de-DE"/>
                         <a:t>Passwort</a:t>
                       </a:r>
                     </a:p>
@@ -27631,14 +28739,14 @@
                     <a:lstStyle/>
                     <a:p>
                       <a:r>
-                        <a:rPr lang="de-DE" dirty="0"/>
+                        <a:rPr lang="de-DE"/>
                         <a:t>_</a:t>
                       </a:r>
                       <a:r>
-                        <a:rPr lang="de-DE" dirty="0" err="1"/>
+                        <a:rPr lang="de-DE" err="1"/>
                         <a:t>name_first</a:t>
                       </a:r>
-                      <a:endParaRPr lang="de-DE" dirty="0"/>
+                      <a:endParaRPr lang="de-DE"/>
                     </a:p>
                   </a:txBody>
                   <a:tcPr/>
@@ -27649,7 +28757,7 @@
                     <a:lstStyle/>
                     <a:p>
                       <a:r>
-                        <a:rPr lang="de-DE" dirty="0"/>
+                        <a:rPr lang="de-DE"/>
                         <a:t>Vorname</a:t>
                       </a:r>
                     </a:p>
@@ -27669,14 +28777,14 @@
                     <a:lstStyle/>
                     <a:p>
                       <a:r>
-                        <a:rPr lang="de-DE" dirty="0"/>
+                        <a:rPr lang="de-DE"/>
                         <a:t>_</a:t>
                       </a:r>
                       <a:r>
-                        <a:rPr lang="de-DE" dirty="0" err="1"/>
+                        <a:rPr lang="de-DE" err="1"/>
                         <a:t>name_family</a:t>
                       </a:r>
-                      <a:endParaRPr lang="de-DE" dirty="0"/>
+                      <a:endParaRPr lang="de-DE"/>
                     </a:p>
                   </a:txBody>
                   <a:tcPr/>
@@ -27687,7 +28795,7 @@
                     <a:lstStyle/>
                     <a:p>
                       <a:r>
-                        <a:rPr lang="de-DE" dirty="0"/>
+                        <a:rPr lang="de-DE"/>
                         <a:t>Nachname</a:t>
                       </a:r>
                     </a:p>
@@ -27707,14 +28815,14 @@
                     <a:lstStyle/>
                     <a:p>
                       <a:r>
-                        <a:rPr lang="de-DE" dirty="0"/>
+                        <a:rPr lang="de-DE"/>
                         <a:t>_</a:t>
                       </a:r>
                       <a:r>
-                        <a:rPr lang="de-DE" dirty="0" err="1"/>
+                        <a:rPr lang="de-DE" err="1"/>
                         <a:t>friends</a:t>
                       </a:r>
-                      <a:endParaRPr lang="de-DE" dirty="0"/>
+                      <a:endParaRPr lang="de-DE"/>
                     </a:p>
                   </a:txBody>
                   <a:tcPr/>
@@ -27725,14 +28833,14 @@
                     <a:lstStyle/>
                     <a:p>
                       <a:r>
-                        <a:rPr lang="de-DE" dirty="0"/>
+                        <a:rPr lang="de-DE"/>
                         <a:t>Set von User </a:t>
                       </a:r>
                       <a:r>
-                        <a:rPr lang="de-DE" dirty="0" err="1"/>
+                        <a:rPr lang="de-DE" err="1"/>
                         <a:t>ID‘s</a:t>
                       </a:r>
-                      <a:endParaRPr lang="de-DE" dirty="0"/>
+                      <a:endParaRPr lang="de-DE"/>
                     </a:p>
                   </a:txBody>
                   <a:tcPr/>
@@ -27750,14 +28858,14 @@
                     <a:lstStyle/>
                     <a:p>
                       <a:r>
-                        <a:rPr lang="de-DE" dirty="0"/>
+                        <a:rPr lang="de-DE"/>
                         <a:t>_</a:t>
                       </a:r>
                       <a:r>
-                        <a:rPr lang="de-DE" dirty="0" err="1"/>
+                        <a:rPr lang="de-DE" err="1"/>
                         <a:t>balance</a:t>
                       </a:r>
-                      <a:endParaRPr lang="de-DE" dirty="0"/>
+                      <a:endParaRPr lang="de-DE"/>
                     </a:p>
                   </a:txBody>
                   <a:tcPr/>
@@ -27768,7 +28876,7 @@
                     <a:lstStyle/>
                     <a:p>
                       <a:r>
-                        <a:rPr lang="de-DE" dirty="0"/>
+                        <a:rPr lang="de-DE"/>
                         <a:t>Kontoguthaben in €</a:t>
                       </a:r>
                     </a:p>
@@ -27788,14 +28896,14 @@
                     <a:lstStyle/>
                     <a:p>
                       <a:r>
-                        <a:rPr lang="de-DE" dirty="0"/>
+                        <a:rPr lang="de-DE"/>
                         <a:t>_</a:t>
                       </a:r>
                       <a:r>
-                        <a:rPr lang="de-DE" dirty="0" err="1"/>
+                        <a:rPr lang="de-DE" err="1"/>
                         <a:t>gps_coords</a:t>
                       </a:r>
-                      <a:endParaRPr lang="de-DE" dirty="0"/>
+                      <a:endParaRPr lang="de-DE"/>
                     </a:p>
                   </a:txBody>
                   <a:tcPr/>
@@ -27806,7 +28914,7 @@
                     <a:lstStyle/>
                     <a:p>
                       <a:r>
-                        <a:rPr lang="de-DE" dirty="0"/>
+                        <a:rPr lang="de-DE"/>
                         <a:t>GPS-Koordinaten</a:t>
                       </a:r>
                     </a:p>
@@ -27826,14 +28934,14 @@
                     <a:lstStyle/>
                     <a:p>
                       <a:r>
-                        <a:rPr lang="de-DE" dirty="0"/>
+                        <a:rPr lang="de-DE"/>
                         <a:t>_</a:t>
                       </a:r>
                       <a:r>
-                        <a:rPr lang="de-DE" dirty="0" err="1"/>
+                        <a:rPr lang="de-DE" err="1"/>
                         <a:t>address</a:t>
                       </a:r>
-                      <a:endParaRPr lang="de-DE" dirty="0"/>
+                      <a:endParaRPr lang="de-DE"/>
                     </a:p>
                   </a:txBody>
                   <a:tcPr/>
@@ -27844,7 +28952,7 @@
                     <a:lstStyle/>
                     <a:p>
                       <a:r>
-                        <a:rPr lang="de-DE" dirty="0"/>
+                        <a:rPr lang="de-DE"/>
                         <a:t>Adresse des Nutzers</a:t>
                       </a:r>
                     </a:p>
@@ -27864,14 +28972,14 @@
                     <a:lstStyle/>
                     <a:p>
                       <a:r>
-                        <a:rPr lang="de-DE" dirty="0"/>
+                        <a:rPr lang="de-DE"/>
                         <a:t>_</a:t>
                       </a:r>
                       <a:r>
-                        <a:rPr lang="de-DE" dirty="0" err="1"/>
+                        <a:rPr lang="de-DE" err="1"/>
                         <a:t>rating_stars</a:t>
                       </a:r>
-                      <a:endParaRPr lang="de-DE" dirty="0"/>
+                      <a:endParaRPr lang="de-DE"/>
                     </a:p>
                   </a:txBody>
                   <a:tcPr/>
@@ -27882,7 +28990,7 @@
                     <a:lstStyle/>
                     <a:p>
                       <a:r>
-                        <a:rPr lang="de-DE" dirty="0"/>
+                        <a:rPr lang="de-DE"/>
                         <a:t>Bewertungen</a:t>
                       </a:r>
                     </a:p>
@@ -28223,186 +29331,186 @@
           <a:lstStyle/>
           <a:p>
             <a:r>
-              <a:rPr lang="de-DE" dirty="0"/>
+              <a:rPr lang="de-DE"/>
               <a:t>Laufzeit </a:t>
             </a:r>
             <a:r>
-              <a:rPr lang="de-DE" dirty="0" err="1"/>
+              <a:rPr lang="de-DE" err="1"/>
               <a:t>get_groupmembers</a:t>
             </a:r>
             <a:r>
-              <a:rPr lang="de-DE" dirty="0"/>
+              <a:rPr lang="de-DE"/>
               <a:t>:</a:t>
             </a:r>
           </a:p>
           <a:p>
             <a:r>
-              <a:rPr lang="de-DE" dirty="0"/>
+              <a:rPr lang="de-DE"/>
               <a:t>	</a:t>
             </a:r>
             <a:r>
-              <a:rPr lang="de-DE" i="1" dirty="0"/>
+              <a:rPr lang="de-DE" i="1"/>
               <a:t>Θ(n) as the </a:t>
             </a:r>
             <a:r>
-              <a:rPr lang="de-DE" i="1" dirty="0" err="1"/>
+              <a:rPr lang="de-DE" i="1" err="1"/>
               <a:t>entire</a:t>
             </a:r>
             <a:r>
-              <a:rPr lang="de-DE" i="1" dirty="0"/>
+              <a:rPr lang="de-DE" i="1"/>
               <a:t> </a:t>
             </a:r>
             <a:r>
-              <a:rPr lang="de-DE" i="1" dirty="0" err="1"/>
+              <a:rPr lang="de-DE" i="1" err="1"/>
               <a:t>dictionary</a:t>
             </a:r>
             <a:r>
-              <a:rPr lang="de-DE" i="1" dirty="0"/>
+              <a:rPr lang="de-DE" i="1"/>
               <a:t> </a:t>
             </a:r>
             <a:r>
-              <a:rPr lang="de-DE" i="1" dirty="0" err="1"/>
+              <a:rPr lang="de-DE" i="1" err="1"/>
               <a:t>is</a:t>
             </a:r>
             <a:r>
-              <a:rPr lang="de-DE" i="1" dirty="0"/>
+              <a:rPr lang="de-DE" i="1"/>
               <a:t> </a:t>
             </a:r>
             <a:r>
-              <a:rPr lang="de-DE" i="1" dirty="0" err="1"/>
+              <a:rPr lang="de-DE" i="1" err="1"/>
               <a:t>iterated</a:t>
             </a:r>
             <a:r>
-              <a:rPr lang="de-DE" i="1" dirty="0"/>
+              <a:rPr lang="de-DE" i="1"/>
               <a:t> </a:t>
             </a:r>
             <a:r>
-              <a:rPr lang="de-DE" i="1" dirty="0" err="1"/>
+              <a:rPr lang="de-DE" i="1" err="1"/>
               <a:t>through</a:t>
             </a:r>
             <a:r>
-              <a:rPr lang="de-DE" i="1" dirty="0"/>
+              <a:rPr lang="de-DE" i="1"/>
               <a:t> </a:t>
             </a:r>
             <a:r>
-              <a:rPr lang="de-DE" i="1" dirty="0" err="1"/>
+              <a:rPr lang="de-DE" i="1" err="1"/>
               <a:t>once</a:t>
             </a:r>
             <a:r>
-              <a:rPr lang="de-DE" i="1" dirty="0"/>
+              <a:rPr lang="de-DE" i="1"/>
               <a:t>.</a:t>
             </a:r>
             <a:br>
-              <a:rPr lang="de-DE" i="1" dirty="0"/>
+              <a:rPr lang="de-DE" i="1"/>
             </a:br>
             <a:r>
-              <a:rPr lang="de-DE" i="1" dirty="0"/>
+              <a:rPr lang="de-DE" i="1"/>
               <a:t>	Ω(1) as it </a:t>
             </a:r>
             <a:r>
-              <a:rPr lang="de-DE" i="1" dirty="0" err="1"/>
+              <a:rPr lang="de-DE" i="1" err="1"/>
               <a:t>can</a:t>
             </a:r>
             <a:r>
-              <a:rPr lang="de-DE" i="1" dirty="0"/>
+              <a:rPr lang="de-DE" i="1"/>
               <a:t> happen </a:t>
             </a:r>
             <a:r>
-              <a:rPr lang="de-DE" i="1" dirty="0" err="1"/>
+              <a:rPr lang="de-DE" i="1" err="1"/>
               <a:t>that</a:t>
             </a:r>
             <a:r>
-              <a:rPr lang="de-DE" i="1" dirty="0"/>
+              <a:rPr lang="de-DE" i="1"/>
               <a:t> the </a:t>
             </a:r>
             <a:r>
-              <a:rPr lang="de-DE" i="1" dirty="0" err="1"/>
+              <a:rPr lang="de-DE" i="1" err="1"/>
               <a:t>user</a:t>
             </a:r>
             <a:r>
-              <a:rPr lang="de-DE" i="1" dirty="0"/>
+              <a:rPr lang="de-DE" i="1"/>
               <a:t> </a:t>
             </a:r>
             <a:r>
-              <a:rPr lang="de-DE" i="1" dirty="0" err="1"/>
+              <a:rPr lang="de-DE" i="1" err="1"/>
               <a:t>is</a:t>
             </a:r>
             <a:r>
-              <a:rPr lang="de-DE" i="1" dirty="0"/>
+              <a:rPr lang="de-DE" i="1"/>
               <a:t> not </a:t>
             </a:r>
             <a:r>
-              <a:rPr lang="de-DE" i="1" dirty="0" err="1"/>
+              <a:rPr lang="de-DE" i="1" err="1"/>
               <a:t>found</a:t>
             </a:r>
             <a:r>
-              <a:rPr lang="de-DE" i="1" dirty="0"/>
+              <a:rPr lang="de-DE" i="1"/>
               <a:t> </a:t>
             </a:r>
             <a:r>
-              <a:rPr lang="de-DE" i="1" dirty="0" err="1"/>
+              <a:rPr lang="de-DE" i="1" err="1"/>
               <a:t>or</a:t>
             </a:r>
             <a:r>
-              <a:rPr lang="de-DE" i="1" dirty="0"/>
+              <a:rPr lang="de-DE" i="1"/>
               <a:t> </a:t>
             </a:r>
             <a:r>
-              <a:rPr lang="de-DE" i="1" dirty="0" err="1"/>
+              <a:rPr lang="de-DE" i="1" err="1"/>
               <a:t>has</a:t>
             </a:r>
             <a:r>
-              <a:rPr lang="de-DE" i="1" dirty="0"/>
+              <a:rPr lang="de-DE" i="1"/>
               <a:t> 	</a:t>
             </a:r>
             <a:r>
-              <a:rPr lang="de-DE" i="1" dirty="0" err="1"/>
+              <a:rPr lang="de-DE" i="1" err="1"/>
               <a:t>no</a:t>
             </a:r>
             <a:r>
-              <a:rPr lang="de-DE" i="1" dirty="0"/>
+              <a:rPr lang="de-DE" i="1"/>
               <a:t> </a:t>
             </a:r>
             <a:r>
-              <a:rPr lang="de-DE" i="1" dirty="0" err="1"/>
+              <a:rPr lang="de-DE" i="1" err="1"/>
               <a:t>group</a:t>
             </a:r>
             <a:r>
-              <a:rPr lang="de-DE" i="1" dirty="0"/>
+              <a:rPr lang="de-DE" i="1"/>
               <a:t>, </a:t>
             </a:r>
             <a:r>
-              <a:rPr lang="de-DE" i="1" dirty="0" err="1"/>
+              <a:rPr lang="de-DE" i="1" err="1"/>
               <a:t>which</a:t>
             </a:r>
             <a:r>
-              <a:rPr lang="de-DE" i="1" dirty="0"/>
+              <a:rPr lang="de-DE" i="1"/>
               <a:t> </a:t>
             </a:r>
             <a:r>
-              <a:rPr lang="de-DE" i="1" dirty="0" err="1"/>
+              <a:rPr lang="de-DE" i="1" err="1"/>
               <a:t>reults</a:t>
             </a:r>
             <a:r>
-              <a:rPr lang="de-DE" i="1" dirty="0"/>
+              <a:rPr lang="de-DE" i="1"/>
               <a:t> in </a:t>
             </a:r>
             <a:r>
-              <a:rPr lang="de-DE" i="1" dirty="0" err="1"/>
+              <a:rPr lang="de-DE" i="1" err="1"/>
               <a:t>outputting</a:t>
             </a:r>
             <a:r>
-              <a:rPr lang="de-DE" i="1" dirty="0"/>
+              <a:rPr lang="de-DE" i="1"/>
               <a:t> </a:t>
             </a:r>
             <a:r>
-              <a:rPr lang="de-DE" i="1" dirty="0" err="1"/>
+              <a:rPr lang="de-DE" i="1" err="1"/>
               <a:t>nothing</a:t>
             </a:r>
-            <a:endParaRPr lang="de-DE" dirty="0"/>
-          </a:p>
-          <a:p>
-            <a:endParaRPr lang="de-DE" dirty="0"/>
+            <a:endParaRPr lang="de-DE"/>
+          </a:p>
+          <a:p>
+            <a:endParaRPr lang="de-DE"/>
           </a:p>
         </p:txBody>
       </p:sp>
@@ -29970,14 +31078,6 @@
 </file>
 
 <file path=customXml/item1.xml><?xml version="1.0" encoding="utf-8"?>
-<p:properties xmlns:p="http://schemas.microsoft.com/office/2006/metadata/properties" xmlns:xsi="http://www.w3.org/2001/XMLSchema-instance" xmlns:pc="http://schemas.microsoft.com/office/infopath/2007/PartnerControls">
-  <documentManagement>
-    <_activity xmlns="7d3fc6f4-42e7-4607-a088-e4a0245689f6" xsi:nil="true"/>
-  </documentManagement>
-</p:properties>
-</file>
-
-<file path=customXml/item2.xml><?xml version="1.0" encoding="utf-8"?>
 <?mso-contentType ?>
 <FormTemplates xmlns="http://schemas.microsoft.com/sharepoint/v3/contenttype/forms">
   <Display>DocumentLibraryForm</Display>
@@ -29986,7 +31086,7 @@
 </FormTemplates>
 </file>
 
-<file path=customXml/item3.xml><?xml version="1.0" encoding="utf-8"?>
+<file path=customXml/item2.xml><?xml version="1.0" encoding="utf-8"?>
 <ct:contentTypeSchema xmlns:ct="http://schemas.microsoft.com/office/2006/metadata/contentType" xmlns:ma="http://schemas.microsoft.com/office/2006/metadata/properties/metaAttributes" ct:_="" ma:_="" ma:contentTypeName="Dokument" ma:contentTypeID="0x010100C39CA295DDE6914DBC597FAF19EB36C9" ma:contentTypeVersion="5" ma:contentTypeDescription="Ein neues Dokument erstellen." ma:contentTypeScope="" ma:versionID="241bc12e33932e746bb2a6c4ca3ea7c0">
   <xsd:schema xmlns:xsd="http://www.w3.org/2001/XMLSchema" xmlns:xs="http://www.w3.org/2001/XMLSchema" xmlns:p="http://schemas.microsoft.com/office/2006/metadata/properties" xmlns:ns3="7d3fc6f4-42e7-4607-a088-e4a0245689f6" targetNamespace="http://schemas.microsoft.com/office/2006/metadata/properties" ma:root="true" ma:fieldsID="271ab882ef85d5c0d47bbe2ec62a0e7d" ns3:_="">
     <xsd:import namespace="7d3fc6f4-42e7-4607-a088-e4a0245689f6"/>
@@ -30136,23 +31236,15 @@
 </ct:contentTypeSchema>
 </file>
 
-<file path=customXml/itemProps1.xml><?xml version="1.0" encoding="utf-8"?>
-<ds:datastoreItem xmlns:ds="http://schemas.openxmlformats.org/officeDocument/2006/customXml" ds:itemID="{56C7A77B-2856-4497-8FF7-78E993CCBACD}">
-  <ds:schemaRefs>
-    <ds:schemaRef ds:uri="http://purl.org/dc/elements/1.1/"/>
-    <ds:schemaRef ds:uri="http://purl.org/dc/dcmitype/"/>
-    <ds:schemaRef ds:uri="http://schemas.microsoft.com/office/2006/metadata/properties"/>
-    <ds:schemaRef ds:uri="http://schemas.microsoft.com/office/2006/documentManagement/types"/>
-    <ds:schemaRef ds:uri="http://purl.org/dc/terms/"/>
-    <ds:schemaRef ds:uri="http://schemas.microsoft.com/office/infopath/2007/PartnerControls"/>
-    <ds:schemaRef ds:uri="http://schemas.openxmlformats.org/package/2006/metadata/core-properties"/>
-    <ds:schemaRef ds:uri="7d3fc6f4-42e7-4607-a088-e4a0245689f6"/>
-    <ds:schemaRef ds:uri="http://www.w3.org/XML/1998/namespace"/>
-  </ds:schemaRefs>
-</ds:datastoreItem>
+<file path=customXml/item3.xml><?xml version="1.0" encoding="utf-8"?>
+<p:properties xmlns:p="http://schemas.microsoft.com/office/2006/metadata/properties" xmlns:xsi="http://www.w3.org/2001/XMLSchema-instance" xmlns:pc="http://schemas.microsoft.com/office/infopath/2007/PartnerControls">
+  <documentManagement>
+    <_activity xmlns="7d3fc6f4-42e7-4607-a088-e4a0245689f6" xsi:nil="true"/>
+  </documentManagement>
+</p:properties>
 </file>
 
-<file path=customXml/itemProps2.xml><?xml version="1.0" encoding="utf-8"?>
+<file path=customXml/itemProps1.xml><?xml version="1.0" encoding="utf-8"?>
 <ds:datastoreItem xmlns:ds="http://schemas.openxmlformats.org/officeDocument/2006/customXml" ds:itemID="{7409CB52-1095-4C6E-8C36-86764B6D2609}">
   <ds:schemaRefs>
     <ds:schemaRef ds:uri="http://schemas.microsoft.com/sharepoint/v3/contenttype/forms"/>
@@ -30160,20 +31252,36 @@
 </ds:datastoreItem>
 </file>
 
-<file path=customXml/itemProps3.xml><?xml version="1.0" encoding="utf-8"?>
+<file path=customXml/itemProps2.xml><?xml version="1.0" encoding="utf-8"?>
 <ds:datastoreItem xmlns:ds="http://schemas.openxmlformats.org/officeDocument/2006/customXml" ds:itemID="{DEEE77AB-D661-423E-AB86-47E1C28ABF1B}">
   <ds:schemaRefs>
-    <ds:schemaRef ds:uri="http://schemas.microsoft.com/office/2006/metadata/contentType"/>
-    <ds:schemaRef ds:uri="http://schemas.microsoft.com/office/2006/metadata/properties/metaAttributes"/>
-    <ds:schemaRef ds:uri="http://www.w3.org/2001/XMLSchema"/>
-    <ds:schemaRef ds:uri="http://schemas.microsoft.com/office/2006/metadata/properties"/>
     <ds:schemaRef ds:uri="7d3fc6f4-42e7-4607-a088-e4a0245689f6"/>
-    <ds:schemaRef ds:uri="http://schemas.microsoft.com/office/2006/documentManagement/types"/>
-    <ds:schemaRef ds:uri="http://schemas.microsoft.com/office/infopath/2007/PartnerControls"/>
-    <ds:schemaRef ds:uri="http://schemas.openxmlformats.org/package/2006/metadata/core-properties"/>
     <ds:schemaRef ds:uri="http://purl.org/dc/elements/1.1/"/>
     <ds:schemaRef ds:uri="http://purl.org/dc/terms/"/>
     <ds:schemaRef ds:uri="http://schemas.microsoft.com/internal/obd"/>
+    <ds:schemaRef ds:uri="http://schemas.microsoft.com/office/2006/documentManagement/types"/>
+    <ds:schemaRef ds:uri="http://schemas.microsoft.com/office/2006/metadata/contentType"/>
+    <ds:schemaRef ds:uri="http://schemas.microsoft.com/office/2006/metadata/properties"/>
+    <ds:schemaRef ds:uri="http://schemas.microsoft.com/office/2006/metadata/properties/metaAttributes"/>
+    <ds:schemaRef ds:uri="http://schemas.microsoft.com/office/infopath/2007/PartnerControls"/>
+    <ds:schemaRef ds:uri="http://schemas.openxmlformats.org/package/2006/metadata/core-properties"/>
+    <ds:schemaRef ds:uri="http://www.w3.org/2001/XMLSchema"/>
+  </ds:schemaRefs>
+</ds:datastoreItem>
+</file>
+
+<file path=customXml/itemProps3.xml><?xml version="1.0" encoding="utf-8"?>
+<ds:datastoreItem xmlns:ds="http://schemas.openxmlformats.org/officeDocument/2006/customXml" ds:itemID="{56C7A77B-2856-4497-8FF7-78E993CCBACD}">
+  <ds:schemaRefs>
+    <ds:schemaRef ds:uri="http://purl.org/dc/elements/1.1/"/>
+    <ds:schemaRef ds:uri="http://purl.org/dc/terms/"/>
+    <ds:schemaRef ds:uri="http://www.w3.org/XML/1998/namespace"/>
+    <ds:schemaRef ds:uri="http://schemas.openxmlformats.org/package/2006/metadata/core-properties"/>
+    <ds:schemaRef ds:uri="http://purl.org/dc/dcmitype/"/>
+    <ds:schemaRef ds:uri="http://schemas.microsoft.com/office/2006/documentManagement/types"/>
+    <ds:schemaRef ds:uri="http://schemas.microsoft.com/office/infopath/2007/PartnerControls"/>
+    <ds:schemaRef ds:uri="7d3fc6f4-42e7-4607-a088-e4a0245689f6"/>
+    <ds:schemaRef ds:uri="http://schemas.microsoft.com/office/2006/metadata/properties"/>
   </ds:schemaRefs>
 </ds:datastoreItem>
 </file>